--- a/Planning docs/Slides/lesson-4-3-teacher-slides.pptx
+++ b/Planning docs/Slides/lesson-4-3-teacher-slides.pptx
@@ -20,9 +20,10 @@
     <p:sldId id="268" r:id="rId14"/>
     <p:sldId id="269" r:id="rId15"/>
     <p:sldId id="270" r:id="rId16"/>
+    <p:sldId id="271" r:id="rId17"/>
   </p:sldIdLst>
   <p:notesMasterIdLst>
-    <p:notesMasterId r:id="rId17"/>
+    <p:notesMasterId r:id="rId18"/>
   </p:notesMasterIdLst>
   <p:sldSz cx="9144000" cy="5143500"/>
   <p:notesSz cx="5143500" cy="9144000"/>
@@ -516,7 +517,7 @@
           <a:p>
             <a:r>
               <a:rPr lang="en-US" dirty="0"/>
-              <a:t>Title slide for Week 4 Day 3. Extension Week.</a:t>
+              <a:t>Lesson 4.3. Reading: Extension Text.</a:t>
             </a:r>
             <a:endParaRPr lang="en-US" dirty="0"/>
           </a:p>
@@ -604,7 +605,7 @@
           <a:p>
             <a:r>
               <a:rPr lang="en-US" dirty="0"/>
-              <a:t>Review morphology focus. Have students identify the base word and affix in each example.</a:t>
+              <a:t>Each word appears in the chapters read this week, in the author’s own sentence.</a:t>
             </a:r>
             <a:endParaRPr lang="en-US" dirty="0"/>
           </a:p>
@@ -692,7 +693,7 @@
           <a:p>
             <a:r>
               <a:rPr lang="en-US" dirty="0"/>
-              <a:t>Go through each vocabulary word. For flip cards, have students guess the definition before revealing.</a:t>
+              <a:t>Answers: california, texas., arthur, new</a:t>
             </a:r>
             <a:endParaRPr lang="en-US" dirty="0"/>
           </a:p>
@@ -780,7 +781,7 @@
           <a:p>
             <a:r>
               <a:rPr lang="en-US" dirty="0"/>
-              <a:t>Give students time to sort the words. Use the chat or paper to organize.</a:t>
+              <a:t>Answers: california, texas., arthur, new</a:t>
             </a:r>
             <a:endParaRPr lang="en-US" dirty="0"/>
           </a:p>
@@ -868,7 +869,7 @@
           <a:p>
             <a:r>
               <a:rPr lang="en-US" dirty="0"/>
-              <a:t>Review each column. Ask: what pattern do you see in each group?</a:t>
+              <a:t>ai: paint, stain | ay: tray, spray | oa: toast, groan | ow: slow, throw</a:t>
             </a:r>
             <a:endParaRPr lang="en-US" dirty="0"/>
           </a:p>
@@ -956,7 +957,7 @@
           <a:p>
             <a:r>
               <a:rPr lang="en-US" dirty="0"/>
-              <a:t>Reading focus slide. Use pause-and-think questions during reading. Copywork can be done after reading.</a:t>
+              <a:t>ai: paint, stain | ay: tray, spray | oa: toast, groan | ow: slow, throw</a:t>
             </a:r>
             <a:endParaRPr lang="en-US" dirty="0"/>
           </a:p>
@@ -1044,7 +1045,7 @@
           <a:p>
             <a:r>
               <a:rPr lang="en-US" dirty="0"/>
-              <a:t>Transition to the writing workshop assignment in Canvas.</a:t>
+              <a:t>Read the chapters, then return to the pause questions.</a:t>
             </a:r>
             <a:endParaRPr lang="en-US" dirty="0"/>
           </a:p>
@@ -1068,6 +1069,94 @@
             <a:fld id="{F7021451-1387-4CA6-816F-3879F97B5CBC}" type="slidenum">
               <a:rPr lang="en-US"/>
               <a:t>15</a:t>
+            </a:fld>
+            <a:endParaRPr lang="en-US"/>
+          </a:p>
+        </p:txBody>
+      </p:sp>
+    </p:spTree>
+    <p:extLst>
+      <p:ext uri="{BB962C8B-B14F-4D97-AF65-F5344CB8AC3E}">
+        <p14:creationId xmlns:p14="http://schemas.microsoft.com/office/powerpoint/2010/main" val="1024086991"/>
+      </p:ext>
+    </p:extLst>
+  </p:cSld>
+  <p:clrMapOvr>
+    <a:masterClrMapping/>
+  </p:clrMapOvr>
+</p:notes>
+</file>
+
+<file path=ppt/notesSlides/notesSlide16.xml><?xml version="1.0" encoding="utf-8"?>
+<p:notes xmlns:a="http://schemas.openxmlformats.org/drawingml/2006/main" xmlns:r="http://schemas.openxmlformats.org/officeDocument/2006/relationships" xmlns:p="http://schemas.openxmlformats.org/presentationml/2006/main">
+  <p:cSld>
+    <p:spTree>
+      <p:nvGrpSpPr>
+        <p:cNvPr id="1" name=""/>
+        <p:cNvGrpSpPr/>
+        <p:nvPr/>
+      </p:nvGrpSpPr>
+      <p:grpSpPr>
+        <a:xfrm>
+          <a:off x="0" y="0"/>
+          <a:ext cx="0" cy="0"/>
+          <a:chOff x="0" y="0"/>
+          <a:chExt cx="0" cy="0"/>
+        </a:xfrm>
+      </p:grpSpPr>
+      <p:sp>
+        <p:nvSpPr>
+          <p:cNvPr id="2" name="Slide Image Placeholder 1"/>
+          <p:cNvSpPr>
+            <a:spLocks noGrp="1" noRot="1" noChangeAspect="1"/>
+          </p:cNvSpPr>
+          <p:nvPr>
+            <p:ph type="sldImg"/>
+          </p:nvPr>
+        </p:nvSpPr>
+        <p:spPr/>
+      </p:sp>
+      <p:sp>
+        <p:nvSpPr>
+          <p:cNvPr id="3" name="Notes Placeholder 2"/>
+          <p:cNvSpPr>
+            <a:spLocks noGrp="1"/>
+          </p:cNvSpPr>
+          <p:nvPr>
+            <p:ph type="body" idx="1"/>
+          </p:nvPr>
+        </p:nvSpPr>
+        <p:spPr/>
+        <p:txBody>
+          <a:bodyPr/>
+          <a:lstStyle/>
+          <a:p>
+            <a:r>
+              <a:rPr lang="en-US" dirty="0"/>
+              <a:t>Writer’s Workshop stage for the week.</a:t>
+            </a:r>
+            <a:endParaRPr lang="en-US" dirty="0"/>
+          </a:p>
+        </p:txBody>
+      </p:sp>
+      <p:sp>
+        <p:nvSpPr>
+          <p:cNvPr id="4" name="Slide Number Placeholder 3"/>
+          <p:cNvSpPr>
+            <a:spLocks noGrp="1"/>
+          </p:cNvSpPr>
+          <p:nvPr>
+            <p:ph type="sldNum" sz="quarter" idx="10"/>
+          </p:nvPr>
+        </p:nvSpPr>
+        <p:spPr/>
+        <p:txBody>
+          <a:bodyPr/>
+          <a:lstStyle/>
+          <a:p>
+            <a:fld id="{F7021451-1387-4CA6-816F-3879F97B5CBC}" type="slidenum">
+              <a:rPr lang="en-US"/>
+              <a:t>16</a:t>
             </a:fld>
             <a:endParaRPr lang="en-US"/>
           </a:p>
@@ -1132,7 +1221,7 @@
           <a:p>
             <a:r>
               <a:rPr lang="en-US" dirty="0"/>
-              <a:t>Read the prompt aloud once. Give students about 1 minute to read it again silently and think. Remind them: there is no wrong answer — just write what comes to mind. Advance to the writing slide when ready.</a:t>
+              <a:t>Read the prompt aloud. Give students a moment to think before writing.</a:t>
             </a:r>
             <a:endParaRPr lang="en-US" dirty="0"/>
           </a:p>
@@ -1220,7 +1309,7 @@
           <a:p>
             <a:r>
               <a:rPr lang="en-US" dirty="0"/>
-              <a:t>Set a 5-minute timer. Walk the room quietly. If a student stops, gently encourage them: "Keep writing — even one more sentence." The goal is sustained writing, not perfection. Do not interrupt to correct spelling or grammar during this time.</a:t>
+              <a:t>Five minutes of sustained writing. Stamina over polish. Do not correct spelling now.</a:t>
             </a:r>
             <a:endParaRPr lang="en-US" dirty="0"/>
           </a:p>
@@ -1308,7 +1397,7 @@
           <a:p>
             <a:r>
               <a:rPr lang="en-US" dirty="0"/>
-              <a:t>Set a 1-minute timer. Remind students: we are only fixing ONE thing today — Did I explain how he changed, not just say he changed?. They should also do a quick conventions check (capitals, punctuation, spelling). They do NOT need to rewrite — just fix and improve. Revision = improving ideas; Editing = fixing conventions. Keep them separate in your language.</a:t>
+              <a:t>One fix only. Editing is conventions; revision is ideas. Name which one you are asking for.</a:t>
             </a:r>
             <a:endParaRPr lang="en-US" dirty="0"/>
           </a:p>
@@ -1396,7 +1485,7 @@
           <a:p>
             <a:r>
               <a:rPr lang="en-US" dirty="0"/>
-              <a:t>Call on 3-5 students to share. Respond with genuine interest: "I love how you described that" or "That's a really interesting idea." Avoid correcting grammar or spelling during share time — this is about celebrating writing. If time is short, have 2-3 students share in chat instead.</a:t>
+              <a:t>Two or three volunteers. Praise something specific in each.</a:t>
             </a:r>
             <a:endParaRPr lang="en-US" dirty="0"/>
           </a:p>
@@ -1484,7 +1573,7 @@
           <a:p>
             <a:r>
               <a:rPr lang="en-US" dirty="0"/>
-              <a:t>Review the big question and reading lens with students before reading.</a:t>
+              <a:t>Reading lens: Good readers compare a story with related informational text . When you read a made-up story and a real article about the same topic, you can find what is the same and what is different.</a:t>
             </a:r>
             <a:endParaRPr lang="en-US" dirty="0"/>
           </a:p>
@@ -1572,7 +1661,8 @@
           <a:p>
             <a:r>
               <a:rPr lang="en-US" dirty="0"/>
-              <a:t>Read the model sentence aloud. Ask students: what do you notice about the punctuation and capitalization?</a:t>
+              <a:t>Corrected: Corrected: 
+Look for: The Famous Museum of Art had been losing paintings , and Mr. Dart, the director , was terribly upset .</a:t>
             </a:r>
             <a:endParaRPr lang="en-US" dirty="0"/>
           </a:p>
@@ -1660,7 +1750,8 @@
           <a:p>
             <a:r>
               <a:rPr lang="en-US" dirty="0"/>
-              <a:t>Give students 1-2 minutes to fix the sentence. Walk the room and check.</a:t>
+              <a:t>Corrected: Corrected: 
+Look for: The Famous Museum of Art had been losing paintings , and Mr. Dart, the director , was terribly upset .</a:t>
             </a:r>
             <a:endParaRPr lang="en-US" dirty="0"/>
           </a:p>
@@ -1748,7 +1839,7 @@
           <a:p>
             <a:r>
               <a:rPr lang="en-US" dirty="0"/>
-              <a:t>Reveal the corrected version. Point out each fix: capitalization, punctuation, spelling.</a:t>
+              <a:t>Break the word into base + word part. Ask what the part adds to the meaning.</a:t>
             </a:r>
             <a:endParaRPr lang="en-US" dirty="0"/>
           </a:p>
@@ -2103,7 +2194,7 @@
     <p:bg>
       <p:bgPr>
         <a:solidFill>
-          <a:srgbClr val="1A6B3D"/>
+          <a:srgbClr val="0E1C42"/>
         </a:solidFill>
       </p:bgPr>
     </p:bg>
@@ -2129,8 +2220,8 @@
         </p:nvSpPr>
         <p:spPr>
           <a:xfrm>
-            <a:off x="457200" y="914400"/>
-            <a:ext cx="8229600" cy="1097280"/>
+            <a:off x="0" y="822960"/>
+            <a:ext cx="9144000" cy="822960"/>
           </a:xfrm>
           <a:prstGeom prst="rect">
             <a:avLst/>
@@ -2146,7 +2237,43 @@
               <a:buNone/>
             </a:pPr>
             <a:r>
-              <a:rPr lang="en-US" sz="4000" b="1" dirty="0">
+              <a:rPr lang="en-US" sz="5200" dirty="0">
+                <a:solidFill>
+                  <a:srgbClr val="000000"/>
+                </a:solidFill>
+              </a:rPr>
+              <a:t>⭐</a:t>
+            </a:r>
+            <a:endParaRPr lang="en-US" sz="5200" dirty="0"/>
+          </a:p>
+        </p:txBody>
+      </p:sp>
+      <p:sp>
+        <p:nvSpPr>
+          <p:cNvPr id="3" name="Text 1"/>
+          <p:cNvSpPr/>
+          <p:nvPr/>
+        </p:nvSpPr>
+        <p:spPr>
+          <a:xfrm>
+            <a:off x="457200" y="1691640"/>
+            <a:ext cx="8229600" cy="566928"/>
+          </a:xfrm>
+          <a:prstGeom prst="rect">
+            <a:avLst/>
+          </a:prstGeom>
+          <a:noFill/>
+          <a:ln/>
+        </p:spPr>
+        <p:txBody>
+          <a:bodyPr wrap="square" lIns="0" tIns="0" rIns="0" bIns="0" rtlCol="0" anchor="ctr"/>
+          <a:lstStyle/>
+          <a:p>
+            <a:pPr algn="ctr" indent="0" marL="0">
+              <a:buNone/>
+            </a:pPr>
+            <a:r>
+              <a:rPr lang="en-US" sz="3400" b="1" dirty="0">
                 <a:solidFill>
                   <a:srgbClr val="FFFFFF"/>
                 </a:solidFill>
@@ -2154,22 +2281,22 @@
                 <a:ea typeface="Calibri" pitchFamily="34" charset="-122"/>
                 <a:cs typeface="Calibri" pitchFamily="34" charset="-120"/>
               </a:rPr>
-              <a:t>🔍  Week 4 · Day 3</a:t>
-            </a:r>
-            <a:endParaRPr lang="en-US" sz="4000" dirty="0"/>
-          </a:p>
-        </p:txBody>
-      </p:sp>
-      <p:sp>
-        <p:nvSpPr>
-          <p:cNvPr id="3" name="Text 1"/>
-          <p:cNvSpPr/>
-          <p:nvPr/>
-        </p:nvSpPr>
-        <p:spPr>
-          <a:xfrm>
-            <a:off x="457200" y="2103120"/>
-            <a:ext cx="8229600" cy="731520"/>
+              <a:t>Flat Stanley</a:t>
+            </a:r>
+            <a:endParaRPr lang="en-US" sz="3400" dirty="0"/>
+          </a:p>
+        </p:txBody>
+      </p:sp>
+      <p:sp>
+        <p:nvSpPr>
+          <p:cNvPr id="4" name="Text 2"/>
+          <p:cNvSpPr/>
+          <p:nvPr/>
+        </p:nvSpPr>
+        <p:spPr>
+          <a:xfrm>
+            <a:off x="457200" y="2331720"/>
+            <a:ext cx="8229600" cy="411480"/>
           </a:xfrm>
           <a:prstGeom prst="rect">
             <a:avLst/>
@@ -2185,30 +2312,30 @@
               <a:buNone/>
             </a:pPr>
             <a:r>
-              <a:rPr lang="en-US" sz="1800" dirty="0">
-                <a:solidFill>
-                  <a:srgbClr val="5CB85C"/>
-                </a:solidFill>
-                <a:latin typeface="Calibri" pitchFamily="34" charset="0"/>
-                <a:ea typeface="Calibri" pitchFamily="34" charset="-122"/>
-                <a:cs typeface="Calibri" pitchFamily="34" charset="-120"/>
-              </a:rPr>
-              <a:t>Extension Week — Lesson 4.3</a:t>
-            </a:r>
-            <a:endParaRPr lang="en-US" sz="1800" dirty="0"/>
-          </a:p>
-        </p:txBody>
-      </p:sp>
-      <p:sp>
-        <p:nvSpPr>
-          <p:cNvPr id="4" name="Text 2"/>
-          <p:cNvSpPr/>
-          <p:nvPr/>
-        </p:nvSpPr>
-        <p:spPr>
-          <a:xfrm>
-            <a:off x="457200" y="4114800"/>
-            <a:ext cx="8229600" cy="457200"/>
+              <a:rPr lang="en-US" sz="2000" dirty="0">
+                <a:solidFill>
+                  <a:srgbClr val="55C8E8"/>
+                </a:solidFill>
+                <a:latin typeface="Calibri" pitchFamily="34" charset="0"/>
+                <a:ea typeface="Calibri" pitchFamily="34" charset="-122"/>
+                <a:cs typeface="Calibri" pitchFamily="34" charset="-120"/>
+              </a:rPr>
+              <a:t>Lesson 4.3  ·  Extension Text</a:t>
+            </a:r>
+            <a:endParaRPr lang="en-US" sz="2000" dirty="0"/>
+          </a:p>
+        </p:txBody>
+      </p:sp>
+      <p:sp>
+        <p:nvSpPr>
+          <p:cNvPr id="5" name="Text 3"/>
+          <p:cNvSpPr/>
+          <p:nvPr/>
+        </p:nvSpPr>
+        <p:spPr>
+          <a:xfrm>
+            <a:off x="457200" y="2880360"/>
+            <a:ext cx="8229600" cy="320040"/>
           </a:xfrm>
           <a:prstGeom prst="rect">
             <a:avLst/>
@@ -2224,17 +2351,17 @@
               <a:buNone/>
             </a:pPr>
             <a:r>
-              <a:rPr lang="en-US" sz="1300" dirty="0">
-                <a:solidFill>
-                  <a:srgbClr val="AAAAAA"/>
-                </a:solidFill>
-                <a:latin typeface="Calibri" pitchFamily="34" charset="0"/>
-                <a:ea typeface="Calibri" pitchFamily="34" charset="-122"/>
-                <a:cs typeface="Calibri" pitchFamily="34" charset="-120"/>
-              </a:rPr>
-              <a:t>Optima Academy Online · 3rd Grade ELA</a:t>
-            </a:r>
-            <a:endParaRPr lang="en-US" sz="1300" dirty="0"/>
+              <a:rPr lang="en-US" sz="1400" dirty="0">
+                <a:solidFill>
+                  <a:srgbClr val="C9BCE4"/>
+                </a:solidFill>
+                <a:latin typeface="Calibri" pitchFamily="34" charset="0"/>
+                <a:ea typeface="Calibri" pitchFamily="34" charset="-122"/>
+                <a:cs typeface="Calibri" pitchFamily="34" charset="-120"/>
+              </a:rPr>
+              <a:t>Grade 3 ELA  ·  Virtue: Courage</a:t>
+            </a:r>
+            <a:endParaRPr lang="en-US" sz="1400" dirty="0"/>
           </a:p>
         </p:txBody>
       </p:sp>
@@ -2272,65 +2399,62 @@
       </p:grpSpPr>
       <p:sp>
         <p:nvSpPr>
-          <p:cNvPr id="2" name="Text 0"/>
-          <p:cNvSpPr/>
-          <p:nvPr/>
-        </p:nvSpPr>
-        <p:spPr>
-          <a:xfrm>
-            <a:off x="365760" y="164592"/>
-            <a:ext cx="8412480" cy="566928"/>
-          </a:xfrm>
-          <a:prstGeom prst="rect">
-            <a:avLst/>
-          </a:prstGeom>
-          <a:noFill/>
-          <a:ln/>
-        </p:spPr>
-        <p:txBody>
-          <a:bodyPr wrap="square" lIns="0" tIns="0" rIns="0" bIns="0" rtlCol="0" anchor="ctr"/>
-          <a:lstStyle/>
-          <a:p>
-            <a:pPr algn="l" indent="0" marL="0">
-              <a:buNone/>
-            </a:pPr>
-            <a:r>
-              <a:rPr lang="en-US" sz="2800" b="1" dirty="0">
-                <a:solidFill>
-                  <a:srgbClr val="0E1C42"/>
-                </a:solidFill>
-                <a:latin typeface="Calibri" pitchFamily="34" charset="0"/>
-                <a:ea typeface="Calibri" pitchFamily="34" charset="-122"/>
-                <a:cs typeface="Calibri" pitchFamily="34" charset="-120"/>
-              </a:rPr>
-              <a:t>🌱 Morphology: Prefix pre- means before</a:t>
-            </a:r>
-            <a:endParaRPr lang="en-US" sz="2800" dirty="0"/>
-          </a:p>
-        </p:txBody>
-      </p:sp>
-      <p:sp>
-        <p:nvSpPr>
-          <p:cNvPr id="3" name="Shape 1"/>
-          <p:cNvSpPr/>
-          <p:nvPr/>
-        </p:nvSpPr>
-        <p:spPr>
-          <a:xfrm>
-            <a:off x="365760" y="749808"/>
-            <a:ext cx="8412480" cy="0"/>
-          </a:xfrm>
-          <a:prstGeom prst="line">
-            <a:avLst/>
-          </a:prstGeom>
-          <a:noFill/>
-          <a:ln w="19050">
-            <a:solidFill>
-              <a:srgbClr val="8B6FC0"/>
-            </a:solidFill>
-            <a:prstDash val="solid"/>
-          </a:ln>
-        </p:spPr>
+          <p:cNvPr id="2" name="Shape 0"/>
+          <p:cNvSpPr/>
+          <p:nvPr/>
+        </p:nvSpPr>
+        <p:spPr>
+          <a:xfrm>
+            <a:off x="0" y="0"/>
+            <a:ext cx="9144000" cy="566928"/>
+          </a:xfrm>
+          <a:prstGeom prst="rect">
+            <a:avLst/>
+          </a:prstGeom>
+          <a:solidFill>
+            <a:srgbClr val="55C8E8"/>
+          </a:solidFill>
+          <a:ln/>
+        </p:spPr>
+      </p:sp>
+      <p:sp>
+        <p:nvSpPr>
+          <p:cNvPr id="3" name="Text 1"/>
+          <p:cNvSpPr/>
+          <p:nvPr/>
+        </p:nvSpPr>
+        <p:spPr>
+          <a:xfrm>
+            <a:off x="365760" y="54864"/>
+            <a:ext cx="8412480" cy="457200"/>
+          </a:xfrm>
+          <a:prstGeom prst="rect">
+            <a:avLst/>
+          </a:prstGeom>
+          <a:noFill/>
+          <a:ln/>
+        </p:spPr>
+        <p:txBody>
+          <a:bodyPr wrap="square" lIns="0" tIns="0" rIns="0" bIns="0" rtlCol="0" anchor="ctr"/>
+          <a:lstStyle/>
+          <a:p>
+            <a:pPr indent="0" marL="0">
+              <a:buNone/>
+            </a:pPr>
+            <a:r>
+              <a:rPr lang="en-US" sz="2200" b="1" dirty="0">
+                <a:solidFill>
+                  <a:srgbClr val="FFFFFF"/>
+                </a:solidFill>
+                <a:latin typeface="Calibri" pitchFamily="34" charset="0"/>
+                <a:ea typeface="Calibri" pitchFamily="34" charset="-122"/>
+                <a:cs typeface="Calibri" pitchFamily="34" charset="-120"/>
+              </a:rPr>
+              <a:t>🔤  Vocabulary</a:t>
+            </a:r>
+            <a:endParaRPr lang="en-US" sz="2200" dirty="0"/>
+          </a:p>
+        </p:txBody>
       </p:sp>
       <p:sp>
         <p:nvSpPr>
@@ -2340,32 +2464,32 @@
         </p:nvSpPr>
         <p:spPr>
           <a:xfrm>
-            <a:off x="457200" y="1005840"/>
-            <a:ext cx="8046720" cy="292608"/>
-          </a:xfrm>
-          <a:prstGeom prst="rect">
-            <a:avLst/>
-          </a:prstGeom>
-          <a:noFill/>
-          <a:ln/>
-        </p:spPr>
-        <p:txBody>
-          <a:bodyPr wrap="square" lIns="0" tIns="0" rIns="0" bIns="0" rtlCol="0" anchor="ctr"/>
-          <a:lstStyle/>
-          <a:p>
-            <a:pPr indent="0" marL="0">
-              <a:buNone/>
-            </a:pPr>
-            <a:r>
-              <a:rPr lang="en-US" sz="1100" b="1" spc="200" kern="0" dirty="0">
-                <a:solidFill>
-                  <a:srgbClr val="8B6FC0"/>
-                </a:solidFill>
-                <a:latin typeface="Calibri" pitchFamily="34" charset="0"/>
-                <a:ea typeface="Calibri" pitchFamily="34" charset="-122"/>
-                <a:cs typeface="Calibri" pitchFamily="34" charset="-120"/>
-              </a:rPr>
-              <a:t>WORD BUILDING</a:t>
+            <a:off x="365760" y="804672"/>
+            <a:ext cx="8229600" cy="237744"/>
+          </a:xfrm>
+          <a:prstGeom prst="rect">
+            <a:avLst/>
+          </a:prstGeom>
+          <a:noFill/>
+          <a:ln/>
+        </p:spPr>
+        <p:txBody>
+          <a:bodyPr wrap="square" lIns="0" tIns="0" rIns="0" bIns="0" rtlCol="0" anchor="ctr"/>
+          <a:lstStyle/>
+          <a:p>
+            <a:pPr indent="0" marL="0">
+              <a:buNone/>
+            </a:pPr>
+            <a:r>
+              <a:rPr lang="en-US" sz="1100" b="1" spc="100" kern="0" dirty="0">
+                <a:solidFill>
+                  <a:srgbClr val="55C8E8"/>
+                </a:solidFill>
+                <a:latin typeface="Calibri" pitchFamily="34" charset="0"/>
+                <a:ea typeface="Calibri" pitchFamily="34" charset="-122"/>
+                <a:cs typeface="Calibri" pitchFamily="34" charset="-120"/>
+              </a:rPr>
+              <a:t>THIS WEEK'S WORDS</a:t>
             </a:r>
             <a:endParaRPr lang="en-US" sz="1100" dirty="0"/>
           </a:p>
@@ -2379,16 +2503,16 @@
         </p:nvSpPr>
         <p:spPr>
           <a:xfrm>
-            <a:off x="457200" y="1371600"/>
-            <a:ext cx="8229600" cy="457200"/>
+            <a:off x="365760" y="1097280"/>
+            <a:ext cx="8412480" cy="658368"/>
           </a:xfrm>
           <a:prstGeom prst="roundRect">
             <a:avLst>
-              <a:gd name="adj" fmla="val 20000"/>
+              <a:gd name="adj" fmla="val 13889"/>
             </a:avLst>
           </a:prstGeom>
           <a:solidFill>
-            <a:srgbClr val="F0E8FF"/>
+            <a:srgbClr val="E5F7FC"/>
           </a:solidFill>
           <a:ln/>
           <a:effectLst>
@@ -2408,24 +2532,24 @@
         </p:nvSpPr>
         <p:spPr>
           <a:xfrm>
-            <a:off x="640080" y="1417320"/>
-            <a:ext cx="7863840" cy="365760"/>
-          </a:xfrm>
-          <a:prstGeom prst="rect">
-            <a:avLst/>
-          </a:prstGeom>
-          <a:noFill/>
-          <a:ln/>
-        </p:spPr>
-        <p:txBody>
-          <a:bodyPr wrap="square" lIns="0" tIns="0" rIns="0" bIns="0" rtlCol="0" anchor="ctr"/>
-          <a:lstStyle/>
-          <a:p>
-            <a:pPr indent="0" marL="0">
-              <a:buNone/>
-            </a:pPr>
-            <a:r>
-              <a:rPr lang="en-US" sz="1600" b="1" dirty="0">
+            <a:off x="594360" y="1225296"/>
+            <a:ext cx="7863840" cy="420624"/>
+          </a:xfrm>
+          <a:prstGeom prst="rect">
+            <a:avLst/>
+          </a:prstGeom>
+          <a:noFill/>
+          <a:ln/>
+        </p:spPr>
+        <p:txBody>
+          <a:bodyPr wrap="square" lIns="0" tIns="0" rIns="0" bIns="0" rtlCol="0" anchor="ctr"/>
+          <a:lstStyle/>
+          <a:p>
+            <a:pPr indent="0" marL="0">
+              <a:buNone/>
+            </a:pPr>
+            <a:r>
+              <a:rPr lang="en-US" sz="1700" b="1" dirty="0">
                 <a:solidFill>
                   <a:srgbClr val="0E1C42"/>
                 </a:solidFill>
@@ -2433,23 +2557,12 @@
                 <a:ea typeface="Calibri" pitchFamily="34" charset="-122"/>
                 <a:cs typeface="Calibri" pitchFamily="34" charset="-120"/>
               </a:rPr>
-              <a:t>school</a:t>
-            </a:r>
-            <a:pPr indent="0" marL="0">
-              <a:buNone/>
-            </a:pPr>
-            <a:r>
-              <a:rPr lang="en-US" sz="1400" dirty="0">
-                <a:solidFill>
-                  <a:srgbClr val="64748B"/>
-                </a:solidFill>
-                <a:latin typeface="Calibri" pitchFamily="34" charset="0"/>
-                <a:ea typeface="Calibri" pitchFamily="34" charset="-122"/>
-                <a:cs typeface="Calibri" pitchFamily="34" charset="-120"/>
-              </a:rPr>
-              <a:t>  ·  .</a:t>
-            </a:r>
-            <a:endParaRPr lang="en-US" sz="1600" dirty="0"/>
+              <a:t>airmail  </a:t>
+            </a:r>
+            <a:pPr indent="0" marL="0">
+              <a:buNone/>
+            </a:pPr>
+            <a:endParaRPr lang="en-US" sz="1700" dirty="0"/>
           </a:p>
         </p:txBody>
       </p:sp>
@@ -2461,16 +2574,16 @@
         </p:nvSpPr>
         <p:spPr>
           <a:xfrm>
-            <a:off x="457200" y="1901952"/>
-            <a:ext cx="8229600" cy="457200"/>
+            <a:off x="365760" y="1828800"/>
+            <a:ext cx="8412480" cy="658368"/>
           </a:xfrm>
           <a:prstGeom prst="roundRect">
             <a:avLst>
-              <a:gd name="adj" fmla="val 20000"/>
+              <a:gd name="adj" fmla="val 13889"/>
             </a:avLst>
           </a:prstGeom>
           <a:solidFill>
-            <a:srgbClr val="F0E8FF"/>
+            <a:srgbClr val="FFFFFF"/>
           </a:solidFill>
           <a:ln/>
           <a:effectLst>
@@ -2490,24 +2603,24 @@
         </p:nvSpPr>
         <p:spPr>
           <a:xfrm>
-            <a:off x="640080" y="1947672"/>
-            <a:ext cx="7863840" cy="365760"/>
-          </a:xfrm>
-          <a:prstGeom prst="rect">
-            <a:avLst/>
-          </a:prstGeom>
-          <a:noFill/>
-          <a:ln/>
-        </p:spPr>
-        <p:txBody>
-          <a:bodyPr wrap="square" lIns="0" tIns="0" rIns="0" bIns="0" rtlCol="0" anchor="ctr"/>
-          <a:lstStyle/>
-          <a:p>
-            <a:pPr indent="0" marL="0">
-              <a:buNone/>
-            </a:pPr>
-            <a:r>
-              <a:rPr lang="en-US" sz="1600" b="1" dirty="0">
+            <a:off x="594360" y="1956816"/>
+            <a:ext cx="7863840" cy="420624"/>
+          </a:xfrm>
+          <a:prstGeom prst="rect">
+            <a:avLst/>
+          </a:prstGeom>
+          <a:noFill/>
+          <a:ln/>
+        </p:spPr>
+        <p:txBody>
+          <a:bodyPr wrap="square" lIns="0" tIns="0" rIns="0" bIns="0" rtlCol="0" anchor="ctr"/>
+          <a:lstStyle/>
+          <a:p>
+            <a:pPr indent="0" marL="0">
+              <a:buNone/>
+            </a:pPr>
+            <a:r>
+              <a:rPr lang="en-US" sz="1700" b="1" dirty="0">
                 <a:solidFill>
                   <a:srgbClr val="0E1C42"/>
                 </a:solidFill>
@@ -2515,23 +2628,12 @@
                 <a:ea typeface="Calibri" pitchFamily="34" charset="-122"/>
                 <a:cs typeface="Calibri" pitchFamily="34" charset="-120"/>
               </a:rPr>
-              <a:t>view</a:t>
-            </a:r>
-            <a:pPr indent="0" marL="0">
-              <a:buNone/>
-            </a:pPr>
-            <a:r>
-              <a:rPr lang="en-US" sz="1400" dirty="0">
-                <a:solidFill>
-                  <a:srgbClr val="64748B"/>
-                </a:solidFill>
-                <a:latin typeface="Calibri" pitchFamily="34" charset="0"/>
-                <a:ea typeface="Calibri" pitchFamily="34" charset="-122"/>
-                <a:cs typeface="Calibri" pitchFamily="34" charset="-120"/>
-              </a:rPr>
-              <a:t>  ·  .</a:t>
-            </a:r>
-            <a:endParaRPr lang="en-US" sz="1600" dirty="0"/>
+              <a:t>insurance  </a:t>
+            </a:r>
+            <a:pPr indent="0" marL="0">
+              <a:buNone/>
+            </a:pPr>
+            <a:endParaRPr lang="en-US" sz="1700" dirty="0"/>
           </a:p>
         </p:txBody>
       </p:sp>
@@ -2543,16 +2645,16 @@
         </p:nvSpPr>
         <p:spPr>
           <a:xfrm>
-            <a:off x="457200" y="2432304"/>
-            <a:ext cx="8229600" cy="457200"/>
+            <a:off x="365760" y="2560320"/>
+            <a:ext cx="8412480" cy="658368"/>
           </a:xfrm>
           <a:prstGeom prst="roundRect">
             <a:avLst>
-              <a:gd name="adj" fmla="val 20000"/>
+              <a:gd name="adj" fmla="val 13889"/>
             </a:avLst>
           </a:prstGeom>
           <a:solidFill>
-            <a:srgbClr val="F0E8FF"/>
+            <a:srgbClr val="E5F7FC"/>
           </a:solidFill>
           <a:ln/>
           <a:effectLst>
@@ -2572,24 +2674,24 @@
         </p:nvSpPr>
         <p:spPr>
           <a:xfrm>
-            <a:off x="640080" y="2478024"/>
-            <a:ext cx="7863840" cy="365760"/>
-          </a:xfrm>
-          <a:prstGeom prst="rect">
-            <a:avLst/>
-          </a:prstGeom>
-          <a:noFill/>
-          <a:ln/>
-        </p:spPr>
-        <p:txBody>
-          <a:bodyPr wrap="square" lIns="0" tIns="0" rIns="0" bIns="0" rtlCol="0" anchor="ctr"/>
-          <a:lstStyle/>
-          <a:p>
-            <a:pPr indent="0" marL="0">
-              <a:buNone/>
-            </a:pPr>
-            <a:r>
-              <a:rPr lang="en-US" sz="1600" b="1" dirty="0">
+            <a:off x="594360" y="2688336"/>
+            <a:ext cx="7863840" cy="420624"/>
+          </a:xfrm>
+          <a:prstGeom prst="rect">
+            <a:avLst/>
+          </a:prstGeom>
+          <a:noFill/>
+          <a:ln/>
+        </p:spPr>
+        <p:txBody>
+          <a:bodyPr wrap="square" lIns="0" tIns="0" rIns="0" bIns="0" rtlCol="0" anchor="ctr"/>
+          <a:lstStyle/>
+          <a:p>
+            <a:pPr indent="0" marL="0">
+              <a:buNone/>
+            </a:pPr>
+            <a:r>
+              <a:rPr lang="en-US" sz="1700" b="1" dirty="0">
                 <a:solidFill>
                   <a:srgbClr val="0E1C42"/>
                 </a:solidFill>
@@ -2597,23 +2699,12 @@
                 <a:ea typeface="Calibri" pitchFamily="34" charset="-122"/>
                 <a:cs typeface="Calibri" pitchFamily="34" charset="-120"/>
               </a:rPr>
-              <a:t>pay</a:t>
-            </a:r>
-            <a:pPr indent="0" marL="0">
-              <a:buNone/>
-            </a:pPr>
-            <a:r>
-              <a:rPr lang="en-US" sz="1400" dirty="0">
-                <a:solidFill>
-                  <a:srgbClr val="64748B"/>
-                </a:solidFill>
-                <a:latin typeface="Calibri" pitchFamily="34" charset="0"/>
-                <a:ea typeface="Calibri" pitchFamily="34" charset="-122"/>
-                <a:cs typeface="Calibri" pitchFamily="34" charset="-120"/>
-              </a:rPr>
-              <a:t>  ·  .</a:t>
-            </a:r>
-            <a:endParaRPr lang="en-US" sz="1600" dirty="0"/>
+              <a:t>expensive  </a:t>
+            </a:r>
+            <a:pPr indent="0" marL="0">
+              <a:buNone/>
+            </a:pPr>
+            <a:endParaRPr lang="en-US" sz="1700" dirty="0"/>
           </a:p>
         </p:txBody>
       </p:sp>
@@ -2625,16 +2716,16 @@
         </p:nvSpPr>
         <p:spPr>
           <a:xfrm>
-            <a:off x="457200" y="2962656"/>
-            <a:ext cx="8229600" cy="457200"/>
+            <a:off x="365760" y="3291840"/>
+            <a:ext cx="8412480" cy="658368"/>
           </a:xfrm>
           <a:prstGeom prst="roundRect">
             <a:avLst>
-              <a:gd name="adj" fmla="val 20000"/>
+              <a:gd name="adj" fmla="val 13889"/>
             </a:avLst>
           </a:prstGeom>
           <a:solidFill>
-            <a:srgbClr val="F0E8FF"/>
+            <a:srgbClr val="FFFFFF"/>
           </a:solidFill>
           <a:ln/>
           <a:effectLst>
@@ -2654,24 +2745,24 @@
         </p:nvSpPr>
         <p:spPr>
           <a:xfrm>
-            <a:off x="640080" y="3008376"/>
-            <a:ext cx="7863840" cy="365760"/>
-          </a:xfrm>
-          <a:prstGeom prst="rect">
-            <a:avLst/>
-          </a:prstGeom>
-          <a:noFill/>
-          <a:ln/>
-        </p:spPr>
-        <p:txBody>
-          <a:bodyPr wrap="square" lIns="0" tIns="0" rIns="0" bIns="0" rtlCol="0" anchor="ctr"/>
-          <a:lstStyle/>
-          <a:p>
-            <a:pPr indent="0" marL="0">
-              <a:buNone/>
-            </a:pPr>
-            <a:r>
-              <a:rPr lang="en-US" sz="1600" b="1" dirty="0">
+            <a:off x="594360" y="3419856"/>
+            <a:ext cx="7863840" cy="420624"/>
+          </a:xfrm>
+          <a:prstGeom prst="rect">
+            <a:avLst/>
+          </a:prstGeom>
+          <a:noFill/>
+          <a:ln/>
+        </p:spPr>
+        <p:txBody>
+          <a:bodyPr wrap="square" lIns="0" tIns="0" rIns="0" bIns="0" rtlCol="0" anchor="ctr"/>
+          <a:lstStyle/>
+          <a:p>
+            <a:pPr indent="0" marL="0">
+              <a:buNone/>
+            </a:pPr>
+            <a:r>
+              <a:rPr lang="en-US" sz="1700" b="1" dirty="0">
                 <a:solidFill>
                   <a:srgbClr val="0E1C42"/>
                 </a:solidFill>
@@ -2679,101 +2770,12 @@
                 <a:ea typeface="Calibri" pitchFamily="34" charset="-122"/>
                 <a:cs typeface="Calibri" pitchFamily="34" charset="-120"/>
               </a:rPr>
-              <a:t>test</a:t>
-            </a:r>
-            <a:pPr indent="0" marL="0">
-              <a:buNone/>
-            </a:pPr>
-            <a:r>
-              <a:rPr lang="en-US" sz="1400" dirty="0">
-                <a:solidFill>
-                  <a:srgbClr val="64748B"/>
-                </a:solidFill>
-                <a:latin typeface="Calibri" pitchFamily="34" charset="0"/>
-                <a:ea typeface="Calibri" pitchFamily="34" charset="-122"/>
-                <a:cs typeface="Calibri" pitchFamily="34" charset="-120"/>
-              </a:rPr>
-              <a:t>  ·  .</a:t>
-            </a:r>
-            <a:endParaRPr lang="en-US" sz="1600" dirty="0"/>
-          </a:p>
-        </p:txBody>
-      </p:sp>
-      <p:sp>
-        <p:nvSpPr>
-          <p:cNvPr id="13" name="Text 11"/>
-          <p:cNvSpPr/>
-          <p:nvPr/>
-        </p:nvSpPr>
-        <p:spPr>
-          <a:xfrm>
-            <a:off x="457200" y="3493008"/>
-            <a:ext cx="8046720" cy="292608"/>
-          </a:xfrm>
-          <a:prstGeom prst="rect">
-            <a:avLst/>
-          </a:prstGeom>
-          <a:noFill/>
-          <a:ln/>
-        </p:spPr>
-        <p:txBody>
-          <a:bodyPr wrap="square" lIns="0" tIns="0" rIns="0" bIns="0" rtlCol="0" anchor="ctr"/>
-          <a:lstStyle/>
-          <a:p>
-            <a:pPr indent="0" marL="0">
-              <a:buNone/>
-            </a:pPr>
-            <a:r>
-              <a:rPr lang="en-US" sz="1100" b="1" spc="200" kern="0" dirty="0">
-                <a:solidFill>
-                  <a:srgbClr val="64748B"/>
-                </a:solidFill>
-                <a:latin typeface="Calibri" pitchFamily="34" charset="0"/>
-                <a:ea typeface="Calibri" pitchFamily="34" charset="-122"/>
-                <a:cs typeface="Calibri" pitchFamily="34" charset="-120"/>
-              </a:rPr>
-              <a:t>CONCEPT EXAMPLES</a:t>
-            </a:r>
-            <a:endParaRPr lang="en-US" sz="1100" dirty="0"/>
-          </a:p>
-        </p:txBody>
-      </p:sp>
-      <p:sp>
-        <p:nvSpPr>
-          <p:cNvPr id="14" name="Text 12"/>
-          <p:cNvSpPr/>
-          <p:nvPr/>
-        </p:nvSpPr>
-        <p:spPr>
-          <a:xfrm>
-            <a:off x="640080" y="3813048"/>
-            <a:ext cx="7863840" cy="320040"/>
-          </a:xfrm>
-          <a:prstGeom prst="rect">
-            <a:avLst/>
-          </a:prstGeom>
-          <a:noFill/>
-          <a:ln/>
-        </p:spPr>
-        <p:txBody>
-          <a:bodyPr wrap="square" lIns="0" tIns="0" rIns="0" bIns="0" rtlCol="0" anchor="ctr"/>
-          <a:lstStyle/>
-          <a:p>
-            <a:pPr indent="0" marL="0">
-              <a:buNone/>
-            </a:pPr>
-            <a:r>
-              <a:rPr lang="en-US" sz="1300" dirty="0">
-                <a:solidFill>
-                  <a:srgbClr val="1E293B"/>
-                </a:solidFill>
-                <a:latin typeface="Calibri" pitchFamily="34" charset="0"/>
-                <a:ea typeface="Calibri" pitchFamily="34" charset="-122"/>
-                <a:cs typeface="Calibri" pitchFamily="34" charset="-120"/>
-              </a:rPr>
-              <a:t>• 📌 Examples</a:t>
-            </a:r>
-            <a:endParaRPr lang="en-US" sz="1300" dirty="0"/>
+              <a:t>postcard  </a:t>
+            </a:r>
+            <a:pPr indent="0" marL="0">
+              <a:buNone/>
+            </a:pPr>
+            <a:endParaRPr lang="en-US" sz="1700" dirty="0"/>
           </a:p>
         </p:txBody>
       </p:sp>
@@ -2791,7 +2793,7 @@
     <p:bg>
       <p:bgPr>
         <a:solidFill>
-          <a:srgbClr val="FFFFFF"/>
+          <a:srgbClr val="F8FAFC"/>
         </a:solidFill>
       </p:bgPr>
     </p:bg>
@@ -2811,80 +2813,116 @@
       </p:grpSpPr>
       <p:sp>
         <p:nvSpPr>
-          <p:cNvPr id="2" name="Text 0"/>
-          <p:cNvSpPr/>
-          <p:nvPr/>
-        </p:nvSpPr>
-        <p:spPr>
-          <a:xfrm>
-            <a:off x="365760" y="164592"/>
-            <a:ext cx="8412480" cy="566928"/>
-          </a:xfrm>
-          <a:prstGeom prst="rect">
-            <a:avLst/>
-          </a:prstGeom>
-          <a:noFill/>
-          <a:ln/>
-        </p:spPr>
-        <p:txBody>
-          <a:bodyPr wrap="square" lIns="0" tIns="0" rIns="0" bIns="0" rtlCol="0" anchor="ctr"/>
-          <a:lstStyle/>
-          <a:p>
-            <a:pPr algn="l" indent="0" marL="0">
-              <a:buNone/>
-            </a:pPr>
-            <a:r>
-              <a:rPr lang="en-US" sz="2800" b="1" dirty="0">
-                <a:solidFill>
-                  <a:srgbClr val="0E1C42"/>
-                </a:solidFill>
-                <a:latin typeface="Calibri" pitchFamily="34" charset="0"/>
-                <a:ea typeface="Calibri" pitchFamily="34" charset="-122"/>
-                <a:cs typeface="Calibri" pitchFamily="34" charset="-120"/>
-              </a:rPr>
-              <a:t>🔤 Vocabulary</a:t>
-            </a:r>
-            <a:endParaRPr lang="en-US" sz="2800" dirty="0"/>
-          </a:p>
-        </p:txBody>
-      </p:sp>
-      <p:sp>
-        <p:nvSpPr>
-          <p:cNvPr id="3" name="Shape 1"/>
-          <p:cNvSpPr/>
-          <p:nvPr/>
-        </p:nvSpPr>
-        <p:spPr>
-          <a:xfrm>
-            <a:off x="365760" y="749808"/>
-            <a:ext cx="8412480" cy="0"/>
-          </a:xfrm>
-          <a:prstGeom prst="line">
-            <a:avLst/>
-          </a:prstGeom>
-          <a:noFill/>
-          <a:ln w="19050">
-            <a:solidFill>
-              <a:srgbClr val="55C8E8"/>
-            </a:solidFill>
-            <a:prstDash val="solid"/>
-          </a:ln>
-        </p:spPr>
-      </p:sp>
-      <p:sp>
-        <p:nvSpPr>
-          <p:cNvPr id="4" name="Shape 2"/>
-          <p:cNvSpPr/>
-          <p:nvPr/>
-        </p:nvSpPr>
-        <p:spPr>
-          <a:xfrm>
-            <a:off x="457200" y="1005840"/>
-            <a:ext cx="3840480" cy="640080"/>
+          <p:cNvPr id="2" name="Shape 0"/>
+          <p:cNvSpPr/>
+          <p:nvPr/>
+        </p:nvSpPr>
+        <p:spPr>
+          <a:xfrm>
+            <a:off x="0" y="0"/>
+            <a:ext cx="9144000" cy="566928"/>
+          </a:xfrm>
+          <a:prstGeom prst="rect">
+            <a:avLst/>
+          </a:prstGeom>
+          <a:solidFill>
+            <a:srgbClr val="C7922C"/>
+          </a:solidFill>
+          <a:ln/>
+        </p:spPr>
+      </p:sp>
+      <p:sp>
+        <p:nvSpPr>
+          <p:cNvPr id="3" name="Text 1"/>
+          <p:cNvSpPr/>
+          <p:nvPr/>
+        </p:nvSpPr>
+        <p:spPr>
+          <a:xfrm>
+            <a:off x="365760" y="54864"/>
+            <a:ext cx="8412480" cy="457200"/>
+          </a:xfrm>
+          <a:prstGeom prst="rect">
+            <a:avLst/>
+          </a:prstGeom>
+          <a:noFill/>
+          <a:ln/>
+        </p:spPr>
+        <p:txBody>
+          <a:bodyPr wrap="square" lIns="0" tIns="0" rIns="0" bIns="0" rtlCol="0" anchor="ctr"/>
+          <a:lstStyle/>
+          <a:p>
+            <a:pPr indent="0" marL="0">
+              <a:buNone/>
+            </a:pPr>
+            <a:r>
+              <a:rPr lang="en-US" sz="2200" b="1" dirty="0">
+                <a:solidFill>
+                  <a:srgbClr val="FFFFFF"/>
+                </a:solidFill>
+                <a:latin typeface="Calibri" pitchFamily="34" charset="0"/>
+                <a:ea typeface="Calibri" pitchFamily="34" charset="-122"/>
+                <a:cs typeface="Calibri" pitchFamily="34" charset="-120"/>
+              </a:rPr>
+              <a:t>✏️  Grammar</a:t>
+            </a:r>
+            <a:endParaRPr lang="en-US" sz="2200" dirty="0"/>
+          </a:p>
+        </p:txBody>
+      </p:sp>
+      <p:sp>
+        <p:nvSpPr>
+          <p:cNvPr id="4" name="Text 2"/>
+          <p:cNvSpPr/>
+          <p:nvPr/>
+        </p:nvSpPr>
+        <p:spPr>
+          <a:xfrm>
+            <a:off x="365760" y="777240"/>
+            <a:ext cx="8229600" cy="237744"/>
+          </a:xfrm>
+          <a:prstGeom prst="rect">
+            <a:avLst/>
+          </a:prstGeom>
+          <a:noFill/>
+          <a:ln/>
+        </p:spPr>
+        <p:txBody>
+          <a:bodyPr wrap="square" lIns="0" tIns="0" rIns="0" bIns="0" rtlCol="0" anchor="ctr"/>
+          <a:lstStyle/>
+          <a:p>
+            <a:pPr indent="0" marL="0">
+              <a:buNone/>
+            </a:pPr>
+            <a:r>
+              <a:rPr lang="en-US" sz="1100" b="1" spc="100" kern="0" dirty="0">
+                <a:solidFill>
+                  <a:srgbClr val="C7922C"/>
+                </a:solidFill>
+                <a:latin typeface="Calibri" pitchFamily="34" charset="0"/>
+                <a:ea typeface="Calibri" pitchFamily="34" charset="-122"/>
+                <a:cs typeface="Calibri" pitchFamily="34" charset="-120"/>
+              </a:rPr>
+              <a:t>PROPER NOUNS AND CAPITALIZATION</a:t>
+            </a:r>
+            <a:endParaRPr lang="en-US" sz="1100" dirty="0"/>
+          </a:p>
+        </p:txBody>
+      </p:sp>
+      <p:sp>
+        <p:nvSpPr>
+          <p:cNvPr id="5" name="Shape 3"/>
+          <p:cNvSpPr/>
+          <p:nvPr/>
+        </p:nvSpPr>
+        <p:spPr>
+          <a:xfrm>
+            <a:off x="365760" y="1078992"/>
+            <a:ext cx="8412480" cy="658368"/>
           </a:xfrm>
           <a:prstGeom prst="roundRect">
             <a:avLst>
-              <a:gd name="adj" fmla="val 14286"/>
+              <a:gd name="adj" fmla="val 13889"/>
             </a:avLst>
           </a:prstGeom>
           <a:solidFill>
@@ -2902,50 +2940,30 @@
       </p:sp>
       <p:sp>
         <p:nvSpPr>
-          <p:cNvPr id="5" name="Text 3"/>
-          <p:cNvSpPr/>
-          <p:nvPr/>
-        </p:nvSpPr>
-        <p:spPr>
-          <a:xfrm>
-            <a:off x="594360" y="1060704"/>
-            <a:ext cx="3566160" cy="530352"/>
-          </a:xfrm>
-          <a:prstGeom prst="rect">
-            <a:avLst/>
-          </a:prstGeom>
-          <a:noFill/>
-          <a:ln/>
-        </p:spPr>
-        <p:txBody>
-          <a:bodyPr wrap="square" lIns="0" tIns="0" rIns="0" bIns="0" rtlCol="0" anchor="ctr"/>
-          <a:lstStyle/>
-          <a:p>
-            <a:pPr indent="0" marL="0">
-              <a:buNone/>
-            </a:pPr>
-            <a:r>
-              <a:rPr lang="en-US" sz="1500" b="1" dirty="0">
-                <a:solidFill>
-                  <a:srgbClr val="0E1C42"/>
-                </a:solidFill>
-                <a:latin typeface="Calibri" pitchFamily="34" charset="0"/>
-                <a:ea typeface="Calibri" pitchFamily="34" charset="-122"/>
-                <a:cs typeface="Calibri" pitchFamily="34" charset="-120"/>
-              </a:rPr>
-              <a:t>airmail</a:t>
-            </a:r>
-            <a:pPr indent="0" marL="0">
-              <a:buNone/>
-            </a:pPr>
-            <a:endParaRPr lang="en-US" sz="1500" dirty="0"/>
-          </a:p>
-          <a:p>
-            <a:pPr indent="0" marL="0">
-              <a:buNone/>
-            </a:pPr>
-            <a:r>
-              <a:rPr lang="en-US" sz="1200" dirty="0">
+          <p:cNvPr id="6" name="Text 4"/>
+          <p:cNvSpPr/>
+          <p:nvPr/>
+        </p:nvSpPr>
+        <p:spPr>
+          <a:xfrm>
+            <a:off x="594360" y="1225296"/>
+            <a:ext cx="7863840" cy="402336"/>
+          </a:xfrm>
+          <a:prstGeom prst="rect">
+            <a:avLst/>
+          </a:prstGeom>
+          <a:noFill/>
+          <a:ln/>
+        </p:spPr>
+        <p:txBody>
+          <a:bodyPr wrap="square" lIns="0" tIns="0" rIns="0" bIns="0" rtlCol="0" anchor="ctr"/>
+          <a:lstStyle/>
+          <a:p>
+            <a:pPr indent="0" marL="0">
+              <a:buNone/>
+            </a:pPr>
+            <a:r>
+              <a:rPr lang="en-US" sz="1600" dirty="0">
                 <a:solidFill>
                   <a:srgbClr val="1E293B"/>
                 </a:solidFill>
@@ -2953,30 +2971,30 @@
                 <a:ea typeface="Calibri" pitchFamily="34" charset="-122"/>
                 <a:cs typeface="Calibri" pitchFamily="34" charset="-120"/>
               </a:rPr>
-              <a:t>Mail sent by airplane.</a:t>
-            </a:r>
-            <a:endParaRPr lang="en-US" sz="1500" dirty="0"/>
-          </a:p>
-        </p:txBody>
-      </p:sp>
-      <p:sp>
-        <p:nvSpPr>
-          <p:cNvPr id="6" name="Shape 4"/>
-          <p:cNvSpPr/>
-          <p:nvPr/>
-        </p:nvSpPr>
-        <p:spPr>
-          <a:xfrm>
-            <a:off x="4572000" y="1005840"/>
-            <a:ext cx="3840480" cy="640080"/>
+              <a:t>The letter came from california last week.</a:t>
+            </a:r>
+            <a:endParaRPr lang="en-US" sz="1600" dirty="0"/>
+          </a:p>
+        </p:txBody>
+      </p:sp>
+      <p:sp>
+        <p:nvSpPr>
+          <p:cNvPr id="7" name="Shape 5"/>
+          <p:cNvSpPr/>
+          <p:nvPr/>
+        </p:nvSpPr>
+        <p:spPr>
+          <a:xfrm>
+            <a:off x="365760" y="1810512"/>
+            <a:ext cx="8412480" cy="658368"/>
           </a:xfrm>
           <a:prstGeom prst="roundRect">
             <a:avLst>
-              <a:gd name="adj" fmla="val 14286"/>
+              <a:gd name="adj" fmla="val 13889"/>
             </a:avLst>
           </a:prstGeom>
           <a:solidFill>
-            <a:srgbClr val="FEF6E8"/>
+            <a:srgbClr val="FFFFFF"/>
           </a:solidFill>
           <a:ln/>
           <a:effectLst>
@@ -2990,50 +3008,30 @@
       </p:sp>
       <p:sp>
         <p:nvSpPr>
-          <p:cNvPr id="7" name="Text 5"/>
-          <p:cNvSpPr/>
-          <p:nvPr/>
-        </p:nvSpPr>
-        <p:spPr>
-          <a:xfrm>
-            <a:off x="4709160" y="1060704"/>
-            <a:ext cx="3566160" cy="530352"/>
-          </a:xfrm>
-          <a:prstGeom prst="rect">
-            <a:avLst/>
-          </a:prstGeom>
-          <a:noFill/>
-          <a:ln/>
-        </p:spPr>
-        <p:txBody>
-          <a:bodyPr wrap="square" lIns="0" tIns="0" rIns="0" bIns="0" rtlCol="0" anchor="ctr"/>
-          <a:lstStyle/>
-          <a:p>
-            <a:pPr indent="0" marL="0">
-              <a:buNone/>
-            </a:pPr>
-            <a:r>
-              <a:rPr lang="en-US" sz="1500" b="1" dirty="0">
-                <a:solidFill>
-                  <a:srgbClr val="0E1C42"/>
-                </a:solidFill>
-                <a:latin typeface="Calibri" pitchFamily="34" charset="0"/>
-                <a:ea typeface="Calibri" pitchFamily="34" charset="-122"/>
-                <a:cs typeface="Calibri" pitchFamily="34" charset="-120"/>
-              </a:rPr>
-              <a:t>insurance</a:t>
-            </a:r>
-            <a:pPr indent="0" marL="0">
-              <a:buNone/>
-            </a:pPr>
-            <a:endParaRPr lang="en-US" sz="1500" dirty="0"/>
-          </a:p>
-          <a:p>
-            <a:pPr indent="0" marL="0">
-              <a:buNone/>
-            </a:pPr>
-            <a:r>
-              <a:rPr lang="en-US" sz="1200" dirty="0">
+          <p:cNvPr id="8" name="Text 6"/>
+          <p:cNvSpPr/>
+          <p:nvPr/>
+        </p:nvSpPr>
+        <p:spPr>
+          <a:xfrm>
+            <a:off x="594360" y="1956816"/>
+            <a:ext cx="7863840" cy="402336"/>
+          </a:xfrm>
+          <a:prstGeom prst="rect">
+            <a:avLst/>
+          </a:prstGeom>
+          <a:noFill/>
+          <a:ln/>
+        </p:spPr>
+        <p:txBody>
+          <a:bodyPr wrap="square" lIns="0" tIns="0" rIns="0" bIns="0" rtlCol="0" anchor="ctr"/>
+          <a:lstStyle/>
+          <a:p>
+            <a:pPr indent="0" marL="0">
+              <a:buNone/>
+            </a:pPr>
+            <a:r>
+              <a:rPr lang="en-US" sz="1600" dirty="0">
                 <a:solidFill>
                   <a:srgbClr val="1E293B"/>
                 </a:solidFill>
@@ -3041,26 +3039,26 @@
                 <a:ea typeface="Calibri" pitchFamily="34" charset="-122"/>
                 <a:cs typeface="Calibri" pitchFamily="34" charset="-120"/>
               </a:rPr>
-              <a:t>Protection in case something goes wrong.</a:t>
-            </a:r>
-            <a:endParaRPr lang="en-US" sz="1500" dirty="0"/>
-          </a:p>
-        </p:txBody>
-      </p:sp>
-      <p:sp>
-        <p:nvSpPr>
-          <p:cNvPr id="8" name="Shape 6"/>
-          <p:cNvSpPr/>
-          <p:nvPr/>
-        </p:nvSpPr>
-        <p:spPr>
-          <a:xfrm>
-            <a:off x="457200" y="1755648"/>
-            <a:ext cx="3840480" cy="640080"/>
+              <a:t>We followed the river all the way to texas.</a:t>
+            </a:r>
+            <a:endParaRPr lang="en-US" sz="1600" dirty="0"/>
+          </a:p>
+        </p:txBody>
+      </p:sp>
+      <p:sp>
+        <p:nvSpPr>
+          <p:cNvPr id="9" name="Shape 7"/>
+          <p:cNvSpPr/>
+          <p:nvPr/>
+        </p:nvSpPr>
+        <p:spPr>
+          <a:xfrm>
+            <a:off x="365760" y="2542032"/>
+            <a:ext cx="8412480" cy="658368"/>
           </a:xfrm>
           <a:prstGeom prst="roundRect">
             <a:avLst>
-              <a:gd name="adj" fmla="val 14286"/>
+              <a:gd name="adj" fmla="val 13889"/>
             </a:avLst>
           </a:prstGeom>
           <a:solidFill>
@@ -3078,50 +3076,30 @@
       </p:sp>
       <p:sp>
         <p:nvSpPr>
-          <p:cNvPr id="9" name="Text 7"/>
-          <p:cNvSpPr/>
-          <p:nvPr/>
-        </p:nvSpPr>
-        <p:spPr>
-          <a:xfrm>
-            <a:off x="594360" y="1810512"/>
-            <a:ext cx="3566160" cy="530352"/>
-          </a:xfrm>
-          <a:prstGeom prst="rect">
-            <a:avLst/>
-          </a:prstGeom>
-          <a:noFill/>
-          <a:ln/>
-        </p:spPr>
-        <p:txBody>
-          <a:bodyPr wrap="square" lIns="0" tIns="0" rIns="0" bIns="0" rtlCol="0" anchor="ctr"/>
-          <a:lstStyle/>
-          <a:p>
-            <a:pPr indent="0" marL="0">
-              <a:buNone/>
-            </a:pPr>
-            <a:r>
-              <a:rPr lang="en-US" sz="1500" b="1" dirty="0">
-                <a:solidFill>
-                  <a:srgbClr val="0E1C42"/>
-                </a:solidFill>
-                <a:latin typeface="Calibri" pitchFamily="34" charset="0"/>
-                <a:ea typeface="Calibri" pitchFamily="34" charset="-122"/>
-                <a:cs typeface="Calibri" pitchFamily="34" charset="-120"/>
-              </a:rPr>
-              <a:t>expensive</a:t>
-            </a:r>
-            <a:pPr indent="0" marL="0">
-              <a:buNone/>
-            </a:pPr>
-            <a:endParaRPr lang="en-US" sz="1500" dirty="0"/>
-          </a:p>
-          <a:p>
-            <a:pPr indent="0" marL="0">
-              <a:buNone/>
-            </a:pPr>
-            <a:r>
-              <a:rPr lang="en-US" sz="1200" dirty="0">
+          <p:cNvPr id="10" name="Text 8"/>
+          <p:cNvSpPr/>
+          <p:nvPr/>
+        </p:nvSpPr>
+        <p:spPr>
+          <a:xfrm>
+            <a:off x="594360" y="2688336"/>
+            <a:ext cx="7863840" cy="402336"/>
+          </a:xfrm>
+          <a:prstGeom prst="rect">
+            <a:avLst/>
+          </a:prstGeom>
+          <a:noFill/>
+          <a:ln/>
+        </p:spPr>
+        <p:txBody>
+          <a:bodyPr wrap="square" lIns="0" tIns="0" rIns="0" bIns="0" rtlCol="0" anchor="ctr"/>
+          <a:lstStyle/>
+          <a:p>
+            <a:pPr indent="0" marL="0">
+              <a:buNone/>
+            </a:pPr>
+            <a:r>
+              <a:rPr lang="en-US" sz="1600" dirty="0">
                 <a:solidFill>
                   <a:srgbClr val="1E293B"/>
                 </a:solidFill>
@@ -3129,30 +3107,30 @@
                 <a:ea typeface="Calibri" pitchFamily="34" charset="-122"/>
                 <a:cs typeface="Calibri" pitchFamily="34" charset="-120"/>
               </a:rPr>
-              <a:t>Costing a lot of money.</a:t>
-            </a:r>
-            <a:endParaRPr lang="en-US" sz="1500" dirty="0"/>
-          </a:p>
-        </p:txBody>
-      </p:sp>
-      <p:sp>
-        <p:nvSpPr>
-          <p:cNvPr id="10" name="Shape 8"/>
-          <p:cNvSpPr/>
-          <p:nvPr/>
-        </p:nvSpPr>
-        <p:spPr>
-          <a:xfrm>
-            <a:off x="4572000" y="1755648"/>
-            <a:ext cx="3840480" cy="640080"/>
+              <a:t>My brother arthur wrote the address.</a:t>
+            </a:r>
+            <a:endParaRPr lang="en-US" sz="1600" dirty="0"/>
+          </a:p>
+        </p:txBody>
+      </p:sp>
+      <p:sp>
+        <p:nvSpPr>
+          <p:cNvPr id="11" name="Shape 9"/>
+          <p:cNvSpPr/>
+          <p:nvPr/>
+        </p:nvSpPr>
+        <p:spPr>
+          <a:xfrm>
+            <a:off x="365760" y="3273552"/>
+            <a:ext cx="8412480" cy="658368"/>
           </a:xfrm>
           <a:prstGeom prst="roundRect">
             <a:avLst>
-              <a:gd name="adj" fmla="val 14286"/>
+              <a:gd name="adj" fmla="val 13889"/>
             </a:avLst>
           </a:prstGeom>
           <a:solidFill>
-            <a:srgbClr val="FEF6E8"/>
+            <a:srgbClr val="FFFFFF"/>
           </a:solidFill>
           <a:ln/>
           <a:effectLst>
@@ -3166,50 +3144,30 @@
       </p:sp>
       <p:sp>
         <p:nvSpPr>
-          <p:cNvPr id="11" name="Text 9"/>
-          <p:cNvSpPr/>
-          <p:nvPr/>
-        </p:nvSpPr>
-        <p:spPr>
-          <a:xfrm>
-            <a:off x="4709160" y="1810512"/>
-            <a:ext cx="3566160" cy="530352"/>
-          </a:xfrm>
-          <a:prstGeom prst="rect">
-            <a:avLst/>
-          </a:prstGeom>
-          <a:noFill/>
-          <a:ln/>
-        </p:spPr>
-        <p:txBody>
-          <a:bodyPr wrap="square" lIns="0" tIns="0" rIns="0" bIns="0" rtlCol="0" anchor="ctr"/>
-          <a:lstStyle/>
-          <a:p>
-            <a:pPr indent="0" marL="0">
-              <a:buNone/>
-            </a:pPr>
-            <a:r>
-              <a:rPr lang="en-US" sz="1500" b="1" dirty="0">
-                <a:solidFill>
-                  <a:srgbClr val="0E1C42"/>
-                </a:solidFill>
-                <a:latin typeface="Calibri" pitchFamily="34" charset="0"/>
-                <a:ea typeface="Calibri" pitchFamily="34" charset="-122"/>
-                <a:cs typeface="Calibri" pitchFamily="34" charset="-120"/>
-              </a:rPr>
-              <a:t>postcard</a:t>
-            </a:r>
-            <a:pPr indent="0" marL="0">
-              <a:buNone/>
-            </a:pPr>
-            <a:endParaRPr lang="en-US" sz="1500" dirty="0"/>
-          </a:p>
-          <a:p>
-            <a:pPr indent="0" marL="0">
-              <a:buNone/>
-            </a:pPr>
-            <a:r>
-              <a:rPr lang="en-US" sz="1200" dirty="0">
+          <p:cNvPr id="12" name="Text 10"/>
+          <p:cNvSpPr/>
+          <p:nvPr/>
+        </p:nvSpPr>
+        <p:spPr>
+          <a:xfrm>
+            <a:off x="594360" y="3419856"/>
+            <a:ext cx="7863840" cy="402336"/>
+          </a:xfrm>
+          <a:prstGeom prst="rect">
+            <a:avLst/>
+          </a:prstGeom>
+          <a:noFill/>
+          <a:ln/>
+        </p:spPr>
+        <p:txBody>
+          <a:bodyPr wrap="square" lIns="0" tIns="0" rIns="0" bIns="0" rtlCol="0" anchor="ctr"/>
+          <a:lstStyle/>
+          <a:p>
+            <a:pPr indent="0" marL="0">
+              <a:buNone/>
+            </a:pPr>
+            <a:r>
+              <a:rPr lang="en-US" sz="1600" dirty="0">
                 <a:solidFill>
                   <a:srgbClr val="1E293B"/>
                 </a:solidFill>
@@ -3217,7 +3175,46 @@
                 <a:ea typeface="Calibri" pitchFamily="34" charset="-122"/>
                 <a:cs typeface="Calibri" pitchFamily="34" charset="-120"/>
               </a:rPr>
-              <a:t>A card with a picture, sent through the mail.</a:t>
+              <a:t>The package went to new York City.</a:t>
+            </a:r>
+            <a:endParaRPr lang="en-US" sz="1600" dirty="0"/>
+          </a:p>
+        </p:txBody>
+      </p:sp>
+      <p:sp>
+        <p:nvSpPr>
+          <p:cNvPr id="13" name="Text 11"/>
+          <p:cNvSpPr/>
+          <p:nvPr/>
+        </p:nvSpPr>
+        <p:spPr>
+          <a:xfrm>
+            <a:off x="365760" y="4050792"/>
+            <a:ext cx="8412480" cy="365760"/>
+          </a:xfrm>
+          <a:prstGeom prst="rect">
+            <a:avLst/>
+          </a:prstGeom>
+          <a:noFill/>
+          <a:ln/>
+        </p:spPr>
+        <p:txBody>
+          <a:bodyPr wrap="square" lIns="0" tIns="0" rIns="0" bIns="0" rtlCol="0" anchor="ctr"/>
+          <a:lstStyle/>
+          <a:p>
+            <a:pPr indent="0" marL="0">
+              <a:buNone/>
+            </a:pPr>
+            <a:r>
+              <a:rPr lang="en-US" sz="1500" i="1" dirty="0">
+                <a:solidFill>
+                  <a:srgbClr val="64748B"/>
+                </a:solidFill>
+                <a:latin typeface="Calibri" pitchFamily="34" charset="0"/>
+                <a:ea typeface="Calibri" pitchFamily="34" charset="-122"/>
+                <a:cs typeface="Calibri" pitchFamily="34" charset="-120"/>
+              </a:rPr>
+              <a:t>Your turn. Each sentence has one word that should begin with a capital letter. Tap it. Tap to check — green means you got it.</a:t>
             </a:r>
             <a:endParaRPr lang="en-US" sz="1500" dirty="0"/>
           </a:p>
@@ -3237,7 +3234,7 @@
     <p:bg>
       <p:bgPr>
         <a:solidFill>
-          <a:srgbClr val="E5F7FC"/>
+          <a:srgbClr val="F8FAFC"/>
         </a:solidFill>
       </p:bgPr>
     </p:bg>
@@ -3257,180 +3254,116 @@
       </p:grpSpPr>
       <p:sp>
         <p:nvSpPr>
-          <p:cNvPr id="2" name="Text 0"/>
-          <p:cNvSpPr/>
-          <p:nvPr/>
-        </p:nvSpPr>
-        <p:spPr>
-          <a:xfrm>
-            <a:off x="365760" y="164592"/>
-            <a:ext cx="5943600" cy="566928"/>
-          </a:xfrm>
-          <a:prstGeom prst="rect">
-            <a:avLst/>
-          </a:prstGeom>
-          <a:noFill/>
-          <a:ln/>
-        </p:spPr>
-        <p:txBody>
-          <a:bodyPr wrap="square" lIns="0" tIns="0" rIns="0" bIns="0" rtlCol="0" anchor="ctr"/>
-          <a:lstStyle/>
-          <a:p>
-            <a:pPr algn="l" indent="0" marL="0">
-              <a:buNone/>
-            </a:pPr>
-            <a:r>
-              <a:rPr lang="en-US" sz="2800" b="1" dirty="0">
-                <a:solidFill>
-                  <a:srgbClr val="0E1C42"/>
-                </a:solidFill>
-                <a:latin typeface="Calibri" pitchFamily="34" charset="0"/>
-                <a:ea typeface="Calibri" pitchFamily="34" charset="-122"/>
-                <a:cs typeface="Calibri" pitchFamily="34" charset="-120"/>
-              </a:rPr>
-              <a:t>🔠 Spelling: Vowel teams ai/ay and oa/ow</a:t>
-            </a:r>
-            <a:endParaRPr lang="en-US" sz="2800" dirty="0"/>
-          </a:p>
-        </p:txBody>
-      </p:sp>
-      <p:sp>
-        <p:nvSpPr>
-          <p:cNvPr id="3" name="Shape 1"/>
-          <p:cNvSpPr/>
-          <p:nvPr/>
-        </p:nvSpPr>
-        <p:spPr>
-          <a:xfrm>
-            <a:off x="365760" y="749808"/>
-            <a:ext cx="8412480" cy="0"/>
-          </a:xfrm>
-          <a:prstGeom prst="line">
-            <a:avLst/>
-          </a:prstGeom>
-          <a:noFill/>
-          <a:ln w="19050">
-            <a:solidFill>
-              <a:srgbClr val="5CB85C"/>
-            </a:solidFill>
-            <a:prstDash val="solid"/>
-          </a:ln>
-        </p:spPr>
-      </p:sp>
-      <p:sp>
-        <p:nvSpPr>
-          <p:cNvPr id="4" name="Shape 2"/>
-          <p:cNvSpPr/>
-          <p:nvPr/>
-        </p:nvSpPr>
-        <p:spPr>
-          <a:xfrm>
-            <a:off x="6492240" y="173736"/>
-            <a:ext cx="2286000" cy="502920"/>
+          <p:cNvPr id="2" name="Shape 0"/>
+          <p:cNvSpPr/>
+          <p:nvPr/>
+        </p:nvSpPr>
+        <p:spPr>
+          <a:xfrm>
+            <a:off x="0" y="0"/>
+            <a:ext cx="9144000" cy="566928"/>
+          </a:xfrm>
+          <a:prstGeom prst="rect">
+            <a:avLst/>
+          </a:prstGeom>
+          <a:solidFill>
+            <a:srgbClr val="C7922C"/>
+          </a:solidFill>
+          <a:ln/>
+        </p:spPr>
+      </p:sp>
+      <p:sp>
+        <p:nvSpPr>
+          <p:cNvPr id="3" name="Text 1"/>
+          <p:cNvSpPr/>
+          <p:nvPr/>
+        </p:nvSpPr>
+        <p:spPr>
+          <a:xfrm>
+            <a:off x="365760" y="54864"/>
+            <a:ext cx="8412480" cy="457200"/>
+          </a:xfrm>
+          <a:prstGeom prst="rect">
+            <a:avLst/>
+          </a:prstGeom>
+          <a:noFill/>
+          <a:ln/>
+        </p:spPr>
+        <p:txBody>
+          <a:bodyPr wrap="square" lIns="0" tIns="0" rIns="0" bIns="0" rtlCol="0" anchor="ctr"/>
+          <a:lstStyle/>
+          <a:p>
+            <a:pPr indent="0" marL="0">
+              <a:buNone/>
+            </a:pPr>
+            <a:r>
+              <a:rPr lang="en-US" sz="2200" b="1" dirty="0">
+                <a:solidFill>
+                  <a:srgbClr val="FFFFFF"/>
+                </a:solidFill>
+                <a:latin typeface="Calibri" pitchFamily="34" charset="0"/>
+                <a:ea typeface="Calibri" pitchFamily="34" charset="-122"/>
+                <a:cs typeface="Calibri" pitchFamily="34" charset="-120"/>
+              </a:rPr>
+              <a:t>✏️  Grammar</a:t>
+            </a:r>
+            <a:endParaRPr lang="en-US" sz="2200" dirty="0"/>
+          </a:p>
+        </p:txBody>
+      </p:sp>
+      <p:sp>
+        <p:nvSpPr>
+          <p:cNvPr id="4" name="Text 2"/>
+          <p:cNvSpPr/>
+          <p:nvPr/>
+        </p:nvSpPr>
+        <p:spPr>
+          <a:xfrm>
+            <a:off x="365760" y="777240"/>
+            <a:ext cx="8229600" cy="237744"/>
+          </a:xfrm>
+          <a:prstGeom prst="rect">
+            <a:avLst/>
+          </a:prstGeom>
+          <a:noFill/>
+          <a:ln/>
+        </p:spPr>
+        <p:txBody>
+          <a:bodyPr wrap="square" lIns="0" tIns="0" rIns="0" bIns="0" rtlCol="0" anchor="ctr"/>
+          <a:lstStyle/>
+          <a:p>
+            <a:pPr indent="0" marL="0">
+              <a:buNone/>
+            </a:pPr>
+            <a:r>
+              <a:rPr lang="en-US" sz="1100" b="1" spc="100" kern="0" dirty="0">
+                <a:solidFill>
+                  <a:srgbClr val="C7922C"/>
+                </a:solidFill>
+                <a:latin typeface="Calibri" pitchFamily="34" charset="0"/>
+                <a:ea typeface="Calibri" pitchFamily="34" charset="-122"/>
+                <a:cs typeface="Calibri" pitchFamily="34" charset="-120"/>
+              </a:rPr>
+              <a:t>PROPER NOUNS AND CAPITALIZATION</a:t>
+            </a:r>
+            <a:endParaRPr lang="en-US" sz="1100" dirty="0"/>
+          </a:p>
+        </p:txBody>
+      </p:sp>
+      <p:sp>
+        <p:nvSpPr>
+          <p:cNvPr id="5" name="Shape 3"/>
+          <p:cNvSpPr/>
+          <p:nvPr/>
+        </p:nvSpPr>
+        <p:spPr>
+          <a:xfrm>
+            <a:off x="365760" y="1078992"/>
+            <a:ext cx="8412480" cy="658368"/>
           </a:xfrm>
           <a:prstGeom prst="roundRect">
             <a:avLst>
-              <a:gd name="adj" fmla="val 21818"/>
-            </a:avLst>
-          </a:prstGeom>
-          <a:solidFill>
-            <a:srgbClr val="5CB85C"/>
-          </a:solidFill>
-          <a:ln/>
-        </p:spPr>
-      </p:sp>
-      <p:sp>
-        <p:nvSpPr>
-          <p:cNvPr id="5" name="Text 3"/>
-          <p:cNvSpPr/>
-          <p:nvPr/>
-        </p:nvSpPr>
-        <p:spPr>
-          <a:xfrm>
-            <a:off x="6492240" y="173736"/>
-            <a:ext cx="2286000" cy="502920"/>
-          </a:xfrm>
-          <a:prstGeom prst="rect">
-            <a:avLst/>
-          </a:prstGeom>
-          <a:noFill/>
-          <a:ln/>
-        </p:spPr>
-        <p:txBody>
-          <a:bodyPr wrap="square" lIns="0" tIns="0" rIns="0" bIns="0" rtlCol="0" anchor="ctr"/>
-          <a:lstStyle/>
-          <a:p>
-            <a:pPr algn="ctr" indent="0" marL="0">
-              <a:buNone/>
-            </a:pPr>
-            <a:r>
-              <a:rPr lang="en-US" sz="1100" b="1" dirty="0">
-                <a:solidFill>
-                  <a:srgbClr val="0E1C42"/>
-                </a:solidFill>
-                <a:latin typeface="Calibri" pitchFamily="34" charset="0"/>
-                <a:ea typeface="Calibri" pitchFamily="34" charset="-122"/>
-                <a:cs typeface="Calibri" pitchFamily="34" charset="-120"/>
-              </a:rPr>
-              <a:t>CHAT PROMPT</a:t>
-            </a:r>
-            <a:endParaRPr lang="en-US" sz="1100" dirty="0"/>
-          </a:p>
-        </p:txBody>
-      </p:sp>
-      <p:sp>
-        <p:nvSpPr>
-          <p:cNvPr id="6" name="Text 4"/>
-          <p:cNvSpPr/>
-          <p:nvPr/>
-        </p:nvSpPr>
-        <p:spPr>
-          <a:xfrm>
-            <a:off x="457200" y="1005840"/>
-            <a:ext cx="8046720" cy="292608"/>
-          </a:xfrm>
-          <a:prstGeom prst="rect">
-            <a:avLst/>
-          </a:prstGeom>
-          <a:noFill/>
-          <a:ln/>
-        </p:spPr>
-        <p:txBody>
-          <a:bodyPr wrap="square" lIns="0" tIns="0" rIns="0" bIns="0" rtlCol="0" anchor="ctr"/>
-          <a:lstStyle/>
-          <a:p>
-            <a:pPr indent="0" marL="0">
-              <a:buNone/>
-            </a:pPr>
-            <a:r>
-              <a:rPr lang="en-US" sz="1100" b="1" spc="200" kern="0" dirty="0">
-                <a:solidFill>
-                  <a:srgbClr val="C7922C"/>
-                </a:solidFill>
-                <a:latin typeface="Calibri" pitchFamily="34" charset="0"/>
-                <a:ea typeface="Calibri" pitchFamily="34" charset="-122"/>
-                <a:cs typeface="Calibri" pitchFamily="34" charset="-120"/>
-              </a:rPr>
-              <a:t>WORD BANK — Sort these words!</a:t>
-            </a:r>
-            <a:endParaRPr lang="en-US" sz="1100" dirty="0"/>
-          </a:p>
-        </p:txBody>
-      </p:sp>
-      <p:sp>
-        <p:nvSpPr>
-          <p:cNvPr id="7" name="Shape 5"/>
-          <p:cNvSpPr/>
-          <p:nvPr/>
-        </p:nvSpPr>
-        <p:spPr>
-          <a:xfrm>
-            <a:off x="457200" y="1371600"/>
-            <a:ext cx="8229600" cy="914400"/>
-          </a:xfrm>
-          <a:prstGeom prst="roundRect">
-            <a:avLst>
-              <a:gd name="adj" fmla="val 10000"/>
+              <a:gd name="adj" fmla="val 13889"/>
             </a:avLst>
           </a:prstGeom>
           <a:solidFill>
@@ -3448,38 +3381,66 @@
       </p:sp>
       <p:sp>
         <p:nvSpPr>
-          <p:cNvPr id="8" name="Text 6"/>
-          <p:cNvSpPr/>
-          <p:nvPr/>
-        </p:nvSpPr>
-        <p:spPr>
-          <a:xfrm>
-            <a:off x="640080" y="1463040"/>
-            <a:ext cx="7863840" cy="731520"/>
-          </a:xfrm>
-          <a:prstGeom prst="rect">
-            <a:avLst/>
-          </a:prstGeom>
-          <a:noFill/>
-          <a:ln/>
-        </p:spPr>
-        <p:txBody>
-          <a:bodyPr wrap="square" lIns="0" tIns="0" rIns="0" bIns="0" rtlCol="0" anchor="ctr"/>
-          <a:lstStyle/>
-          <a:p>
-            <a:pPr algn="ctr" indent="0" marL="0">
+          <p:cNvPr id="6" name="Text 4"/>
+          <p:cNvSpPr/>
+          <p:nvPr/>
+        </p:nvSpPr>
+        <p:spPr>
+          <a:xfrm>
+            <a:off x="594360" y="1225296"/>
+            <a:ext cx="7863840" cy="402336"/>
+          </a:xfrm>
+          <a:prstGeom prst="rect">
+            <a:avLst/>
+          </a:prstGeom>
+          <a:noFill/>
+          <a:ln/>
+        </p:spPr>
+        <p:txBody>
+          <a:bodyPr wrap="square" lIns="0" tIns="0" rIns="0" bIns="0" rtlCol="0" anchor="ctr"/>
+          <a:lstStyle/>
+          <a:p>
+            <a:pPr indent="0" marL="0">
               <a:buNone/>
             </a:pPr>
             <a:r>
               <a:rPr lang="en-US" sz="1600" dirty="0">
                 <a:solidFill>
-                  <a:srgbClr val="0E1C42"/>
-                </a:solidFill>
-                <a:latin typeface="Calibri" pitchFamily="34" charset="0"/>
-                <a:ea typeface="Calibri" pitchFamily="34" charset="-122"/>
-                <a:cs typeface="Calibri" pitchFamily="34" charset="-120"/>
-              </a:rPr>
-              <a:t>paint     stain     tray     spray     toast     groan     slow     throw</a:t>
+                  <a:srgbClr val="1E293B"/>
+                </a:solidFill>
+                <a:latin typeface="Calibri" pitchFamily="34" charset="0"/>
+                <a:ea typeface="Calibri" pitchFamily="34" charset="-122"/>
+                <a:cs typeface="Calibri" pitchFamily="34" charset="-120"/>
+              </a:rPr>
+              <a:t>The letter came from </a:t>
+            </a:r>
+            <a:pPr indent="0" marL="0">
+              <a:buNone/>
+            </a:pPr>
+            <a:r>
+              <a:rPr lang="en-US" sz="1600" b="1" dirty="0">
+                <a:solidFill>
+                  <a:srgbClr val="34B76F"/>
+                </a:solidFill>
+                <a:latin typeface="Calibri" pitchFamily="34" charset="0"/>
+                <a:ea typeface="Calibri" pitchFamily="34" charset="-122"/>
+                <a:cs typeface="Calibri" pitchFamily="34" charset="-120"/>
+              </a:rPr>
+              <a:t>california</a:t>
+            </a:r>
+            <a:pPr indent="0" marL="0">
+              <a:buNone/>
+            </a:pPr>
+            <a:r>
+              <a:rPr lang="en-US" sz="1600" dirty="0">
+                <a:solidFill>
+                  <a:srgbClr val="1E293B"/>
+                </a:solidFill>
+                <a:latin typeface="Calibri" pitchFamily="34" charset="0"/>
+                <a:ea typeface="Calibri" pitchFamily="34" charset="-122"/>
+                <a:cs typeface="Calibri" pitchFamily="34" charset="-120"/>
+              </a:rPr>
+              <a:t> last week.</a:t>
             </a:r>
             <a:endParaRPr lang="en-US" sz="1600" dirty="0"/>
           </a:p>
@@ -3487,22 +3448,22 @@
       </p:sp>
       <p:sp>
         <p:nvSpPr>
-          <p:cNvPr id="9" name="Shape 7"/>
-          <p:cNvSpPr/>
-          <p:nvPr/>
-        </p:nvSpPr>
-        <p:spPr>
-          <a:xfrm>
-            <a:off x="457200" y="2468880"/>
-            <a:ext cx="3794760" cy="457200"/>
+          <p:cNvPr id="7" name="Shape 5"/>
+          <p:cNvSpPr/>
+          <p:nvPr/>
+        </p:nvSpPr>
+        <p:spPr>
+          <a:xfrm>
+            <a:off x="365760" y="1810512"/>
+            <a:ext cx="8412480" cy="658368"/>
           </a:xfrm>
           <a:prstGeom prst="roundRect">
             <a:avLst>
-              <a:gd name="adj" fmla="val 20000"/>
+              <a:gd name="adj" fmla="val 13889"/>
             </a:avLst>
           </a:prstGeom>
           <a:solidFill>
-            <a:srgbClr val="F0E8FF"/>
+            <a:srgbClr val="FFFFFF"/>
           </a:solidFill>
           <a:ln/>
           <a:effectLst>
@@ -3516,61 +3477,75 @@
       </p:sp>
       <p:sp>
         <p:nvSpPr>
-          <p:cNvPr id="10" name="Text 8"/>
-          <p:cNvSpPr/>
-          <p:nvPr/>
-        </p:nvSpPr>
-        <p:spPr>
-          <a:xfrm>
-            <a:off x="548640" y="2514600"/>
-            <a:ext cx="3611880" cy="365760"/>
-          </a:xfrm>
-          <a:prstGeom prst="rect">
-            <a:avLst/>
-          </a:prstGeom>
-          <a:noFill/>
-          <a:ln/>
-        </p:spPr>
-        <p:txBody>
-          <a:bodyPr wrap="square" lIns="0" tIns="0" rIns="0" bIns="0" rtlCol="0" anchor="ctr"/>
-          <a:lstStyle/>
-          <a:p>
-            <a:pPr algn="ctr" indent="0" marL="0">
-              <a:buNone/>
-            </a:pPr>
-            <a:r>
-              <a:rPr lang="en-US" sz="1400" b="1" dirty="0">
-                <a:solidFill>
-                  <a:srgbClr val="0E1C42"/>
-                </a:solidFill>
-                <a:latin typeface="Calibri" pitchFamily="34" charset="0"/>
-                <a:ea typeface="Calibri" pitchFamily="34" charset="-122"/>
-                <a:cs typeface="Calibri" pitchFamily="34" charset="-120"/>
-              </a:rPr>
-              <a:t>ai</a:t>
-            </a:r>
-            <a:endParaRPr lang="en-US" sz="1400" dirty="0"/>
-          </a:p>
-        </p:txBody>
-      </p:sp>
-      <p:sp>
-        <p:nvSpPr>
-          <p:cNvPr id="11" name="Shape 9"/>
-          <p:cNvSpPr/>
-          <p:nvPr/>
-        </p:nvSpPr>
-        <p:spPr>
-          <a:xfrm>
-            <a:off x="4480560" y="2468880"/>
-            <a:ext cx="3794760" cy="457200"/>
+          <p:cNvPr id="8" name="Text 6"/>
+          <p:cNvSpPr/>
+          <p:nvPr/>
+        </p:nvSpPr>
+        <p:spPr>
+          <a:xfrm>
+            <a:off x="594360" y="1956816"/>
+            <a:ext cx="7863840" cy="402336"/>
+          </a:xfrm>
+          <a:prstGeom prst="rect">
+            <a:avLst/>
+          </a:prstGeom>
+          <a:noFill/>
+          <a:ln/>
+        </p:spPr>
+        <p:txBody>
+          <a:bodyPr wrap="square" lIns="0" tIns="0" rIns="0" bIns="0" rtlCol="0" anchor="ctr"/>
+          <a:lstStyle/>
+          <a:p>
+            <a:pPr indent="0" marL="0">
+              <a:buNone/>
+            </a:pPr>
+            <a:r>
+              <a:rPr lang="en-US" sz="1600" dirty="0">
+                <a:solidFill>
+                  <a:srgbClr val="1E293B"/>
+                </a:solidFill>
+                <a:latin typeface="Calibri" pitchFamily="34" charset="0"/>
+                <a:ea typeface="Calibri" pitchFamily="34" charset="-122"/>
+                <a:cs typeface="Calibri" pitchFamily="34" charset="-120"/>
+              </a:rPr>
+              <a:t>We followed the river all the way to </a:t>
+            </a:r>
+            <a:pPr indent="0" marL="0">
+              <a:buNone/>
+            </a:pPr>
+            <a:r>
+              <a:rPr lang="en-US" sz="1600" b="1" dirty="0">
+                <a:solidFill>
+                  <a:srgbClr val="34B76F"/>
+                </a:solidFill>
+                <a:latin typeface="Calibri" pitchFamily="34" charset="0"/>
+                <a:ea typeface="Calibri" pitchFamily="34" charset="-122"/>
+                <a:cs typeface="Calibri" pitchFamily="34" charset="-120"/>
+              </a:rPr>
+              <a:t>texas.</a:t>
+            </a:r>
+            <a:endParaRPr lang="en-US" sz="1600" dirty="0"/>
+          </a:p>
+        </p:txBody>
+      </p:sp>
+      <p:sp>
+        <p:nvSpPr>
+          <p:cNvPr id="9" name="Shape 7"/>
+          <p:cNvSpPr/>
+          <p:nvPr/>
+        </p:nvSpPr>
+        <p:spPr>
+          <a:xfrm>
+            <a:off x="365760" y="2542032"/>
+            <a:ext cx="8412480" cy="658368"/>
           </a:xfrm>
           <a:prstGeom prst="roundRect">
             <a:avLst>
-              <a:gd name="adj" fmla="val 20000"/>
+              <a:gd name="adj" fmla="val 13889"/>
             </a:avLst>
           </a:prstGeom>
           <a:solidFill>
-            <a:srgbClr val="F0E8FF"/>
+            <a:srgbClr val="FEF6E8"/>
           </a:solidFill>
           <a:ln/>
           <a:effectLst>
@@ -3584,40 +3559,203 @@
       </p:sp>
       <p:sp>
         <p:nvSpPr>
+          <p:cNvPr id="10" name="Text 8"/>
+          <p:cNvSpPr/>
+          <p:nvPr/>
+        </p:nvSpPr>
+        <p:spPr>
+          <a:xfrm>
+            <a:off x="594360" y="2688336"/>
+            <a:ext cx="7863840" cy="402336"/>
+          </a:xfrm>
+          <a:prstGeom prst="rect">
+            <a:avLst/>
+          </a:prstGeom>
+          <a:noFill/>
+          <a:ln/>
+        </p:spPr>
+        <p:txBody>
+          <a:bodyPr wrap="square" lIns="0" tIns="0" rIns="0" bIns="0" rtlCol="0" anchor="ctr"/>
+          <a:lstStyle/>
+          <a:p>
+            <a:pPr indent="0" marL="0">
+              <a:buNone/>
+            </a:pPr>
+            <a:r>
+              <a:rPr lang="en-US" sz="1600" dirty="0">
+                <a:solidFill>
+                  <a:srgbClr val="1E293B"/>
+                </a:solidFill>
+                <a:latin typeface="Calibri" pitchFamily="34" charset="0"/>
+                <a:ea typeface="Calibri" pitchFamily="34" charset="-122"/>
+                <a:cs typeface="Calibri" pitchFamily="34" charset="-120"/>
+              </a:rPr>
+              <a:t>My brother </a:t>
+            </a:r>
+            <a:pPr indent="0" marL="0">
+              <a:buNone/>
+            </a:pPr>
+            <a:r>
+              <a:rPr lang="en-US" sz="1600" b="1" dirty="0">
+                <a:solidFill>
+                  <a:srgbClr val="34B76F"/>
+                </a:solidFill>
+                <a:latin typeface="Calibri" pitchFamily="34" charset="0"/>
+                <a:ea typeface="Calibri" pitchFamily="34" charset="-122"/>
+                <a:cs typeface="Calibri" pitchFamily="34" charset="-120"/>
+              </a:rPr>
+              <a:t>arthur</a:t>
+            </a:r>
+            <a:pPr indent="0" marL="0">
+              <a:buNone/>
+            </a:pPr>
+            <a:r>
+              <a:rPr lang="en-US" sz="1600" dirty="0">
+                <a:solidFill>
+                  <a:srgbClr val="1E293B"/>
+                </a:solidFill>
+                <a:latin typeface="Calibri" pitchFamily="34" charset="0"/>
+                <a:ea typeface="Calibri" pitchFamily="34" charset="-122"/>
+                <a:cs typeface="Calibri" pitchFamily="34" charset="-120"/>
+              </a:rPr>
+              <a:t> wrote the address.</a:t>
+            </a:r>
+            <a:endParaRPr lang="en-US" sz="1600" dirty="0"/>
+          </a:p>
+        </p:txBody>
+      </p:sp>
+      <p:sp>
+        <p:nvSpPr>
+          <p:cNvPr id="11" name="Shape 9"/>
+          <p:cNvSpPr/>
+          <p:nvPr/>
+        </p:nvSpPr>
+        <p:spPr>
+          <a:xfrm>
+            <a:off x="365760" y="3273552"/>
+            <a:ext cx="8412480" cy="658368"/>
+          </a:xfrm>
+          <a:prstGeom prst="roundRect">
+            <a:avLst>
+              <a:gd name="adj" fmla="val 13889"/>
+            </a:avLst>
+          </a:prstGeom>
+          <a:solidFill>
+            <a:srgbClr val="FFFFFF"/>
+          </a:solidFill>
+          <a:ln/>
+          <a:effectLst>
+            <a:outerShdw sx="100000" sy="100000" kx="0" ky="0" algn="bl" rotWithShape="0" blurRad="101600" dist="38100" dir="2700000">
+              <a:srgbClr val="000000">
+                <a:alpha val="12000"/>
+              </a:srgbClr>
+            </a:outerShdw>
+          </a:effectLst>
+        </p:spPr>
+      </p:sp>
+      <p:sp>
+        <p:nvSpPr>
           <p:cNvPr id="12" name="Text 10"/>
           <p:cNvSpPr/>
           <p:nvPr/>
         </p:nvSpPr>
         <p:spPr>
           <a:xfrm>
-            <a:off x="4572000" y="2514600"/>
-            <a:ext cx="3611880" cy="365760"/>
-          </a:xfrm>
-          <a:prstGeom prst="rect">
-            <a:avLst/>
-          </a:prstGeom>
-          <a:noFill/>
-          <a:ln/>
-        </p:spPr>
-        <p:txBody>
-          <a:bodyPr wrap="square" lIns="0" tIns="0" rIns="0" bIns="0" rtlCol="0" anchor="ctr"/>
-          <a:lstStyle/>
-          <a:p>
-            <a:pPr algn="ctr" indent="0" marL="0">
-              <a:buNone/>
-            </a:pPr>
-            <a:r>
-              <a:rPr lang="en-US" sz="1400" b="1" dirty="0">
-                <a:solidFill>
-                  <a:srgbClr val="0E1C42"/>
-                </a:solidFill>
-                <a:latin typeface="Calibri" pitchFamily="34" charset="0"/>
-                <a:ea typeface="Calibri" pitchFamily="34" charset="-122"/>
-                <a:cs typeface="Calibri" pitchFamily="34" charset="-120"/>
-              </a:rPr>
-              <a:t>ay</a:t>
-            </a:r>
-            <a:endParaRPr lang="en-US" sz="1400" dirty="0"/>
+            <a:off x="594360" y="3419856"/>
+            <a:ext cx="7863840" cy="402336"/>
+          </a:xfrm>
+          <a:prstGeom prst="rect">
+            <a:avLst/>
+          </a:prstGeom>
+          <a:noFill/>
+          <a:ln/>
+        </p:spPr>
+        <p:txBody>
+          <a:bodyPr wrap="square" lIns="0" tIns="0" rIns="0" bIns="0" rtlCol="0" anchor="ctr"/>
+          <a:lstStyle/>
+          <a:p>
+            <a:pPr indent="0" marL="0">
+              <a:buNone/>
+            </a:pPr>
+            <a:r>
+              <a:rPr lang="en-US" sz="1600" dirty="0">
+                <a:solidFill>
+                  <a:srgbClr val="1E293B"/>
+                </a:solidFill>
+                <a:latin typeface="Calibri" pitchFamily="34" charset="0"/>
+                <a:ea typeface="Calibri" pitchFamily="34" charset="-122"/>
+                <a:cs typeface="Calibri" pitchFamily="34" charset="-120"/>
+              </a:rPr>
+              <a:t>The package went to </a:t>
+            </a:r>
+            <a:pPr indent="0" marL="0">
+              <a:buNone/>
+            </a:pPr>
+            <a:r>
+              <a:rPr lang="en-US" sz="1600" b="1" dirty="0">
+                <a:solidFill>
+                  <a:srgbClr val="34B76F"/>
+                </a:solidFill>
+                <a:latin typeface="Calibri" pitchFamily="34" charset="0"/>
+                <a:ea typeface="Calibri" pitchFamily="34" charset="-122"/>
+                <a:cs typeface="Calibri" pitchFamily="34" charset="-120"/>
+              </a:rPr>
+              <a:t>new</a:t>
+            </a:r>
+            <a:pPr indent="0" marL="0">
+              <a:buNone/>
+            </a:pPr>
+            <a:r>
+              <a:rPr lang="en-US" sz="1600" dirty="0">
+                <a:solidFill>
+                  <a:srgbClr val="1E293B"/>
+                </a:solidFill>
+                <a:latin typeface="Calibri" pitchFamily="34" charset="0"/>
+                <a:ea typeface="Calibri" pitchFamily="34" charset="-122"/>
+                <a:cs typeface="Calibri" pitchFamily="34" charset="-120"/>
+              </a:rPr>
+              <a:t> York City.</a:t>
+            </a:r>
+            <a:endParaRPr lang="en-US" sz="1600" dirty="0"/>
+          </a:p>
+        </p:txBody>
+      </p:sp>
+      <p:sp>
+        <p:nvSpPr>
+          <p:cNvPr id="13" name="Text 11"/>
+          <p:cNvSpPr/>
+          <p:nvPr/>
+        </p:nvSpPr>
+        <p:spPr>
+          <a:xfrm>
+            <a:off x="365760" y="4050792"/>
+            <a:ext cx="8412480" cy="365760"/>
+          </a:xfrm>
+          <a:prstGeom prst="rect">
+            <a:avLst/>
+          </a:prstGeom>
+          <a:noFill/>
+          <a:ln/>
+        </p:spPr>
+        <p:txBody>
+          <a:bodyPr wrap="square" lIns="0" tIns="0" rIns="0" bIns="0" rtlCol="0" anchor="ctr"/>
+          <a:lstStyle/>
+          <a:p>
+            <a:pPr indent="0" marL="0">
+              <a:buNone/>
+            </a:pPr>
+            <a:r>
+              <a:rPr lang="en-US" sz="1500" b="1" dirty="0">
+                <a:solidFill>
+                  <a:srgbClr val="34B76F"/>
+                </a:solidFill>
+                <a:latin typeface="Calibri" pitchFamily="34" charset="0"/>
+                <a:ea typeface="Calibri" pitchFamily="34" charset="-122"/>
+                <a:cs typeface="Calibri" pitchFamily="34" charset="-120"/>
+              </a:rPr>
+              <a:t>✅  Answers revealed</a:t>
+            </a:r>
+            <a:endParaRPr lang="en-US" sz="1500" dirty="0"/>
           </a:p>
         </p:txBody>
       </p:sp>
@@ -3635,7 +3773,7 @@
     <p:bg>
       <p:bgPr>
         <a:solidFill>
-          <a:srgbClr val="E5F7FC"/>
+          <a:srgbClr val="F8FAFC"/>
         </a:solidFill>
       </p:bgPr>
     </p:bg>
@@ -3655,30 +3793,89 @@
       </p:grpSpPr>
       <p:sp>
         <p:nvSpPr>
-          <p:cNvPr id="2" name="Text 0"/>
-          <p:cNvSpPr/>
-          <p:nvPr/>
-        </p:nvSpPr>
-        <p:spPr>
-          <a:xfrm>
-            <a:off x="365760" y="164592"/>
-            <a:ext cx="5943600" cy="566928"/>
-          </a:xfrm>
-          <a:prstGeom prst="rect">
-            <a:avLst/>
-          </a:prstGeom>
-          <a:noFill/>
-          <a:ln/>
-        </p:spPr>
-        <p:txBody>
-          <a:bodyPr wrap="square" lIns="0" tIns="0" rIns="0" bIns="0" rtlCol="0" anchor="ctr"/>
-          <a:lstStyle/>
-          <a:p>
-            <a:pPr algn="l" indent="0" marL="0">
-              <a:buNone/>
-            </a:pPr>
-            <a:r>
-              <a:rPr lang="en-US" sz="2800" b="1" dirty="0">
+          <p:cNvPr id="2" name="Shape 0"/>
+          <p:cNvSpPr/>
+          <p:nvPr/>
+        </p:nvSpPr>
+        <p:spPr>
+          <a:xfrm>
+            <a:off x="0" y="0"/>
+            <a:ext cx="9144000" cy="566928"/>
+          </a:xfrm>
+          <a:prstGeom prst="rect">
+            <a:avLst/>
+          </a:prstGeom>
+          <a:solidFill>
+            <a:srgbClr val="0E1C42"/>
+          </a:solidFill>
+          <a:ln/>
+        </p:spPr>
+      </p:sp>
+      <p:sp>
+        <p:nvSpPr>
+          <p:cNvPr id="3" name="Text 1"/>
+          <p:cNvSpPr/>
+          <p:nvPr/>
+        </p:nvSpPr>
+        <p:spPr>
+          <a:xfrm>
+            <a:off x="365760" y="54864"/>
+            <a:ext cx="8412480" cy="457200"/>
+          </a:xfrm>
+          <a:prstGeom prst="rect">
+            <a:avLst/>
+          </a:prstGeom>
+          <a:noFill/>
+          <a:ln/>
+        </p:spPr>
+        <p:txBody>
+          <a:bodyPr wrap="square" lIns="0" tIns="0" rIns="0" bIns="0" rtlCol="0" anchor="ctr"/>
+          <a:lstStyle/>
+          <a:p>
+            <a:pPr indent="0" marL="0">
+              <a:buNone/>
+            </a:pPr>
+            <a:r>
+              <a:rPr lang="en-US" sz="2200" b="1" dirty="0">
+                <a:solidFill>
+                  <a:srgbClr val="FFFFFF"/>
+                </a:solidFill>
+                <a:latin typeface="Calibri" pitchFamily="34" charset="0"/>
+                <a:ea typeface="Calibri" pitchFamily="34" charset="-122"/>
+                <a:cs typeface="Calibri" pitchFamily="34" charset="-120"/>
+              </a:rPr>
+              <a:t>🔠  Spelling</a:t>
+            </a:r>
+            <a:endParaRPr lang="en-US" sz="2200" dirty="0"/>
+          </a:p>
+        </p:txBody>
+      </p:sp>
+      <p:sp>
+        <p:nvSpPr>
+          <p:cNvPr id="4" name="Text 2"/>
+          <p:cNvSpPr/>
+          <p:nvPr/>
+        </p:nvSpPr>
+        <p:spPr>
+          <a:xfrm>
+            <a:off x="365760" y="777240"/>
+            <a:ext cx="8229600" cy="237744"/>
+          </a:xfrm>
+          <a:prstGeom prst="rect">
+            <a:avLst/>
+          </a:prstGeom>
+          <a:noFill/>
+          <a:ln/>
+        </p:spPr>
+        <p:txBody>
+          <a:bodyPr wrap="square" lIns="0" tIns="0" rIns="0" bIns="0" rtlCol="0" anchor="ctr"/>
+          <a:lstStyle/>
+          <a:p>
+            <a:pPr indent="0" marL="0">
+              <a:buNone/>
+            </a:pPr>
+            <a:r>
+              <a:rPr lang="en-US" sz="1100" b="1" spc="100" kern="0" dirty="0">
                 <a:solidFill>
                   <a:srgbClr val="0E1C42"/>
                 </a:solidFill>
@@ -3686,116 +3883,76 @@
                 <a:ea typeface="Calibri" pitchFamily="34" charset="-122"/>
                 <a:cs typeface="Calibri" pitchFamily="34" charset="-120"/>
               </a:rPr>
-              <a:t>🔠 Spelling: Vowel teams ai/ay and oa/ow — Sorted</a:t>
-            </a:r>
-            <a:endParaRPr lang="en-US" sz="2800" dirty="0"/>
-          </a:p>
-        </p:txBody>
-      </p:sp>
-      <p:sp>
-        <p:nvSpPr>
-          <p:cNvPr id="3" name="Shape 1"/>
-          <p:cNvSpPr/>
-          <p:nvPr/>
-        </p:nvSpPr>
-        <p:spPr>
-          <a:xfrm>
-            <a:off x="365760" y="749808"/>
-            <a:ext cx="8412480" cy="0"/>
-          </a:xfrm>
-          <a:prstGeom prst="line">
-            <a:avLst/>
-          </a:prstGeom>
-          <a:noFill/>
+              <a:t>VOWEL TEAMS AI/AY AND OA/OW</a:t>
+            </a:r>
+            <a:endParaRPr lang="en-US" sz="1100" dirty="0"/>
+          </a:p>
+        </p:txBody>
+      </p:sp>
+      <p:sp>
+        <p:nvSpPr>
+          <p:cNvPr id="5" name="Text 3"/>
+          <p:cNvSpPr/>
+          <p:nvPr/>
+        </p:nvSpPr>
+        <p:spPr>
+          <a:xfrm>
+            <a:off x="365760" y="1078992"/>
+            <a:ext cx="8229600" cy="237744"/>
+          </a:xfrm>
+          <a:prstGeom prst="rect">
+            <a:avLst/>
+          </a:prstGeom>
+          <a:noFill/>
+          <a:ln/>
+        </p:spPr>
+        <p:txBody>
+          <a:bodyPr wrap="square" lIns="0" tIns="0" rIns="0" bIns="0" rtlCol="0" anchor="ctr"/>
+          <a:lstStyle/>
+          <a:p>
+            <a:pPr indent="0" marL="0">
+              <a:buNone/>
+            </a:pPr>
+            <a:r>
+              <a:rPr lang="en-US" sz="1100" b="1" spc="100" kern="0" dirty="0">
+                <a:solidFill>
+                  <a:srgbClr val="64748B"/>
+                </a:solidFill>
+                <a:latin typeface="Calibri" pitchFamily="34" charset="0"/>
+                <a:ea typeface="Calibri" pitchFamily="34" charset="-122"/>
+                <a:cs typeface="Calibri" pitchFamily="34" charset="-120"/>
+              </a:rPr>
+              <a:t>WORD BANK</a:t>
+            </a:r>
+            <a:endParaRPr lang="en-US" sz="1100" dirty="0"/>
+          </a:p>
+        </p:txBody>
+      </p:sp>
+      <p:sp>
+        <p:nvSpPr>
+          <p:cNvPr id="6" name="Shape 4"/>
+          <p:cNvSpPr/>
+          <p:nvPr/>
+        </p:nvSpPr>
+        <p:spPr>
+          <a:xfrm>
+            <a:off x="365760" y="1353312"/>
+            <a:ext cx="8412480" cy="1005840"/>
+          </a:xfrm>
+          <a:prstGeom prst="roundRect">
+            <a:avLst>
+              <a:gd name="adj" fmla="val 9091"/>
+            </a:avLst>
+          </a:prstGeom>
+          <a:solidFill>
+            <a:srgbClr val="FFFFFF"/>
+          </a:solidFill>
           <a:ln w="19050">
             <a:solidFill>
-              <a:srgbClr val="5CB85C"/>
+              <a:srgbClr val="0E1C42"/>
             </a:solidFill>
             <a:prstDash val="solid"/>
           </a:ln>
-        </p:spPr>
-      </p:sp>
-      <p:sp>
-        <p:nvSpPr>
-          <p:cNvPr id="4" name="Shape 2"/>
-          <p:cNvSpPr/>
-          <p:nvPr/>
-        </p:nvSpPr>
-        <p:spPr>
-          <a:xfrm>
-            <a:off x="6492240" y="173736"/>
-            <a:ext cx="2286000" cy="502920"/>
-          </a:xfrm>
-          <a:prstGeom prst="roundRect">
-            <a:avLst>
-              <a:gd name="adj" fmla="val 21818"/>
-            </a:avLst>
-          </a:prstGeom>
-          <a:solidFill>
-            <a:srgbClr val="5CB85C"/>
-          </a:solidFill>
-          <a:ln/>
-        </p:spPr>
-      </p:sp>
-      <p:sp>
-        <p:nvSpPr>
-          <p:cNvPr id="5" name="Text 3"/>
-          <p:cNvSpPr/>
-          <p:nvPr/>
-        </p:nvSpPr>
-        <p:spPr>
-          <a:xfrm>
-            <a:off x="6492240" y="173736"/>
-            <a:ext cx="2286000" cy="502920"/>
-          </a:xfrm>
-          <a:prstGeom prst="rect">
-            <a:avLst/>
-          </a:prstGeom>
-          <a:noFill/>
-          <a:ln/>
-        </p:spPr>
-        <p:txBody>
-          <a:bodyPr wrap="square" lIns="0" tIns="0" rIns="0" bIns="0" rtlCol="0" anchor="ctr"/>
-          <a:lstStyle/>
-          <a:p>
-            <a:pPr algn="ctr" indent="0" marL="0">
-              <a:buNone/>
-            </a:pPr>
-            <a:r>
-              <a:rPr lang="en-US" sz="1100" b="1" dirty="0">
-                <a:solidFill>
-                  <a:srgbClr val="0E1C42"/>
-                </a:solidFill>
-                <a:latin typeface="Calibri" pitchFamily="34" charset="0"/>
-                <a:ea typeface="Calibri" pitchFamily="34" charset="-122"/>
-                <a:cs typeface="Calibri" pitchFamily="34" charset="-120"/>
-              </a:rPr>
-              <a:t>CHAT PROMPT</a:t>
-            </a:r>
-            <a:endParaRPr lang="en-US" sz="1100" dirty="0"/>
-          </a:p>
-        </p:txBody>
-      </p:sp>
-      <p:sp>
-        <p:nvSpPr>
-          <p:cNvPr id="6" name="Shape 4"/>
-          <p:cNvSpPr/>
-          <p:nvPr/>
-        </p:nvSpPr>
-        <p:spPr>
-          <a:xfrm>
-            <a:off x="457200" y="1005840"/>
-            <a:ext cx="3794760" cy="457200"/>
-          </a:xfrm>
-          <a:prstGeom prst="roundRect">
-            <a:avLst>
-              <a:gd name="adj" fmla="val 20000"/>
-            </a:avLst>
-          </a:prstGeom>
-          <a:solidFill>
-            <a:srgbClr val="F0E8FF"/>
-          </a:solidFill>
-          <a:ln/>
           <a:effectLst>
             <a:outerShdw sx="100000" sy="100000" kx="0" ky="0" algn="bl" rotWithShape="0" blurRad="101600" dist="38100" dir="2700000">
               <a:srgbClr val="000000">
@@ -3813,24 +3970,24 @@
         </p:nvSpPr>
         <p:spPr>
           <a:xfrm>
-            <a:off x="548640" y="1051560"/>
-            <a:ext cx="3611880" cy="365760"/>
-          </a:xfrm>
-          <a:prstGeom prst="rect">
-            <a:avLst/>
-          </a:prstGeom>
-          <a:noFill/>
-          <a:ln/>
-        </p:spPr>
-        <p:txBody>
-          <a:bodyPr wrap="square" lIns="0" tIns="0" rIns="0" bIns="0" rtlCol="0" anchor="ctr"/>
-          <a:lstStyle/>
-          <a:p>
-            <a:pPr algn="ctr" indent="0" marL="0">
-              <a:buNone/>
-            </a:pPr>
-            <a:r>
-              <a:rPr lang="en-US" sz="1400" b="1" dirty="0">
+            <a:off x="594360" y="1481328"/>
+            <a:ext cx="7955280" cy="749808"/>
+          </a:xfrm>
+          <a:prstGeom prst="rect">
+            <a:avLst/>
+          </a:prstGeom>
+          <a:noFill/>
+          <a:ln/>
+        </p:spPr>
+        <p:txBody>
+          <a:bodyPr wrap="square" lIns="0" tIns="0" rIns="0" bIns="0" rtlCol="0" anchor="ctr"/>
+          <a:lstStyle/>
+          <a:p>
+            <a:pPr indent="0" marL="0">
+              <a:buNone/>
+            </a:pPr>
+            <a:r>
+              <a:rPr lang="en-US" sz="1700" dirty="0">
                 <a:solidFill>
                   <a:srgbClr val="0E1C42"/>
                 </a:solidFill>
@@ -3838,9 +3995,9 @@
                 <a:ea typeface="Calibri" pitchFamily="34" charset="-122"/>
                 <a:cs typeface="Calibri" pitchFamily="34" charset="-120"/>
               </a:rPr>
-              <a:t>ai</a:t>
-            </a:r>
-            <a:endParaRPr lang="en-US" sz="1400" dirty="0"/>
+              <a:t>paint   ·   stain   ·   tray   ·   spray   ·   toast   ·   groan   ·   slow   ·   throw</a:t>
+            </a:r>
+            <a:endParaRPr lang="en-US" sz="1700" dirty="0"/>
           </a:p>
         </p:txBody>
       </p:sp>
@@ -3852,219 +4009,34 @@
         </p:nvSpPr>
         <p:spPr>
           <a:xfrm>
-            <a:off x="548640" y="1554480"/>
-            <a:ext cx="3611880" cy="320040"/>
-          </a:xfrm>
-          <a:prstGeom prst="rect">
-            <a:avLst/>
-          </a:prstGeom>
-          <a:noFill/>
-          <a:ln/>
-        </p:spPr>
-        <p:txBody>
-          <a:bodyPr wrap="square" lIns="0" tIns="0" rIns="0" bIns="0" rtlCol="0" anchor="ctr"/>
-          <a:lstStyle/>
-          <a:p>
-            <a:pPr algn="ctr" indent="0" marL="0">
-              <a:buNone/>
-            </a:pPr>
-            <a:r>
-              <a:rPr lang="en-US" sz="1400" b="1" dirty="0">
-                <a:solidFill>
-                  <a:srgbClr val="34B76F"/>
-                </a:solidFill>
-                <a:latin typeface="Calibri" pitchFamily="34" charset="0"/>
-                <a:ea typeface="Calibri" pitchFamily="34" charset="-122"/>
-                <a:cs typeface="Calibri" pitchFamily="34" charset="-120"/>
-              </a:rPr>
-              <a:t>paint</a:t>
-            </a:r>
-            <a:endParaRPr lang="en-US" sz="1400" dirty="0"/>
-          </a:p>
-        </p:txBody>
-      </p:sp>
-      <p:sp>
-        <p:nvSpPr>
-          <p:cNvPr id="9" name="Text 7"/>
-          <p:cNvSpPr/>
-          <p:nvPr/>
-        </p:nvSpPr>
-        <p:spPr>
-          <a:xfrm>
-            <a:off x="548640" y="1901952"/>
-            <a:ext cx="3611880" cy="320040"/>
-          </a:xfrm>
-          <a:prstGeom prst="rect">
-            <a:avLst/>
-          </a:prstGeom>
-          <a:noFill/>
-          <a:ln/>
-        </p:spPr>
-        <p:txBody>
-          <a:bodyPr wrap="square" lIns="0" tIns="0" rIns="0" bIns="0" rtlCol="0" anchor="ctr"/>
-          <a:lstStyle/>
-          <a:p>
-            <a:pPr algn="ctr" indent="0" marL="0">
-              <a:buNone/>
-            </a:pPr>
-            <a:r>
-              <a:rPr lang="en-US" sz="1400" b="1" dirty="0">
-                <a:solidFill>
-                  <a:srgbClr val="34B76F"/>
-                </a:solidFill>
-                <a:latin typeface="Calibri" pitchFamily="34" charset="0"/>
-                <a:ea typeface="Calibri" pitchFamily="34" charset="-122"/>
-                <a:cs typeface="Calibri" pitchFamily="34" charset="-120"/>
-              </a:rPr>
-              <a:t>stain</a:t>
-            </a:r>
-            <a:endParaRPr lang="en-US" sz="1400" dirty="0"/>
-          </a:p>
-        </p:txBody>
-      </p:sp>
-      <p:sp>
-        <p:nvSpPr>
-          <p:cNvPr id="10" name="Shape 8"/>
-          <p:cNvSpPr/>
-          <p:nvPr/>
-        </p:nvSpPr>
-        <p:spPr>
-          <a:xfrm>
-            <a:off x="4480560" y="1005840"/>
-            <a:ext cx="3794760" cy="457200"/>
-          </a:xfrm>
-          <a:prstGeom prst="roundRect">
-            <a:avLst>
-              <a:gd name="adj" fmla="val 20000"/>
-            </a:avLst>
-          </a:prstGeom>
-          <a:solidFill>
-            <a:srgbClr val="F0E8FF"/>
-          </a:solidFill>
-          <a:ln/>
-          <a:effectLst>
-            <a:outerShdw sx="100000" sy="100000" kx="0" ky="0" algn="bl" rotWithShape="0" blurRad="101600" dist="38100" dir="2700000">
-              <a:srgbClr val="000000">
-                <a:alpha val="12000"/>
-              </a:srgbClr>
-            </a:outerShdw>
-          </a:effectLst>
-        </p:spPr>
-      </p:sp>
-      <p:sp>
-        <p:nvSpPr>
-          <p:cNvPr id="11" name="Text 9"/>
-          <p:cNvSpPr/>
-          <p:nvPr/>
-        </p:nvSpPr>
-        <p:spPr>
-          <a:xfrm>
-            <a:off x="4572000" y="1051560"/>
-            <a:ext cx="3611880" cy="365760"/>
-          </a:xfrm>
-          <a:prstGeom prst="rect">
-            <a:avLst/>
-          </a:prstGeom>
-          <a:noFill/>
-          <a:ln/>
-        </p:spPr>
-        <p:txBody>
-          <a:bodyPr wrap="square" lIns="0" tIns="0" rIns="0" bIns="0" rtlCol="0" anchor="ctr"/>
-          <a:lstStyle/>
-          <a:p>
-            <a:pPr algn="ctr" indent="0" marL="0">
-              <a:buNone/>
-            </a:pPr>
-            <a:r>
-              <a:rPr lang="en-US" sz="1400" b="1" dirty="0">
-                <a:solidFill>
-                  <a:srgbClr val="0E1C42"/>
-                </a:solidFill>
-                <a:latin typeface="Calibri" pitchFamily="34" charset="0"/>
-                <a:ea typeface="Calibri" pitchFamily="34" charset="-122"/>
-                <a:cs typeface="Calibri" pitchFamily="34" charset="-120"/>
-              </a:rPr>
-              <a:t>ay</a:t>
-            </a:r>
-            <a:endParaRPr lang="en-US" sz="1400" dirty="0"/>
-          </a:p>
-        </p:txBody>
-      </p:sp>
-      <p:sp>
-        <p:nvSpPr>
-          <p:cNvPr id="12" name="Text 10"/>
-          <p:cNvSpPr/>
-          <p:nvPr/>
-        </p:nvSpPr>
-        <p:spPr>
-          <a:xfrm>
-            <a:off x="4572000" y="1554480"/>
-            <a:ext cx="3611880" cy="320040"/>
-          </a:xfrm>
-          <a:prstGeom prst="rect">
-            <a:avLst/>
-          </a:prstGeom>
-          <a:noFill/>
-          <a:ln/>
-        </p:spPr>
-        <p:txBody>
-          <a:bodyPr wrap="square" lIns="0" tIns="0" rIns="0" bIns="0" rtlCol="0" anchor="ctr"/>
-          <a:lstStyle/>
-          <a:p>
-            <a:pPr algn="ctr" indent="0" marL="0">
-              <a:buNone/>
-            </a:pPr>
-            <a:r>
-              <a:rPr lang="en-US" sz="1400" b="1" dirty="0">
-                <a:solidFill>
-                  <a:srgbClr val="34B76F"/>
-                </a:solidFill>
-                <a:latin typeface="Calibri" pitchFamily="34" charset="0"/>
-                <a:ea typeface="Calibri" pitchFamily="34" charset="-122"/>
-                <a:cs typeface="Calibri" pitchFamily="34" charset="-120"/>
-              </a:rPr>
-              <a:t>tray</a:t>
-            </a:r>
-            <a:endParaRPr lang="en-US" sz="1400" dirty="0"/>
-          </a:p>
-        </p:txBody>
-      </p:sp>
-      <p:sp>
-        <p:nvSpPr>
-          <p:cNvPr id="13" name="Text 11"/>
-          <p:cNvSpPr/>
-          <p:nvPr/>
-        </p:nvSpPr>
-        <p:spPr>
-          <a:xfrm>
-            <a:off x="4572000" y="1901952"/>
-            <a:ext cx="3611880" cy="320040"/>
-          </a:xfrm>
-          <a:prstGeom prst="rect">
-            <a:avLst/>
-          </a:prstGeom>
-          <a:noFill/>
-          <a:ln/>
-        </p:spPr>
-        <p:txBody>
-          <a:bodyPr wrap="square" lIns="0" tIns="0" rIns="0" bIns="0" rtlCol="0" anchor="ctr"/>
-          <a:lstStyle/>
-          <a:p>
-            <a:pPr algn="ctr" indent="0" marL="0">
-              <a:buNone/>
-            </a:pPr>
-            <a:r>
-              <a:rPr lang="en-US" sz="1400" b="1" dirty="0">
-                <a:solidFill>
-                  <a:srgbClr val="34B76F"/>
-                </a:solidFill>
-                <a:latin typeface="Calibri" pitchFamily="34" charset="0"/>
-                <a:ea typeface="Calibri" pitchFamily="34" charset="-122"/>
-                <a:cs typeface="Calibri" pitchFamily="34" charset="-120"/>
-              </a:rPr>
-              <a:t>spray</a:t>
-            </a:r>
-            <a:endParaRPr lang="en-US" sz="1400" dirty="0"/>
+            <a:off x="365760" y="2514600"/>
+            <a:ext cx="8412480" cy="457200"/>
+          </a:xfrm>
+          <a:prstGeom prst="rect">
+            <a:avLst/>
+          </a:prstGeom>
+          <a:noFill/>
+          <a:ln/>
+        </p:spPr>
+        <p:txBody>
+          <a:bodyPr wrap="square" lIns="0" tIns="0" rIns="0" bIns="0" rtlCol="0" anchor="ctr"/>
+          <a:lstStyle/>
+          <a:p>
+            <a:pPr indent="0" marL="0">
+              <a:buNone/>
+            </a:pPr>
+            <a:r>
+              <a:rPr lang="en-US" sz="1500" i="1" dirty="0">
+                <a:solidFill>
+                  <a:srgbClr val="64748B"/>
+                </a:solidFill>
+                <a:latin typeface="Calibri" pitchFamily="34" charset="0"/>
+                <a:ea typeface="Calibri" pitchFamily="34" charset="-122"/>
+                <a:cs typeface="Calibri" pitchFamily="34" charset="-120"/>
+              </a:rPr>
+              <a:t>Which column does each word belong in?  Columns: ai  |  ay  |  oa  |  ow</a:t>
+            </a:r>
+            <a:endParaRPr lang="en-US" sz="1500" dirty="0"/>
           </a:p>
         </p:txBody>
       </p:sp>
@@ -4082,7 +4054,7 @@
     <p:bg>
       <p:bgPr>
         <a:solidFill>
-          <a:srgbClr val="FFFFFF"/>
+          <a:srgbClr val="F8FAFC"/>
         </a:solidFill>
       </p:bgPr>
     </p:bg>
@@ -4102,30 +4074,89 @@
       </p:grpSpPr>
       <p:sp>
         <p:nvSpPr>
-          <p:cNvPr id="2" name="Text 0"/>
-          <p:cNvSpPr/>
-          <p:nvPr/>
-        </p:nvSpPr>
-        <p:spPr>
-          <a:xfrm>
-            <a:off x="365760" y="164592"/>
-            <a:ext cx="8412480" cy="566928"/>
-          </a:xfrm>
-          <a:prstGeom prst="rect">
-            <a:avLst/>
-          </a:prstGeom>
-          <a:noFill/>
-          <a:ln/>
-        </p:spPr>
-        <p:txBody>
-          <a:bodyPr wrap="square" lIns="0" tIns="0" rIns="0" bIns="0" rtlCol="0" anchor="ctr"/>
-          <a:lstStyle/>
-          <a:p>
-            <a:pPr algn="l" indent="0" marL="0">
-              <a:buNone/>
-            </a:pPr>
-            <a:r>
-              <a:rPr lang="en-US" sz="2800" b="1" dirty="0">
+          <p:cNvPr id="2" name="Shape 0"/>
+          <p:cNvSpPr/>
+          <p:nvPr/>
+        </p:nvSpPr>
+        <p:spPr>
+          <a:xfrm>
+            <a:off x="0" y="0"/>
+            <a:ext cx="9144000" cy="566928"/>
+          </a:xfrm>
+          <a:prstGeom prst="rect">
+            <a:avLst/>
+          </a:prstGeom>
+          <a:solidFill>
+            <a:srgbClr val="0E1C42"/>
+          </a:solidFill>
+          <a:ln/>
+        </p:spPr>
+      </p:sp>
+      <p:sp>
+        <p:nvSpPr>
+          <p:cNvPr id="3" name="Text 1"/>
+          <p:cNvSpPr/>
+          <p:nvPr/>
+        </p:nvSpPr>
+        <p:spPr>
+          <a:xfrm>
+            <a:off x="365760" y="54864"/>
+            <a:ext cx="8412480" cy="457200"/>
+          </a:xfrm>
+          <a:prstGeom prst="rect">
+            <a:avLst/>
+          </a:prstGeom>
+          <a:noFill/>
+          <a:ln/>
+        </p:spPr>
+        <p:txBody>
+          <a:bodyPr wrap="square" lIns="0" tIns="0" rIns="0" bIns="0" rtlCol="0" anchor="ctr"/>
+          <a:lstStyle/>
+          <a:p>
+            <a:pPr indent="0" marL="0">
+              <a:buNone/>
+            </a:pPr>
+            <a:r>
+              <a:rPr lang="en-US" sz="2200" b="1" dirty="0">
+                <a:solidFill>
+                  <a:srgbClr val="FFFFFF"/>
+                </a:solidFill>
+                <a:latin typeface="Calibri" pitchFamily="34" charset="0"/>
+                <a:ea typeface="Calibri" pitchFamily="34" charset="-122"/>
+                <a:cs typeface="Calibri" pitchFamily="34" charset="-120"/>
+              </a:rPr>
+              <a:t>🔠  Spelling</a:t>
+            </a:r>
+            <a:endParaRPr lang="en-US" sz="2200" dirty="0"/>
+          </a:p>
+        </p:txBody>
+      </p:sp>
+      <p:sp>
+        <p:nvSpPr>
+          <p:cNvPr id="4" name="Text 2"/>
+          <p:cNvSpPr/>
+          <p:nvPr/>
+        </p:nvSpPr>
+        <p:spPr>
+          <a:xfrm>
+            <a:off x="365760" y="777240"/>
+            <a:ext cx="8229600" cy="237744"/>
+          </a:xfrm>
+          <a:prstGeom prst="rect">
+            <a:avLst/>
+          </a:prstGeom>
+          <a:noFill/>
+          <a:ln/>
+        </p:spPr>
+        <p:txBody>
+          <a:bodyPr wrap="square" lIns="0" tIns="0" rIns="0" bIns="0" rtlCol="0" anchor="ctr"/>
+          <a:lstStyle/>
+          <a:p>
+            <a:pPr indent="0" marL="0">
+              <a:buNone/>
+            </a:pPr>
+            <a:r>
+              <a:rPr lang="en-US" sz="1100" b="1" spc="100" kern="0" dirty="0">
                 <a:solidFill>
                   <a:srgbClr val="0E1C42"/>
                 </a:solidFill>
@@ -4133,69 +4164,7 @@
                 <a:ea typeface="Calibri" pitchFamily="34" charset="-122"/>
                 <a:cs typeface="Calibri" pitchFamily="34" charset="-120"/>
               </a:rPr>
-              <a:t>📕 Reading Focus</a:t>
-            </a:r>
-            <a:endParaRPr lang="en-US" sz="2800" dirty="0"/>
-          </a:p>
-        </p:txBody>
-      </p:sp>
-      <p:sp>
-        <p:nvSpPr>
-          <p:cNvPr id="3" name="Shape 1"/>
-          <p:cNvSpPr/>
-          <p:nvPr/>
-        </p:nvSpPr>
-        <p:spPr>
-          <a:xfrm>
-            <a:off x="365760" y="749808"/>
-            <a:ext cx="8412480" cy="0"/>
-          </a:xfrm>
-          <a:prstGeom prst="line">
-            <a:avLst/>
-          </a:prstGeom>
-          <a:noFill/>
-          <a:ln w="19050">
-            <a:solidFill>
-              <a:srgbClr val="55C8E8"/>
-            </a:solidFill>
-            <a:prstDash val="solid"/>
-          </a:ln>
-        </p:spPr>
-      </p:sp>
-      <p:sp>
-        <p:nvSpPr>
-          <p:cNvPr id="4" name="Text 2"/>
-          <p:cNvSpPr/>
-          <p:nvPr/>
-        </p:nvSpPr>
-        <p:spPr>
-          <a:xfrm>
-            <a:off x="457200" y="1005840"/>
-            <a:ext cx="8046720" cy="292608"/>
-          </a:xfrm>
-          <a:prstGeom prst="rect">
-            <a:avLst/>
-          </a:prstGeom>
-          <a:noFill/>
-          <a:ln/>
-        </p:spPr>
-        <p:txBody>
-          <a:bodyPr wrap="square" lIns="0" tIns="0" rIns="0" bIns="0" rtlCol="0" anchor="ctr"/>
-          <a:lstStyle/>
-          <a:p>
-            <a:pPr indent="0" marL="0">
-              <a:buNone/>
-            </a:pPr>
-            <a:r>
-              <a:rPr lang="en-US" sz="1100" b="1" spc="200" kern="0" dirty="0">
-                <a:solidFill>
-                  <a:srgbClr val="C7922C"/>
-                </a:solidFill>
-                <a:latin typeface="Calibri" pitchFamily="34" charset="0"/>
-                <a:ea typeface="Calibri" pitchFamily="34" charset="-122"/>
-                <a:cs typeface="Calibri" pitchFamily="34" charset="-120"/>
-              </a:rPr>
-              <a:t>COPYWORK</a:t>
+              <a:t>VOWEL TEAMS AI/AY AND OA/OW</a:t>
             </a:r>
             <a:endParaRPr lang="en-US" sz="1100" dirty="0"/>
           </a:p>
@@ -4209,23 +4178,79 @@
         </p:nvSpPr>
         <p:spPr>
           <a:xfrm>
-            <a:off x="457200" y="1325880"/>
-            <a:ext cx="8229600" cy="731520"/>
+            <a:off x="411480" y="1078992"/>
+            <a:ext cx="2011680" cy="457200"/>
           </a:xfrm>
           <a:prstGeom prst="roundRect">
             <a:avLst>
-              <a:gd name="adj" fmla="val 12500"/>
+              <a:gd name="adj" fmla="val 16000"/>
             </a:avLst>
           </a:prstGeom>
           <a:solidFill>
-            <a:srgbClr val="FEF6E8"/>
+            <a:srgbClr val="0E1C42"/>
           </a:solidFill>
-          <a:ln w="12700">
-            <a:solidFill>
-              <a:srgbClr val="C7922C"/>
-            </a:solidFill>
-            <a:prstDash val="solid"/>
-          </a:ln>
+          <a:ln/>
+        </p:spPr>
+      </p:sp>
+      <p:sp>
+        <p:nvSpPr>
+          <p:cNvPr id="6" name="Text 4"/>
+          <p:cNvSpPr/>
+          <p:nvPr/>
+        </p:nvSpPr>
+        <p:spPr>
+          <a:xfrm>
+            <a:off x="457200" y="1133856"/>
+            <a:ext cx="1920240" cy="347472"/>
+          </a:xfrm>
+          <a:prstGeom prst="rect">
+            <a:avLst/>
+          </a:prstGeom>
+          <a:noFill/>
+          <a:ln/>
+        </p:spPr>
+        <p:txBody>
+          <a:bodyPr wrap="square" lIns="0" tIns="0" rIns="0" bIns="0" rtlCol="0" anchor="ctr"/>
+          <a:lstStyle/>
+          <a:p>
+            <a:pPr algn="ctr" indent="0" marL="0">
+              <a:buNone/>
+            </a:pPr>
+            <a:r>
+              <a:rPr lang="en-US" sz="1300" b="1" dirty="0">
+                <a:solidFill>
+                  <a:srgbClr val="FFFFFF"/>
+                </a:solidFill>
+                <a:latin typeface="Calibri" pitchFamily="34" charset="0"/>
+                <a:ea typeface="Calibri" pitchFamily="34" charset="-122"/>
+                <a:cs typeface="Calibri" pitchFamily="34" charset="-120"/>
+              </a:rPr>
+              <a:t>ai</a:t>
+            </a:r>
+            <a:endParaRPr lang="en-US" sz="1300" dirty="0"/>
+          </a:p>
+        </p:txBody>
+      </p:sp>
+      <p:sp>
+        <p:nvSpPr>
+          <p:cNvPr id="7" name="Shape 5"/>
+          <p:cNvSpPr/>
+          <p:nvPr/>
+        </p:nvSpPr>
+        <p:spPr>
+          <a:xfrm>
+            <a:off x="411480" y="1591056"/>
+            <a:ext cx="2011680" cy="2103120"/>
+          </a:xfrm>
+          <a:prstGeom prst="roundRect">
+            <a:avLst>
+              <a:gd name="adj" fmla="val 4545"/>
+            </a:avLst>
+          </a:prstGeom>
+          <a:solidFill>
+            <a:srgbClr val="FFFFFF"/>
+          </a:solidFill>
+          <a:ln/>
           <a:effectLst>
             <a:outerShdw sx="100000" sy="100000" kx="0" ky="0" algn="bl" rotWithShape="0" blurRad="101600" dist="38100" dir="2700000">
               <a:srgbClr val="000000">
@@ -4237,30 +4262,30 @@
       </p:sp>
       <p:sp>
         <p:nvSpPr>
-          <p:cNvPr id="6" name="Text 4"/>
-          <p:cNvSpPr/>
-          <p:nvPr/>
-        </p:nvSpPr>
-        <p:spPr>
-          <a:xfrm>
-            <a:off x="640080" y="1435608"/>
-            <a:ext cx="7863840" cy="502920"/>
-          </a:xfrm>
-          <a:prstGeom prst="rect">
-            <a:avLst/>
-          </a:prstGeom>
-          <a:noFill/>
-          <a:ln/>
-        </p:spPr>
-        <p:txBody>
-          <a:bodyPr wrap="square" lIns="0" tIns="0" rIns="0" bIns="0" rtlCol="0" anchor="ctr"/>
-          <a:lstStyle/>
-          <a:p>
-            <a:pPr indent="0" marL="0">
-              <a:buNone/>
-            </a:pPr>
-            <a:r>
-              <a:rPr lang="en-US" sz="1800" i="1" dirty="0">
+          <p:cNvPr id="8" name="Text 6"/>
+          <p:cNvSpPr/>
+          <p:nvPr/>
+        </p:nvSpPr>
+        <p:spPr>
+          <a:xfrm>
+            <a:off x="502920" y="1700784"/>
+            <a:ext cx="1828800" cy="1883664"/>
+          </a:xfrm>
+          <a:prstGeom prst="rect">
+            <a:avLst/>
+          </a:prstGeom>
+          <a:noFill/>
+          <a:ln/>
+        </p:spPr>
+        <p:txBody>
+          <a:bodyPr wrap="square" lIns="0" tIns="0" rIns="0" bIns="0" rtlCol="0" anchor="ctr"/>
+          <a:lstStyle/>
+          <a:p>
+            <a:pPr algn="ctr" indent="0" marL="0">
+              <a:buNone/>
+            </a:pPr>
+            <a:r>
+              <a:rPr lang="en-US" sz="1400" dirty="0">
                 <a:solidFill>
                   <a:srgbClr val="1E293B"/>
                 </a:solidFill>
@@ -4268,9 +4293,464 @@
                 <a:ea typeface="Calibri" pitchFamily="34" charset="-122"/>
                 <a:cs typeface="Calibri" pitchFamily="34" charset="-120"/>
               </a:rPr>
-              <a:t>Mr. Dart took him into the main hall, where the biggest and most important paintings were hung.</a:t>
-            </a:r>
-            <a:endParaRPr lang="en-US" sz="1800" dirty="0"/>
+              <a:t>paint</a:t>
+            </a:r>
+            <a:endParaRPr lang="en-US" sz="1400" dirty="0"/>
+          </a:p>
+          <a:p>
+            <a:pPr algn="ctr" indent="0" marL="0">
+              <a:buNone/>
+            </a:pPr>
+            <a:r>
+              <a:rPr lang="en-US" sz="1400" dirty="0">
+                <a:solidFill>
+                  <a:srgbClr val="1E293B"/>
+                </a:solidFill>
+                <a:latin typeface="Calibri" pitchFamily="34" charset="0"/>
+                <a:ea typeface="Calibri" pitchFamily="34" charset="-122"/>
+                <a:cs typeface="Calibri" pitchFamily="34" charset="-120"/>
+              </a:rPr>
+              <a:t>stain</a:t>
+            </a:r>
+            <a:endParaRPr lang="en-US" sz="1400" dirty="0"/>
+          </a:p>
+        </p:txBody>
+      </p:sp>
+      <p:sp>
+        <p:nvSpPr>
+          <p:cNvPr id="9" name="Shape 7"/>
+          <p:cNvSpPr/>
+          <p:nvPr/>
+        </p:nvSpPr>
+        <p:spPr>
+          <a:xfrm>
+            <a:off x="2514600" y="1078992"/>
+            <a:ext cx="2011680" cy="457200"/>
+          </a:xfrm>
+          <a:prstGeom prst="roundRect">
+            <a:avLst>
+              <a:gd name="adj" fmla="val 16000"/>
+            </a:avLst>
+          </a:prstGeom>
+          <a:solidFill>
+            <a:srgbClr val="0E1C42"/>
+          </a:solidFill>
+          <a:ln/>
+        </p:spPr>
+      </p:sp>
+      <p:sp>
+        <p:nvSpPr>
+          <p:cNvPr id="10" name="Text 8"/>
+          <p:cNvSpPr/>
+          <p:nvPr/>
+        </p:nvSpPr>
+        <p:spPr>
+          <a:xfrm>
+            <a:off x="2560320" y="1133856"/>
+            <a:ext cx="1920240" cy="347472"/>
+          </a:xfrm>
+          <a:prstGeom prst="rect">
+            <a:avLst/>
+          </a:prstGeom>
+          <a:noFill/>
+          <a:ln/>
+        </p:spPr>
+        <p:txBody>
+          <a:bodyPr wrap="square" lIns="0" tIns="0" rIns="0" bIns="0" rtlCol="0" anchor="ctr"/>
+          <a:lstStyle/>
+          <a:p>
+            <a:pPr algn="ctr" indent="0" marL="0">
+              <a:buNone/>
+            </a:pPr>
+            <a:r>
+              <a:rPr lang="en-US" sz="1300" b="1" dirty="0">
+                <a:solidFill>
+                  <a:srgbClr val="FFFFFF"/>
+                </a:solidFill>
+                <a:latin typeface="Calibri" pitchFamily="34" charset="0"/>
+                <a:ea typeface="Calibri" pitchFamily="34" charset="-122"/>
+                <a:cs typeface="Calibri" pitchFamily="34" charset="-120"/>
+              </a:rPr>
+              <a:t>ay</a:t>
+            </a:r>
+            <a:endParaRPr lang="en-US" sz="1300" dirty="0"/>
+          </a:p>
+        </p:txBody>
+      </p:sp>
+      <p:sp>
+        <p:nvSpPr>
+          <p:cNvPr id="11" name="Shape 9"/>
+          <p:cNvSpPr/>
+          <p:nvPr/>
+        </p:nvSpPr>
+        <p:spPr>
+          <a:xfrm>
+            <a:off x="2514600" y="1591056"/>
+            <a:ext cx="2011680" cy="2103120"/>
+          </a:xfrm>
+          <a:prstGeom prst="roundRect">
+            <a:avLst>
+              <a:gd name="adj" fmla="val 4545"/>
+            </a:avLst>
+          </a:prstGeom>
+          <a:solidFill>
+            <a:srgbClr val="FFFFFF"/>
+          </a:solidFill>
+          <a:ln/>
+          <a:effectLst>
+            <a:outerShdw sx="100000" sy="100000" kx="0" ky="0" algn="bl" rotWithShape="0" blurRad="101600" dist="38100" dir="2700000">
+              <a:srgbClr val="000000">
+                <a:alpha val="12000"/>
+              </a:srgbClr>
+            </a:outerShdw>
+          </a:effectLst>
+        </p:spPr>
+      </p:sp>
+      <p:sp>
+        <p:nvSpPr>
+          <p:cNvPr id="12" name="Text 10"/>
+          <p:cNvSpPr/>
+          <p:nvPr/>
+        </p:nvSpPr>
+        <p:spPr>
+          <a:xfrm>
+            <a:off x="2606040" y="1700784"/>
+            <a:ext cx="1828800" cy="1883664"/>
+          </a:xfrm>
+          <a:prstGeom prst="rect">
+            <a:avLst/>
+          </a:prstGeom>
+          <a:noFill/>
+          <a:ln/>
+        </p:spPr>
+        <p:txBody>
+          <a:bodyPr wrap="square" lIns="0" tIns="0" rIns="0" bIns="0" rtlCol="0" anchor="ctr"/>
+          <a:lstStyle/>
+          <a:p>
+            <a:pPr algn="ctr" indent="0" marL="0">
+              <a:buNone/>
+            </a:pPr>
+            <a:r>
+              <a:rPr lang="en-US" sz="1400" dirty="0">
+                <a:solidFill>
+                  <a:srgbClr val="1E293B"/>
+                </a:solidFill>
+                <a:latin typeface="Calibri" pitchFamily="34" charset="0"/>
+                <a:ea typeface="Calibri" pitchFamily="34" charset="-122"/>
+                <a:cs typeface="Calibri" pitchFamily="34" charset="-120"/>
+              </a:rPr>
+              <a:t>tray</a:t>
+            </a:r>
+            <a:endParaRPr lang="en-US" sz="1400" dirty="0"/>
+          </a:p>
+          <a:p>
+            <a:pPr algn="ctr" indent="0" marL="0">
+              <a:buNone/>
+            </a:pPr>
+            <a:r>
+              <a:rPr lang="en-US" sz="1400" dirty="0">
+                <a:solidFill>
+                  <a:srgbClr val="1E293B"/>
+                </a:solidFill>
+                <a:latin typeface="Calibri" pitchFamily="34" charset="0"/>
+                <a:ea typeface="Calibri" pitchFamily="34" charset="-122"/>
+                <a:cs typeface="Calibri" pitchFamily="34" charset="-120"/>
+              </a:rPr>
+              <a:t>spray</a:t>
+            </a:r>
+            <a:endParaRPr lang="en-US" sz="1400" dirty="0"/>
+          </a:p>
+        </p:txBody>
+      </p:sp>
+      <p:sp>
+        <p:nvSpPr>
+          <p:cNvPr id="13" name="Shape 11"/>
+          <p:cNvSpPr/>
+          <p:nvPr/>
+        </p:nvSpPr>
+        <p:spPr>
+          <a:xfrm>
+            <a:off x="4617720" y="1078992"/>
+            <a:ext cx="2011680" cy="457200"/>
+          </a:xfrm>
+          <a:prstGeom prst="roundRect">
+            <a:avLst>
+              <a:gd name="adj" fmla="val 16000"/>
+            </a:avLst>
+          </a:prstGeom>
+          <a:solidFill>
+            <a:srgbClr val="0E1C42"/>
+          </a:solidFill>
+          <a:ln/>
+        </p:spPr>
+      </p:sp>
+      <p:sp>
+        <p:nvSpPr>
+          <p:cNvPr id="14" name="Text 12"/>
+          <p:cNvSpPr/>
+          <p:nvPr/>
+        </p:nvSpPr>
+        <p:spPr>
+          <a:xfrm>
+            <a:off x="4663440" y="1133856"/>
+            <a:ext cx="1920240" cy="347472"/>
+          </a:xfrm>
+          <a:prstGeom prst="rect">
+            <a:avLst/>
+          </a:prstGeom>
+          <a:noFill/>
+          <a:ln/>
+        </p:spPr>
+        <p:txBody>
+          <a:bodyPr wrap="square" lIns="0" tIns="0" rIns="0" bIns="0" rtlCol="0" anchor="ctr"/>
+          <a:lstStyle/>
+          <a:p>
+            <a:pPr algn="ctr" indent="0" marL="0">
+              <a:buNone/>
+            </a:pPr>
+            <a:r>
+              <a:rPr lang="en-US" sz="1300" b="1" dirty="0">
+                <a:solidFill>
+                  <a:srgbClr val="FFFFFF"/>
+                </a:solidFill>
+                <a:latin typeface="Calibri" pitchFamily="34" charset="0"/>
+                <a:ea typeface="Calibri" pitchFamily="34" charset="-122"/>
+                <a:cs typeface="Calibri" pitchFamily="34" charset="-120"/>
+              </a:rPr>
+              <a:t>oa</a:t>
+            </a:r>
+            <a:endParaRPr lang="en-US" sz="1300" dirty="0"/>
+          </a:p>
+        </p:txBody>
+      </p:sp>
+      <p:sp>
+        <p:nvSpPr>
+          <p:cNvPr id="15" name="Shape 13"/>
+          <p:cNvSpPr/>
+          <p:nvPr/>
+        </p:nvSpPr>
+        <p:spPr>
+          <a:xfrm>
+            <a:off x="4617720" y="1591056"/>
+            <a:ext cx="2011680" cy="2103120"/>
+          </a:xfrm>
+          <a:prstGeom prst="roundRect">
+            <a:avLst>
+              <a:gd name="adj" fmla="val 4545"/>
+            </a:avLst>
+          </a:prstGeom>
+          <a:solidFill>
+            <a:srgbClr val="FFFFFF"/>
+          </a:solidFill>
+          <a:ln/>
+          <a:effectLst>
+            <a:outerShdw sx="100000" sy="100000" kx="0" ky="0" algn="bl" rotWithShape="0" blurRad="101600" dist="38100" dir="2700000">
+              <a:srgbClr val="000000">
+                <a:alpha val="12000"/>
+              </a:srgbClr>
+            </a:outerShdw>
+          </a:effectLst>
+        </p:spPr>
+      </p:sp>
+      <p:sp>
+        <p:nvSpPr>
+          <p:cNvPr id="16" name="Text 14"/>
+          <p:cNvSpPr/>
+          <p:nvPr/>
+        </p:nvSpPr>
+        <p:spPr>
+          <a:xfrm>
+            <a:off x="4709160" y="1700784"/>
+            <a:ext cx="1828800" cy="1883664"/>
+          </a:xfrm>
+          <a:prstGeom prst="rect">
+            <a:avLst/>
+          </a:prstGeom>
+          <a:noFill/>
+          <a:ln/>
+        </p:spPr>
+        <p:txBody>
+          <a:bodyPr wrap="square" lIns="0" tIns="0" rIns="0" bIns="0" rtlCol="0" anchor="ctr"/>
+          <a:lstStyle/>
+          <a:p>
+            <a:pPr algn="ctr" indent="0" marL="0">
+              <a:buNone/>
+            </a:pPr>
+            <a:r>
+              <a:rPr lang="en-US" sz="1400" dirty="0">
+                <a:solidFill>
+                  <a:srgbClr val="1E293B"/>
+                </a:solidFill>
+                <a:latin typeface="Calibri" pitchFamily="34" charset="0"/>
+                <a:ea typeface="Calibri" pitchFamily="34" charset="-122"/>
+                <a:cs typeface="Calibri" pitchFamily="34" charset="-120"/>
+              </a:rPr>
+              <a:t>toast</a:t>
+            </a:r>
+            <a:endParaRPr lang="en-US" sz="1400" dirty="0"/>
+          </a:p>
+          <a:p>
+            <a:pPr algn="ctr" indent="0" marL="0">
+              <a:buNone/>
+            </a:pPr>
+            <a:r>
+              <a:rPr lang="en-US" sz="1400" dirty="0">
+                <a:solidFill>
+                  <a:srgbClr val="1E293B"/>
+                </a:solidFill>
+                <a:latin typeface="Calibri" pitchFamily="34" charset="0"/>
+                <a:ea typeface="Calibri" pitchFamily="34" charset="-122"/>
+                <a:cs typeface="Calibri" pitchFamily="34" charset="-120"/>
+              </a:rPr>
+              <a:t>groan</a:t>
+            </a:r>
+            <a:endParaRPr lang="en-US" sz="1400" dirty="0"/>
+          </a:p>
+        </p:txBody>
+      </p:sp>
+      <p:sp>
+        <p:nvSpPr>
+          <p:cNvPr id="17" name="Shape 15"/>
+          <p:cNvSpPr/>
+          <p:nvPr/>
+        </p:nvSpPr>
+        <p:spPr>
+          <a:xfrm>
+            <a:off x="6720840" y="1078992"/>
+            <a:ext cx="2011680" cy="457200"/>
+          </a:xfrm>
+          <a:prstGeom prst="roundRect">
+            <a:avLst>
+              <a:gd name="adj" fmla="val 16000"/>
+            </a:avLst>
+          </a:prstGeom>
+          <a:solidFill>
+            <a:srgbClr val="0E1C42"/>
+          </a:solidFill>
+          <a:ln/>
+        </p:spPr>
+      </p:sp>
+      <p:sp>
+        <p:nvSpPr>
+          <p:cNvPr id="18" name="Text 16"/>
+          <p:cNvSpPr/>
+          <p:nvPr/>
+        </p:nvSpPr>
+        <p:spPr>
+          <a:xfrm>
+            <a:off x="6766560" y="1133856"/>
+            <a:ext cx="1920240" cy="347472"/>
+          </a:xfrm>
+          <a:prstGeom prst="rect">
+            <a:avLst/>
+          </a:prstGeom>
+          <a:noFill/>
+          <a:ln/>
+        </p:spPr>
+        <p:txBody>
+          <a:bodyPr wrap="square" lIns="0" tIns="0" rIns="0" bIns="0" rtlCol="0" anchor="ctr"/>
+          <a:lstStyle/>
+          <a:p>
+            <a:pPr algn="ctr" indent="0" marL="0">
+              <a:buNone/>
+            </a:pPr>
+            <a:r>
+              <a:rPr lang="en-US" sz="1300" b="1" dirty="0">
+                <a:solidFill>
+                  <a:srgbClr val="FFFFFF"/>
+                </a:solidFill>
+                <a:latin typeface="Calibri" pitchFamily="34" charset="0"/>
+                <a:ea typeface="Calibri" pitchFamily="34" charset="-122"/>
+                <a:cs typeface="Calibri" pitchFamily="34" charset="-120"/>
+              </a:rPr>
+              <a:t>ow</a:t>
+            </a:r>
+            <a:endParaRPr lang="en-US" sz="1300" dirty="0"/>
+          </a:p>
+        </p:txBody>
+      </p:sp>
+      <p:sp>
+        <p:nvSpPr>
+          <p:cNvPr id="19" name="Shape 17"/>
+          <p:cNvSpPr/>
+          <p:nvPr/>
+        </p:nvSpPr>
+        <p:spPr>
+          <a:xfrm>
+            <a:off x="6720840" y="1591056"/>
+            <a:ext cx="2011680" cy="2103120"/>
+          </a:xfrm>
+          <a:prstGeom prst="roundRect">
+            <a:avLst>
+              <a:gd name="adj" fmla="val 4545"/>
+            </a:avLst>
+          </a:prstGeom>
+          <a:solidFill>
+            <a:srgbClr val="FFFFFF"/>
+          </a:solidFill>
+          <a:ln/>
+          <a:effectLst>
+            <a:outerShdw sx="100000" sy="100000" kx="0" ky="0" algn="bl" rotWithShape="0" blurRad="101600" dist="38100" dir="2700000">
+              <a:srgbClr val="000000">
+                <a:alpha val="12000"/>
+              </a:srgbClr>
+            </a:outerShdw>
+          </a:effectLst>
+        </p:spPr>
+      </p:sp>
+      <p:sp>
+        <p:nvSpPr>
+          <p:cNvPr id="20" name="Text 18"/>
+          <p:cNvSpPr/>
+          <p:nvPr/>
+        </p:nvSpPr>
+        <p:spPr>
+          <a:xfrm>
+            <a:off x="6812280" y="1700784"/>
+            <a:ext cx="1828800" cy="1883664"/>
+          </a:xfrm>
+          <a:prstGeom prst="rect">
+            <a:avLst/>
+          </a:prstGeom>
+          <a:noFill/>
+          <a:ln/>
+        </p:spPr>
+        <p:txBody>
+          <a:bodyPr wrap="square" lIns="0" tIns="0" rIns="0" bIns="0" rtlCol="0" anchor="ctr"/>
+          <a:lstStyle/>
+          <a:p>
+            <a:pPr algn="ctr" indent="0" marL="0">
+              <a:buNone/>
+            </a:pPr>
+            <a:r>
+              <a:rPr lang="en-US" sz="1400" dirty="0">
+                <a:solidFill>
+                  <a:srgbClr val="1E293B"/>
+                </a:solidFill>
+                <a:latin typeface="Calibri" pitchFamily="34" charset="0"/>
+                <a:ea typeface="Calibri" pitchFamily="34" charset="-122"/>
+                <a:cs typeface="Calibri" pitchFamily="34" charset="-120"/>
+              </a:rPr>
+              <a:t>slow</a:t>
+            </a:r>
+            <a:endParaRPr lang="en-US" sz="1400" dirty="0"/>
+          </a:p>
+          <a:p>
+            <a:pPr algn="ctr" indent="0" marL="0">
+              <a:buNone/>
+            </a:pPr>
+            <a:r>
+              <a:rPr lang="en-US" sz="1400" dirty="0">
+                <a:solidFill>
+                  <a:srgbClr val="1E293B"/>
+                </a:solidFill>
+                <a:latin typeface="Calibri" pitchFamily="34" charset="0"/>
+                <a:ea typeface="Calibri" pitchFamily="34" charset="-122"/>
+                <a:cs typeface="Calibri" pitchFamily="34" charset="-120"/>
+              </a:rPr>
+              <a:t>throw</a:t>
+            </a:r>
+            <a:endParaRPr lang="en-US" sz="1400" dirty="0"/>
           </a:p>
         </p:txBody>
       </p:sp>
@@ -4308,30 +4788,89 @@
       </p:grpSpPr>
       <p:sp>
         <p:nvSpPr>
-          <p:cNvPr id="2" name="Text 0"/>
-          <p:cNvSpPr/>
-          <p:nvPr/>
-        </p:nvSpPr>
-        <p:spPr>
-          <a:xfrm>
-            <a:off x="365760" y="164592"/>
-            <a:ext cx="8412480" cy="566928"/>
-          </a:xfrm>
-          <a:prstGeom prst="rect">
-            <a:avLst/>
-          </a:prstGeom>
-          <a:noFill/>
-          <a:ln/>
-        </p:spPr>
-        <p:txBody>
-          <a:bodyPr wrap="square" lIns="0" tIns="0" rIns="0" bIns="0" rtlCol="0" anchor="ctr"/>
-          <a:lstStyle/>
-          <a:p>
-            <a:pPr algn="l" indent="0" marL="0">
-              <a:buNone/>
-            </a:pPr>
-            <a:r>
-              <a:rPr lang="en-US" sz="2800" b="1" dirty="0">
+          <p:cNvPr id="2" name="Shape 0"/>
+          <p:cNvSpPr/>
+          <p:nvPr/>
+        </p:nvSpPr>
+        <p:spPr>
+          <a:xfrm>
+            <a:off x="0" y="0"/>
+            <a:ext cx="9144000" cy="566928"/>
+          </a:xfrm>
+          <a:prstGeom prst="rect">
+            <a:avLst/>
+          </a:prstGeom>
+          <a:solidFill>
+            <a:srgbClr val="55C8E8"/>
+          </a:solidFill>
+          <a:ln/>
+        </p:spPr>
+      </p:sp>
+      <p:sp>
+        <p:nvSpPr>
+          <p:cNvPr id="3" name="Text 1"/>
+          <p:cNvSpPr/>
+          <p:nvPr/>
+        </p:nvSpPr>
+        <p:spPr>
+          <a:xfrm>
+            <a:off x="365760" y="54864"/>
+            <a:ext cx="8412480" cy="457200"/>
+          </a:xfrm>
+          <a:prstGeom prst="rect">
+            <a:avLst/>
+          </a:prstGeom>
+          <a:noFill/>
+          <a:ln/>
+        </p:spPr>
+        <p:txBody>
+          <a:bodyPr wrap="square" lIns="0" tIns="0" rIns="0" bIns="0" rtlCol="0" anchor="ctr"/>
+          <a:lstStyle/>
+          <a:p>
+            <a:pPr indent="0" marL="0">
+              <a:buNone/>
+            </a:pPr>
+            <a:r>
+              <a:rPr lang="en-US" sz="2200" b="1" dirty="0">
+                <a:solidFill>
+                  <a:srgbClr val="FFFFFF"/>
+                </a:solidFill>
+                <a:latin typeface="Calibri" pitchFamily="34" charset="0"/>
+                <a:ea typeface="Calibri" pitchFamily="34" charset="-122"/>
+                <a:cs typeface="Calibri" pitchFamily="34" charset="-120"/>
+              </a:rPr>
+              <a:t>📕  Read</a:t>
+            </a:r>
+            <a:endParaRPr lang="en-US" sz="2200" dirty="0"/>
+          </a:p>
+        </p:txBody>
+      </p:sp>
+      <p:sp>
+        <p:nvSpPr>
+          <p:cNvPr id="4" name="Text 2"/>
+          <p:cNvSpPr/>
+          <p:nvPr/>
+        </p:nvSpPr>
+        <p:spPr>
+          <a:xfrm>
+            <a:off x="365760" y="868680"/>
+            <a:ext cx="8412480" cy="502920"/>
+          </a:xfrm>
+          <a:prstGeom prst="rect">
+            <a:avLst/>
+          </a:prstGeom>
+          <a:noFill/>
+          <a:ln/>
+        </p:spPr>
+        <p:txBody>
+          <a:bodyPr wrap="square" lIns="0" tIns="0" rIns="0" bIns="0" rtlCol="0" anchor="ctr"/>
+          <a:lstStyle/>
+          <a:p>
+            <a:pPr indent="0" marL="0">
+              <a:buNone/>
+            </a:pPr>
+            <a:r>
+              <a:rPr lang="en-US" sz="2600" b="1" dirty="0">
                 <a:solidFill>
                   <a:srgbClr val="0E1C42"/>
                 </a:solidFill>
@@ -4339,34 +4878,309 @@
                 <a:ea typeface="Calibri" pitchFamily="34" charset="-122"/>
                 <a:cs typeface="Calibri" pitchFamily="34" charset="-120"/>
               </a:rPr>
-              <a:t>📝 Reading-Writing Connection (RWM)</a:t>
-            </a:r>
-            <a:endParaRPr lang="en-US" sz="2800" dirty="0"/>
-          </a:p>
-        </p:txBody>
-      </p:sp>
-      <p:sp>
-        <p:nvSpPr>
-          <p:cNvPr id="3" name="Shape 1"/>
-          <p:cNvSpPr/>
-          <p:nvPr/>
-        </p:nvSpPr>
-        <p:spPr>
-          <a:xfrm>
-            <a:off x="365760" y="749808"/>
-            <a:ext cx="8412480" cy="0"/>
-          </a:xfrm>
-          <a:prstGeom prst="line">
-            <a:avLst/>
-          </a:prstGeom>
-          <a:noFill/>
+              <a:t>Extension Text</a:t>
+            </a:r>
+            <a:endParaRPr lang="en-US" sz="2600" dirty="0"/>
+          </a:p>
+        </p:txBody>
+      </p:sp>
+      <p:sp>
+        <p:nvSpPr>
+          <p:cNvPr id="5" name="Text 3"/>
+          <p:cNvSpPr/>
+          <p:nvPr/>
+        </p:nvSpPr>
+        <p:spPr>
+          <a:xfrm>
+            <a:off x="365760" y="1463040"/>
+            <a:ext cx="8229600" cy="237744"/>
+          </a:xfrm>
+          <a:prstGeom prst="rect">
+            <a:avLst/>
+          </a:prstGeom>
+          <a:noFill/>
+          <a:ln/>
+        </p:spPr>
+        <p:txBody>
+          <a:bodyPr wrap="square" lIns="0" tIns="0" rIns="0" bIns="0" rtlCol="0" anchor="ctr"/>
+          <a:lstStyle/>
+          <a:p>
+            <a:pPr indent="0" marL="0">
+              <a:buNone/>
+            </a:pPr>
+            <a:r>
+              <a:rPr lang="en-US" sz="1100" b="1" spc="100" kern="0" dirty="0">
+                <a:solidFill>
+                  <a:srgbClr val="8B6FC0"/>
+                </a:solidFill>
+                <a:latin typeface="Calibri" pitchFamily="34" charset="0"/>
+                <a:ea typeface="Calibri" pitchFamily="34" charset="-122"/>
+                <a:cs typeface="Calibri" pitchFamily="34" charset="-120"/>
+              </a:rPr>
+              <a:t>COPYWORK — FROM THE NOVEL</a:t>
+            </a:r>
+            <a:endParaRPr lang="en-US" sz="1100" dirty="0"/>
+          </a:p>
+        </p:txBody>
+      </p:sp>
+      <p:sp>
+        <p:nvSpPr>
+          <p:cNvPr id="6" name="Shape 4"/>
+          <p:cNvSpPr/>
+          <p:nvPr/>
+        </p:nvSpPr>
+        <p:spPr>
+          <a:xfrm>
+            <a:off x="365760" y="1719072"/>
+            <a:ext cx="8412480" cy="1143000"/>
+          </a:xfrm>
+          <a:prstGeom prst="roundRect">
+            <a:avLst>
+              <a:gd name="adj" fmla="val 8000"/>
+            </a:avLst>
+          </a:prstGeom>
+          <a:solidFill>
+            <a:srgbClr val="F0E8FF"/>
+          </a:solidFill>
           <a:ln w="19050">
             <a:solidFill>
-              <a:srgbClr val="34B76F"/>
+              <a:srgbClr val="8B6FC0"/>
             </a:solidFill>
             <a:prstDash val="solid"/>
           </a:ln>
-        </p:spPr>
+          <a:effectLst>
+            <a:outerShdw sx="100000" sy="100000" kx="0" ky="0" algn="bl" rotWithShape="0" blurRad="101600" dist="38100" dir="2700000">
+              <a:srgbClr val="000000">
+                <a:alpha val="12000"/>
+              </a:srgbClr>
+            </a:outerShdw>
+          </a:effectLst>
+        </p:spPr>
+      </p:sp>
+      <p:sp>
+        <p:nvSpPr>
+          <p:cNvPr id="7" name="Text 5"/>
+          <p:cNvSpPr/>
+          <p:nvPr/>
+        </p:nvSpPr>
+        <p:spPr>
+          <a:xfrm>
+            <a:off x="594360" y="1847088"/>
+            <a:ext cx="7955280" cy="886968"/>
+          </a:xfrm>
+          <a:prstGeom prst="rect">
+            <a:avLst/>
+          </a:prstGeom>
+          <a:noFill/>
+          <a:ln/>
+        </p:spPr>
+        <p:txBody>
+          <a:bodyPr wrap="square" lIns="0" tIns="0" rIns="0" bIns="0" rtlCol="0" anchor="ctr"/>
+          <a:lstStyle/>
+          <a:p>
+            <a:pPr indent="0" marL="0">
+              <a:buNone/>
+            </a:pPr>
+            <a:r>
+              <a:rPr lang="en-US" sz="1700" dirty="0">
+                <a:solidFill>
+                  <a:srgbClr val="1E293B"/>
+                </a:solidFill>
+                <a:latin typeface="Calibri" pitchFamily="34" charset="0"/>
+                <a:ea typeface="Calibri" pitchFamily="34" charset="-122"/>
+                <a:cs typeface="Calibri" pitchFamily="34" charset="-120"/>
+              </a:rPr>
+              <a:t>“Mr. Dart took him into the main hall, where the biggest and most important paintings were hung.”</a:t>
+            </a:r>
+            <a:endParaRPr lang="en-US" sz="1700" dirty="0"/>
+          </a:p>
+        </p:txBody>
+      </p:sp>
+      <p:sp>
+        <p:nvSpPr>
+          <p:cNvPr id="8" name="Text 6"/>
+          <p:cNvSpPr/>
+          <p:nvPr/>
+        </p:nvSpPr>
+        <p:spPr>
+          <a:xfrm>
+            <a:off x="365760" y="3017520"/>
+            <a:ext cx="8229600" cy="237744"/>
+          </a:xfrm>
+          <a:prstGeom prst="rect">
+            <a:avLst/>
+          </a:prstGeom>
+          <a:noFill/>
+          <a:ln/>
+        </p:spPr>
+        <p:txBody>
+          <a:bodyPr wrap="square" lIns="0" tIns="0" rIns="0" bIns="0" rtlCol="0" anchor="ctr"/>
+          <a:lstStyle/>
+          <a:p>
+            <a:pPr indent="0" marL="0">
+              <a:buNone/>
+            </a:pPr>
+            <a:r>
+              <a:rPr lang="en-US" sz="1100" b="1" spc="100" kern="0" dirty="0">
+                <a:solidFill>
+                  <a:srgbClr val="C7922C"/>
+                </a:solidFill>
+                <a:latin typeface="Calibri" pitchFamily="34" charset="0"/>
+                <a:ea typeface="Calibri" pitchFamily="34" charset="-122"/>
+                <a:cs typeface="Calibri" pitchFamily="34" charset="-120"/>
+              </a:rPr>
+              <a:t>PAUSE &amp; THINK</a:t>
+            </a:r>
+            <a:endParaRPr lang="en-US" sz="1100" dirty="0"/>
+          </a:p>
+        </p:txBody>
+      </p:sp>
+      <p:sp>
+        <p:nvSpPr>
+          <p:cNvPr id="9" name="Text 7"/>
+          <p:cNvSpPr/>
+          <p:nvPr/>
+        </p:nvSpPr>
+        <p:spPr>
+          <a:xfrm>
+            <a:off x="365760" y="3273552"/>
+            <a:ext cx="8412480" cy="914400"/>
+          </a:xfrm>
+          <a:prstGeom prst="rect">
+            <a:avLst/>
+          </a:prstGeom>
+          <a:noFill/>
+          <a:ln/>
+        </p:spPr>
+        <p:txBody>
+          <a:bodyPr wrap="square" lIns="0" tIns="0" rIns="0" bIns="0" rtlCol="0" anchor="ctr"/>
+          <a:lstStyle/>
+          <a:p>
+            <a:pPr indent="0" marL="0">
+              <a:buNone/>
+            </a:pPr>
+            <a:r>
+              <a:rPr lang="en-US" sz="1500" dirty="0">
+                <a:solidFill>
+                  <a:srgbClr val="1E293B"/>
+                </a:solidFill>
+                <a:latin typeface="Calibri" pitchFamily="34" charset="0"/>
+                <a:ea typeface="Calibri" pitchFamily="34" charset="-122"/>
+                <a:cs typeface="Calibri" pitchFamily="34" charset="-120"/>
+              </a:rPr>
+              <a:t>•  Today you’ll compare the story’s Famous Museum with real museums. What do you already know about museums? How might a real museum be different from the one in the story?</a:t>
+            </a:r>
+            <a:endParaRPr lang="en-US" sz="1500" dirty="0"/>
+          </a:p>
+          <a:p>
+            <a:pPr indent="0" marL="0">
+              <a:buNone/>
+            </a:pPr>
+            <a:r>
+              <a:rPr lang="en-US" sz="1500" dirty="0">
+                <a:solidFill>
+                  <a:srgbClr val="1E293B"/>
+                </a:solidFill>
+                <a:latin typeface="Calibri" pitchFamily="34" charset="0"/>
+                <a:ea typeface="Calibri" pitchFamily="34" charset="-122"/>
+                <a:cs typeface="Calibri" pitchFamily="34" charset="-120"/>
+              </a:rPr>
+              <a:t>•  In the story, the museum has a most expensive painting in the world. What makes art valuable in real life?</a:t>
+            </a:r>
+            <a:endParaRPr lang="en-US" sz="1500" dirty="0"/>
+          </a:p>
+        </p:txBody>
+      </p:sp>
+    </p:spTree>
+  </p:cSld>
+  <p:clrMapOvr>
+    <a:masterClrMapping/>
+  </p:clrMapOvr>
+</p:sld>
+</file>
+
+<file path=ppt/slides/slide16.xml><?xml version="1.0" encoding="utf-8"?>
+<p:sld xmlns:a="http://schemas.openxmlformats.org/drawingml/2006/main" xmlns:r="http://schemas.openxmlformats.org/officeDocument/2006/relationships" xmlns:p="http://schemas.openxmlformats.org/presentationml/2006/main">
+  <p:cSld name="Slide 16">
+    <p:bg>
+      <p:bgPr>
+        <a:solidFill>
+          <a:srgbClr val="FFFFFF"/>
+        </a:solidFill>
+      </p:bgPr>
+    </p:bg>
+    <p:spTree>
+      <p:nvGrpSpPr>
+        <p:cNvPr id="1" name=""/>
+        <p:cNvGrpSpPr/>
+        <p:nvPr/>
+      </p:nvGrpSpPr>
+      <p:grpSpPr>
+        <a:xfrm>
+          <a:off x="0" y="0"/>
+          <a:ext cx="0" cy="0"/>
+          <a:chOff x="0" y="0"/>
+          <a:chExt cx="0" cy="0"/>
+        </a:xfrm>
+      </p:grpSpPr>
+      <p:sp>
+        <p:nvSpPr>
+          <p:cNvPr id="2" name="Shape 0"/>
+          <p:cNvSpPr/>
+          <p:nvPr/>
+        </p:nvSpPr>
+        <p:spPr>
+          <a:xfrm>
+            <a:off x="0" y="0"/>
+            <a:ext cx="9144000" cy="566928"/>
+          </a:xfrm>
+          <a:prstGeom prst="rect">
+            <a:avLst/>
+          </a:prstGeom>
+          <a:solidFill>
+            <a:srgbClr val="34B76F"/>
+          </a:solidFill>
+          <a:ln/>
+        </p:spPr>
+      </p:sp>
+      <p:sp>
+        <p:nvSpPr>
+          <p:cNvPr id="3" name="Text 1"/>
+          <p:cNvSpPr/>
+          <p:nvPr/>
+        </p:nvSpPr>
+        <p:spPr>
+          <a:xfrm>
+            <a:off x="365760" y="54864"/>
+            <a:ext cx="8412480" cy="457200"/>
+          </a:xfrm>
+          <a:prstGeom prst="rect">
+            <a:avLst/>
+          </a:prstGeom>
+          <a:noFill/>
+          <a:ln/>
+        </p:spPr>
+        <p:txBody>
+          <a:bodyPr wrap="square" lIns="0" tIns="0" rIns="0" bIns="0" rtlCol="0" anchor="ctr"/>
+          <a:lstStyle/>
+          <a:p>
+            <a:pPr indent="0" marL="0">
+              <a:buNone/>
+            </a:pPr>
+            <a:r>
+              <a:rPr lang="en-US" sz="2200" b="1" dirty="0">
+                <a:solidFill>
+                  <a:srgbClr val="FFFFFF"/>
+                </a:solidFill>
+                <a:latin typeface="Calibri" pitchFamily="34" charset="0"/>
+                <a:ea typeface="Calibri" pitchFamily="34" charset="-122"/>
+                <a:cs typeface="Calibri" pitchFamily="34" charset="-120"/>
+              </a:rPr>
+              <a:t>🪶  Writer’s Workshop</a:t>
+            </a:r>
+            <a:endParaRPr lang="en-US" sz="2200" dirty="0"/>
+          </a:p>
+        </p:txBody>
       </p:sp>
       <p:sp>
         <p:nvSpPr>
@@ -4376,24 +5190,102 @@
         </p:nvSpPr>
         <p:spPr>
           <a:xfrm>
-            <a:off x="640080" y="1371600"/>
-            <a:ext cx="7863840" cy="457200"/>
-          </a:xfrm>
-          <a:prstGeom prst="rect">
-            <a:avLst/>
-          </a:prstGeom>
-          <a:noFill/>
-          <a:ln/>
-        </p:spPr>
-        <p:txBody>
-          <a:bodyPr wrap="square" lIns="0" tIns="0" rIns="0" bIns="0" rtlCol="0" anchor="ctr"/>
-          <a:lstStyle/>
-          <a:p>
-            <a:pPr indent="0" marL="0">
-              <a:buNone/>
-            </a:pPr>
-            <a:r>
-              <a:rPr lang="en-US" sz="1600" dirty="0">
+            <a:off x="365760" y="822960"/>
+            <a:ext cx="8229600" cy="237744"/>
+          </a:xfrm>
+          <a:prstGeom prst="rect">
+            <a:avLst/>
+          </a:prstGeom>
+          <a:noFill/>
+          <a:ln/>
+        </p:spPr>
+        <p:txBody>
+          <a:bodyPr wrap="square" lIns="0" tIns="0" rIns="0" bIns="0" rtlCol="0" anchor="ctr"/>
+          <a:lstStyle/>
+          <a:p>
+            <a:pPr indent="0" marL="0">
+              <a:buNone/>
+            </a:pPr>
+            <a:r>
+              <a:rPr lang="en-US" sz="1100" b="1" spc="100" kern="0" dirty="0">
+                <a:solidFill>
+                  <a:srgbClr val="34B76F"/>
+                </a:solidFill>
+                <a:latin typeface="Calibri" pitchFamily="34" charset="0"/>
+                <a:ea typeface="Calibri" pitchFamily="34" charset="-122"/>
+                <a:cs typeface="Calibri" pitchFamily="34" charset="-120"/>
+              </a:rPr>
+              <a:t>THIS WEEK’S STAGE</a:t>
+            </a:r>
+            <a:endParaRPr lang="en-US" sz="1100" dirty="0"/>
+          </a:p>
+        </p:txBody>
+      </p:sp>
+      <p:sp>
+        <p:nvSpPr>
+          <p:cNvPr id="5" name="Text 3"/>
+          <p:cNvSpPr/>
+          <p:nvPr/>
+        </p:nvSpPr>
+        <p:spPr>
+          <a:xfrm>
+            <a:off x="365760" y="1078992"/>
+            <a:ext cx="8412480" cy="548640"/>
+          </a:xfrm>
+          <a:prstGeom prst="rect">
+            <a:avLst/>
+          </a:prstGeom>
+          <a:noFill/>
+          <a:ln/>
+        </p:spPr>
+        <p:txBody>
+          <a:bodyPr wrap="square" lIns="0" tIns="0" rIns="0" bIns="0" rtlCol="0" anchor="ctr"/>
+          <a:lstStyle/>
+          <a:p>
+            <a:pPr indent="0" marL="0">
+              <a:buNone/>
+            </a:pPr>
+            <a:r>
+              <a:rPr lang="en-US" sz="3000" b="1" dirty="0">
+                <a:solidFill>
+                  <a:srgbClr val="0E1C42"/>
+                </a:solidFill>
+                <a:latin typeface="Calibri" pitchFamily="34" charset="0"/>
+                <a:ea typeface="Calibri" pitchFamily="34" charset="-122"/>
+                <a:cs typeface="Calibri" pitchFamily="34" charset="-120"/>
+              </a:rPr>
+              <a:t>FINAL DRAFT</a:t>
+            </a:r>
+            <a:endParaRPr lang="en-US" sz="3000" dirty="0"/>
+          </a:p>
+        </p:txBody>
+      </p:sp>
+      <p:sp>
+        <p:nvSpPr>
+          <p:cNvPr id="6" name="Text 4"/>
+          <p:cNvSpPr/>
+          <p:nvPr/>
+        </p:nvSpPr>
+        <p:spPr>
+          <a:xfrm>
+            <a:off x="365760" y="1691640"/>
+            <a:ext cx="8412480" cy="457200"/>
+          </a:xfrm>
+          <a:prstGeom prst="rect">
+            <a:avLst/>
+          </a:prstGeom>
+          <a:noFill/>
+          <a:ln/>
+        </p:spPr>
+        <p:txBody>
+          <a:bodyPr wrap="square" lIns="0" tIns="0" rIns="0" bIns="0" rtlCol="0" anchor="ctr"/>
+          <a:lstStyle/>
+          <a:p>
+            <a:pPr indent="0" marL="0">
+              <a:buNone/>
+            </a:pPr>
+            <a:r>
+              <a:rPr lang="en-US" sz="1800" dirty="0">
                 <a:solidFill>
                   <a:srgbClr val="1E293B"/>
                 </a:solidFill>
@@ -4401,48 +5293,9 @@
                 <a:ea typeface="Calibri" pitchFamily="34" charset="-122"/>
                 <a:cs typeface="Calibri" pitchFamily="34" charset="-120"/>
               </a:rPr>
-              <a:t>Open your writing assignment in Canvas.</a:t>
-            </a:r>
-            <a:endParaRPr lang="en-US" sz="1600" dirty="0"/>
-          </a:p>
-        </p:txBody>
-      </p:sp>
-      <p:sp>
-        <p:nvSpPr>
-          <p:cNvPr id="5" name="Text 3"/>
-          <p:cNvSpPr/>
-          <p:nvPr/>
-        </p:nvSpPr>
-        <p:spPr>
-          <a:xfrm>
-            <a:off x="640080" y="2011680"/>
-            <a:ext cx="7863840" cy="457200"/>
-          </a:xfrm>
-          <a:prstGeom prst="rect">
-            <a:avLst/>
-          </a:prstGeom>
-          <a:noFill/>
-          <a:ln/>
-        </p:spPr>
-        <p:txBody>
-          <a:bodyPr wrap="square" lIns="0" tIns="0" rIns="0" bIns="0" rtlCol="0" anchor="ctr"/>
-          <a:lstStyle/>
-          <a:p>
-            <a:pPr indent="0" marL="0">
-              <a:buNone/>
-            </a:pPr>
-            <a:r>
-              <a:rPr lang="en-US" sz="1400" dirty="0">
-                <a:solidFill>
-                  <a:srgbClr val="64748B"/>
-                </a:solidFill>
-                <a:latin typeface="Calibri" pitchFamily="34" charset="0"/>
-                <a:ea typeface="Calibri" pitchFamily="34" charset="-122"/>
-                <a:cs typeface="Calibri" pitchFamily="34" charset="-120"/>
-              </a:rPr>
-              <a:t>Follow the writing prompt for today's workshop.</a:t>
-            </a:r>
-            <a:endParaRPr lang="en-US" sz="1400" dirty="0"/>
+              <a:t>Write your clean, publish-ready personal narrative</a:t>
+            </a:r>
+            <a:endParaRPr lang="en-US" sz="1800" dirty="0"/>
           </a:p>
         </p:txBody>
       </p:sp>
@@ -4480,65 +5333,62 @@
       </p:grpSpPr>
       <p:sp>
         <p:nvSpPr>
-          <p:cNvPr id="2" name="Text 0"/>
-          <p:cNvSpPr/>
-          <p:nvPr/>
-        </p:nvSpPr>
-        <p:spPr>
-          <a:xfrm>
-            <a:off x="365760" y="164592"/>
-            <a:ext cx="8412480" cy="566928"/>
-          </a:xfrm>
-          <a:prstGeom prst="rect">
-            <a:avLst/>
-          </a:prstGeom>
-          <a:noFill/>
-          <a:ln/>
-        </p:spPr>
-        <p:txBody>
-          <a:bodyPr wrap="square" lIns="0" tIns="0" rIns="0" bIns="0" rtlCol="0" anchor="ctr"/>
-          <a:lstStyle/>
-          <a:p>
-            <a:pPr algn="l" indent="0" marL="0">
-              <a:buNone/>
-            </a:pPr>
-            <a:r>
-              <a:rPr lang="en-US" sz="2800" b="1" dirty="0">
-                <a:solidFill>
-                  <a:srgbClr val="0E1C42"/>
-                </a:solidFill>
-                <a:latin typeface="Calibri" pitchFamily="34" charset="0"/>
-                <a:ea typeface="Calibri" pitchFamily="34" charset="-122"/>
-                <a:cs typeface="Calibri" pitchFamily="34" charset="-120"/>
-              </a:rPr>
-              <a:t>✏️ 10-Minute Write</a:t>
-            </a:r>
-            <a:endParaRPr lang="en-US" sz="2800" dirty="0"/>
-          </a:p>
-        </p:txBody>
-      </p:sp>
-      <p:sp>
-        <p:nvSpPr>
-          <p:cNvPr id="3" name="Shape 1"/>
-          <p:cNvSpPr/>
-          <p:nvPr/>
-        </p:nvSpPr>
-        <p:spPr>
-          <a:xfrm>
-            <a:off x="365760" y="749808"/>
-            <a:ext cx="8412480" cy="0"/>
-          </a:xfrm>
-          <a:prstGeom prst="line">
-            <a:avLst/>
-          </a:prstGeom>
-          <a:noFill/>
-          <a:ln w="19050">
-            <a:solidFill>
-              <a:srgbClr val="C7922C"/>
-            </a:solidFill>
-            <a:prstDash val="solid"/>
-          </a:ln>
-        </p:spPr>
+          <p:cNvPr id="2" name="Shape 0"/>
+          <p:cNvSpPr/>
+          <p:nvPr/>
+        </p:nvSpPr>
+        <p:spPr>
+          <a:xfrm>
+            <a:off x="0" y="0"/>
+            <a:ext cx="9144000" cy="566928"/>
+          </a:xfrm>
+          <a:prstGeom prst="rect">
+            <a:avLst/>
+          </a:prstGeom>
+          <a:solidFill>
+            <a:srgbClr val="C7922C"/>
+          </a:solidFill>
+          <a:ln/>
+        </p:spPr>
+      </p:sp>
+      <p:sp>
+        <p:nvSpPr>
+          <p:cNvPr id="3" name="Text 1"/>
+          <p:cNvSpPr/>
+          <p:nvPr/>
+        </p:nvSpPr>
+        <p:spPr>
+          <a:xfrm>
+            <a:off x="365760" y="54864"/>
+            <a:ext cx="8412480" cy="457200"/>
+          </a:xfrm>
+          <a:prstGeom prst="rect">
+            <a:avLst/>
+          </a:prstGeom>
+          <a:noFill/>
+          <a:ln/>
+        </p:spPr>
+        <p:txBody>
+          <a:bodyPr wrap="square" lIns="0" tIns="0" rIns="0" bIns="0" rtlCol="0" anchor="ctr"/>
+          <a:lstStyle/>
+          <a:p>
+            <a:pPr indent="0" marL="0">
+              <a:buNone/>
+            </a:pPr>
+            <a:r>
+              <a:rPr lang="en-US" sz="2200" b="1" dirty="0">
+                <a:solidFill>
+                  <a:srgbClr val="FFFFFF"/>
+                </a:solidFill>
+                <a:latin typeface="Calibri" pitchFamily="34" charset="0"/>
+                <a:ea typeface="Calibri" pitchFamily="34" charset="-122"/>
+                <a:cs typeface="Calibri" pitchFamily="34" charset="-120"/>
+              </a:rPr>
+              <a:t>✍️  10-Minute Write</a:t>
+            </a:r>
+            <a:endParaRPr lang="en-US" sz="2200" dirty="0"/>
+          </a:p>
+        </p:txBody>
       </p:sp>
       <p:sp>
         <p:nvSpPr>
@@ -4548,24 +5398,24 @@
         </p:nvSpPr>
         <p:spPr>
           <a:xfrm>
-            <a:off x="457200" y="1005840"/>
-            <a:ext cx="8046720" cy="292608"/>
-          </a:xfrm>
-          <a:prstGeom prst="rect">
-            <a:avLst/>
-          </a:prstGeom>
-          <a:noFill/>
-          <a:ln/>
-        </p:spPr>
-        <p:txBody>
-          <a:bodyPr wrap="square" lIns="0" tIns="0" rIns="0" bIns="0" rtlCol="0" anchor="ctr"/>
-          <a:lstStyle/>
-          <a:p>
-            <a:pPr indent="0" marL="0">
-              <a:buNone/>
-            </a:pPr>
-            <a:r>
-              <a:rPr lang="en-US" sz="1100" b="1" spc="200" kern="0" dirty="0">
+            <a:off x="365760" y="822960"/>
+            <a:ext cx="8229600" cy="237744"/>
+          </a:xfrm>
+          <a:prstGeom prst="rect">
+            <a:avLst/>
+          </a:prstGeom>
+          <a:noFill/>
+          <a:ln/>
+        </p:spPr>
+        <p:txBody>
+          <a:bodyPr wrap="square" lIns="0" tIns="0" rIns="0" bIns="0" rtlCol="0" anchor="ctr"/>
+          <a:lstStyle/>
+          <a:p>
+            <a:pPr indent="0" marL="0">
+              <a:buNone/>
+            </a:pPr>
+            <a:r>
+              <a:rPr lang="en-US" sz="1100" b="1" spc="100" kern="0" dirty="0">
                 <a:solidFill>
                   <a:srgbClr val="C7922C"/>
                 </a:solidFill>
@@ -4573,7 +5423,7 @@
                 <a:ea typeface="Calibri" pitchFamily="34" charset="-122"/>
                 <a:cs typeface="Calibri" pitchFamily="34" charset="-120"/>
               </a:rPr>
-              <a:t>📖 READ THE PROMPT — 1 MINUTE</a:t>
+              <a:t>READ THE PROMPT — 1 MINUTE</a:t>
             </a:r>
             <a:endParaRPr lang="en-US" sz="1100" dirty="0"/>
           </a:p>
@@ -4587,18 +5437,18 @@
         </p:nvSpPr>
         <p:spPr>
           <a:xfrm>
-            <a:off x="457200" y="1417320"/>
-            <a:ext cx="8229600" cy="1645920"/>
+            <a:off x="365760" y="1143000"/>
+            <a:ext cx="8412480" cy="1737360"/>
           </a:xfrm>
           <a:prstGeom prst="roundRect">
             <a:avLst>
-              <a:gd name="adj" fmla="val 5556"/>
+              <a:gd name="adj" fmla="val 5263"/>
             </a:avLst>
           </a:prstGeom>
           <a:solidFill>
             <a:srgbClr val="FEF6E8"/>
           </a:solidFill>
-          <a:ln w="12700">
+          <a:ln w="19050">
             <a:solidFill>
               <a:srgbClr val="C7922C"/>
             </a:solidFill>
@@ -4621,24 +5471,24 @@
         </p:nvSpPr>
         <p:spPr>
           <a:xfrm>
-            <a:off x="640080" y="1527048"/>
-            <a:ext cx="7863840" cy="1417320"/>
-          </a:xfrm>
-          <a:prstGeom prst="rect">
-            <a:avLst/>
-          </a:prstGeom>
-          <a:noFill/>
-          <a:ln/>
-        </p:spPr>
-        <p:txBody>
-          <a:bodyPr wrap="square" lIns="0" tIns="0" rIns="0" bIns="0" rtlCol="0" anchor="ctr"/>
-          <a:lstStyle/>
-          <a:p>
-            <a:pPr indent="0" marL="0">
-              <a:buNone/>
-            </a:pPr>
-            <a:r>
-              <a:rPr lang="en-US" sz="1800" i="1" dirty="0">
+            <a:off x="594360" y="1271016"/>
+            <a:ext cx="7955280" cy="1481328"/>
+          </a:xfrm>
+          <a:prstGeom prst="rect">
+            <a:avLst/>
+          </a:prstGeom>
+          <a:noFill/>
+          <a:ln/>
+        </p:spPr>
+        <p:txBody>
+          <a:bodyPr wrap="square" lIns="0" tIns="0" rIns="0" bIns="0" rtlCol="0" anchor="ctr"/>
+          <a:lstStyle/>
+          <a:p>
+            <a:pPr indent="0" marL="0">
+              <a:buNone/>
+            </a:pPr>
+            <a:r>
+              <a:rPr lang="en-US" sz="1700" dirty="0">
                 <a:solidFill>
                   <a:srgbClr val="1E293B"/>
                 </a:solidFill>
@@ -4646,9 +5496,9 @@
                 <a:ea typeface="Calibri" pitchFamily="34" charset="-122"/>
                 <a:cs typeface="Calibri" pitchFamily="34" charset="-120"/>
               </a:rPr>
-              <a:t>Compare Stanley's life before and after getting flattened. How did the experience change him? What did he learn? Write about one way Stanley is different at the end of the book than he was at the beginning.</a:t>
-            </a:r>
-            <a:endParaRPr lang="en-US" sz="1800" dirty="0"/>
+              <a:t>Write about a place you have read about but never visited. What do you imagine it is like?</a:t>
+            </a:r>
+            <a:endParaRPr lang="en-US" sz="1700" dirty="0"/>
           </a:p>
         </p:txBody>
       </p:sp>
@@ -4660,76 +5510,34 @@
         </p:nvSpPr>
         <p:spPr>
           <a:xfrm>
-            <a:off x="640080" y="3246120"/>
-            <a:ext cx="7863840" cy="457200"/>
-          </a:xfrm>
-          <a:prstGeom prst="rect">
-            <a:avLst/>
-          </a:prstGeom>
-          <a:noFill/>
-          <a:ln/>
-        </p:spPr>
-        <p:txBody>
-          <a:bodyPr wrap="square" lIns="0" tIns="0" rIns="0" bIns="0" rtlCol="0" anchor="ctr"/>
-          <a:lstStyle/>
-          <a:p>
-            <a:pPr indent="0" marL="0">
-              <a:buNone/>
-            </a:pPr>
-            <a:r>
-              <a:rPr lang="en-US" sz="1400" b="1" dirty="0">
-                <a:solidFill>
-                  <a:srgbClr val="0E1C42"/>
-                </a:solidFill>
-                <a:latin typeface="Calibri" pitchFamily="34" charset="0"/>
-                <a:ea typeface="Calibri" pitchFamily="34" charset="-122"/>
-                <a:cs typeface="Calibri" pitchFamily="34" charset="-120"/>
-              </a:rPr>
-              <a:t>Type in the chat </a:t>
-            </a:r>
-            <a:pPr indent="0" marL="0">
-              <a:buNone/>
-            </a:pPr>
-            <a:r>
-              <a:rPr lang="en-US" sz="1400" dirty="0">
-                <a:solidFill>
-                  <a:srgbClr val="1E293B"/>
-                </a:solidFill>
-                <a:latin typeface="Calibri" pitchFamily="34" charset="0"/>
-                <a:ea typeface="Calibri" pitchFamily="34" charset="-122"/>
-                <a:cs typeface="Calibri" pitchFamily="34" charset="-120"/>
-              </a:rPr>
-              <a:t>or </a:t>
-            </a:r>
-            <a:pPr indent="0" marL="0">
-              <a:buNone/>
-            </a:pPr>
-            <a:r>
-              <a:rPr lang="en-US" sz="1400" b="1" dirty="0">
-                <a:solidFill>
-                  <a:srgbClr val="0E1C42"/>
-                </a:solidFill>
-                <a:latin typeface="Calibri" pitchFamily="34" charset="0"/>
-                <a:ea typeface="Calibri" pitchFamily="34" charset="-122"/>
-                <a:cs typeface="Calibri" pitchFamily="34" charset="-120"/>
-              </a:rPr>
-              <a:t>write on paper</a:t>
-            </a:r>
-            <a:pPr indent="0" marL="0">
-              <a:buNone/>
-            </a:pPr>
-            <a:r>
-              <a:rPr lang="en-US" sz="1400" dirty="0">
-                <a:solidFill>
-                  <a:srgbClr val="1E293B"/>
-                </a:solidFill>
-                <a:latin typeface="Calibri" pitchFamily="34" charset="0"/>
-                <a:ea typeface="Calibri" pitchFamily="34" charset="-122"/>
-                <a:cs typeface="Calibri" pitchFamily="34" charset="-120"/>
-              </a:rPr>
-              <a:t> to hold up when we share.</a:t>
-            </a:r>
-            <a:endParaRPr lang="en-US" sz="1400" dirty="0"/>
+            <a:off x="365760" y="3063240"/>
+            <a:ext cx="8412480" cy="365760"/>
+          </a:xfrm>
+          <a:prstGeom prst="rect">
+            <a:avLst/>
+          </a:prstGeom>
+          <a:noFill/>
+          <a:ln/>
+        </p:spPr>
+        <p:txBody>
+          <a:bodyPr wrap="square" lIns="0" tIns="0" rIns="0" bIns="0" rtlCol="0" anchor="ctr"/>
+          <a:lstStyle/>
+          <a:p>
+            <a:pPr indent="0" marL="0">
+              <a:buNone/>
+            </a:pPr>
+            <a:r>
+              <a:rPr lang="en-US" sz="1600" i="1" dirty="0">
+                <a:solidFill>
+                  <a:srgbClr val="64748B"/>
+                </a:solidFill>
+                <a:latin typeface="Calibri" pitchFamily="34" charset="0"/>
+                <a:ea typeface="Calibri" pitchFamily="34" charset="-122"/>
+                <a:cs typeface="Calibri" pitchFamily="34" charset="-120"/>
+              </a:rPr>
+              <a:t>Think first. You will have five minutes to write.</a:t>
+            </a:r>
+            <a:endParaRPr lang="en-US" sz="1600" dirty="0"/>
           </a:p>
         </p:txBody>
       </p:sp>
@@ -4767,30 +5575,89 @@
       </p:grpSpPr>
       <p:sp>
         <p:nvSpPr>
-          <p:cNvPr id="2" name="Text 0"/>
-          <p:cNvSpPr/>
-          <p:nvPr/>
-        </p:nvSpPr>
-        <p:spPr>
-          <a:xfrm>
-            <a:off x="457200" y="228600"/>
-            <a:ext cx="8229600" cy="640080"/>
-          </a:xfrm>
-          <a:prstGeom prst="rect">
-            <a:avLst/>
-          </a:prstGeom>
-          <a:noFill/>
-          <a:ln/>
-        </p:spPr>
-        <p:txBody>
-          <a:bodyPr wrap="square" lIns="0" tIns="0" rIns="0" bIns="0" rtlCol="0" anchor="ctr"/>
-          <a:lstStyle/>
-          <a:p>
-            <a:pPr algn="ctr" indent="0" marL="0">
-              <a:buNone/>
-            </a:pPr>
-            <a:r>
-              <a:rPr lang="en-US" sz="3200" b="1" dirty="0">
+          <p:cNvPr id="2" name="Shape 0"/>
+          <p:cNvSpPr/>
+          <p:nvPr/>
+        </p:nvSpPr>
+        <p:spPr>
+          <a:xfrm>
+            <a:off x="0" y="0"/>
+            <a:ext cx="9144000" cy="566928"/>
+          </a:xfrm>
+          <a:prstGeom prst="rect">
+            <a:avLst/>
+          </a:prstGeom>
+          <a:solidFill>
+            <a:srgbClr val="C7922C"/>
+          </a:solidFill>
+          <a:ln/>
+        </p:spPr>
+      </p:sp>
+      <p:sp>
+        <p:nvSpPr>
+          <p:cNvPr id="3" name="Text 1"/>
+          <p:cNvSpPr/>
+          <p:nvPr/>
+        </p:nvSpPr>
+        <p:spPr>
+          <a:xfrm>
+            <a:off x="365760" y="54864"/>
+            <a:ext cx="8412480" cy="457200"/>
+          </a:xfrm>
+          <a:prstGeom prst="rect">
+            <a:avLst/>
+          </a:prstGeom>
+          <a:noFill/>
+          <a:ln/>
+        </p:spPr>
+        <p:txBody>
+          <a:bodyPr wrap="square" lIns="0" tIns="0" rIns="0" bIns="0" rtlCol="0" anchor="ctr"/>
+          <a:lstStyle/>
+          <a:p>
+            <a:pPr indent="0" marL="0">
+              <a:buNone/>
+            </a:pPr>
+            <a:r>
+              <a:rPr lang="en-US" sz="2200" b="1" dirty="0">
+                <a:solidFill>
+                  <a:srgbClr val="FFFFFF"/>
+                </a:solidFill>
+                <a:latin typeface="Calibri" pitchFamily="34" charset="0"/>
+                <a:ea typeface="Calibri" pitchFamily="34" charset="-122"/>
+                <a:cs typeface="Calibri" pitchFamily="34" charset="-120"/>
+              </a:rPr>
+              <a:t>✍️  Writing Time</a:t>
+            </a:r>
+            <a:endParaRPr lang="en-US" sz="2200" dirty="0"/>
+          </a:p>
+        </p:txBody>
+      </p:sp>
+      <p:sp>
+        <p:nvSpPr>
+          <p:cNvPr id="4" name="Text 2"/>
+          <p:cNvSpPr/>
+          <p:nvPr/>
+        </p:nvSpPr>
+        <p:spPr>
+          <a:xfrm>
+            <a:off x="365760" y="868680"/>
+            <a:ext cx="8412480" cy="502920"/>
+          </a:xfrm>
+          <a:prstGeom prst="rect">
+            <a:avLst/>
+          </a:prstGeom>
+          <a:noFill/>
+          <a:ln/>
+        </p:spPr>
+        <p:txBody>
+          <a:bodyPr wrap="square" lIns="0" tIns="0" rIns="0" bIns="0" rtlCol="0" anchor="ctr"/>
+          <a:lstStyle/>
+          <a:p>
+            <a:pPr indent="0" marL="0">
+              <a:buNone/>
+            </a:pPr>
+            <a:r>
+              <a:rPr lang="en-US" sz="2600" b="1" dirty="0">
                 <a:solidFill>
                   <a:srgbClr val="0E1C42"/>
                 </a:solidFill>
@@ -4798,38 +5665,38 @@
                 <a:ea typeface="Calibri" pitchFamily="34" charset="-122"/>
                 <a:cs typeface="Calibri" pitchFamily="34" charset="-120"/>
               </a:rPr>
-              <a:t>✏️  Writing Time</a:t>
-            </a:r>
-            <a:endParaRPr lang="en-US" sz="3200" dirty="0"/>
-          </a:p>
-        </p:txBody>
-      </p:sp>
-      <p:sp>
-        <p:nvSpPr>
-          <p:cNvPr id="3" name="Text 1"/>
-          <p:cNvSpPr/>
-          <p:nvPr/>
-        </p:nvSpPr>
-        <p:spPr>
-          <a:xfrm>
-            <a:off x="914400" y="822960"/>
-            <a:ext cx="7315200" cy="365760"/>
-          </a:xfrm>
-          <a:prstGeom prst="rect">
-            <a:avLst/>
-          </a:prstGeom>
-          <a:noFill/>
-          <a:ln/>
-        </p:spPr>
-        <p:txBody>
-          <a:bodyPr wrap="square" lIns="0" tIns="0" rIns="0" bIns="0" rtlCol="0" anchor="ctr"/>
-          <a:lstStyle/>
-          <a:p>
-            <a:pPr algn="ctr" indent="0" marL="0">
-              <a:buNone/>
-            </a:pPr>
-            <a:r>
-              <a:rPr lang="en-US" sz="1600" dirty="0">
+              <a:t>5 minutes — keep your pencil moving!</a:t>
+            </a:r>
+            <a:endParaRPr lang="en-US" sz="2600" dirty="0"/>
+          </a:p>
+        </p:txBody>
+      </p:sp>
+      <p:sp>
+        <p:nvSpPr>
+          <p:cNvPr id="5" name="Text 3"/>
+          <p:cNvSpPr/>
+          <p:nvPr/>
+        </p:nvSpPr>
+        <p:spPr>
+          <a:xfrm>
+            <a:off x="365760" y="1463040"/>
+            <a:ext cx="8229600" cy="237744"/>
+          </a:xfrm>
+          <a:prstGeom prst="rect">
+            <a:avLst/>
+          </a:prstGeom>
+          <a:noFill/>
+          <a:ln/>
+        </p:spPr>
+        <p:txBody>
+          <a:bodyPr wrap="square" lIns="0" tIns="0" rIns="0" bIns="0" rtlCol="0" anchor="ctr"/>
+          <a:lstStyle/>
+          <a:p>
+            <a:pPr indent="0" marL="0">
+              <a:buNone/>
+            </a:pPr>
+            <a:r>
+              <a:rPr lang="en-US" sz="1100" b="1" spc="100" kern="0" dirty="0">
                 <a:solidFill>
                   <a:srgbClr val="C7922C"/>
                 </a:solidFill>
@@ -4837,32 +5704,32 @@
                 <a:ea typeface="Calibri" pitchFamily="34" charset="-122"/>
                 <a:cs typeface="Calibri" pitchFamily="34" charset="-120"/>
               </a:rPr>
-              <a:t>5 minutes — keep your pencil moving!</a:t>
-            </a:r>
-            <a:endParaRPr lang="en-US" sz="1600" dirty="0"/>
-          </a:p>
-        </p:txBody>
-      </p:sp>
-      <p:sp>
-        <p:nvSpPr>
-          <p:cNvPr id="4" name="Shape 2"/>
-          <p:cNvSpPr/>
-          <p:nvPr/>
-        </p:nvSpPr>
-        <p:spPr>
-          <a:xfrm>
-            <a:off x="457200" y="1371600"/>
-            <a:ext cx="8229600" cy="1280160"/>
+              <a:t>YOUR PROMPT</a:t>
+            </a:r>
+            <a:endParaRPr lang="en-US" sz="1100" dirty="0"/>
+          </a:p>
+        </p:txBody>
+      </p:sp>
+      <p:sp>
+        <p:nvSpPr>
+          <p:cNvPr id="6" name="Shape 4"/>
+          <p:cNvSpPr/>
+          <p:nvPr/>
+        </p:nvSpPr>
+        <p:spPr>
+          <a:xfrm>
+            <a:off x="365760" y="1737360"/>
+            <a:ext cx="8412480" cy="1417320"/>
           </a:xfrm>
           <a:prstGeom prst="roundRect">
             <a:avLst>
-              <a:gd name="adj" fmla="val 7143"/>
+              <a:gd name="adj" fmla="val 6452"/>
             </a:avLst>
           </a:prstGeom>
           <a:solidFill>
             <a:srgbClr val="FFFFFF"/>
           </a:solidFill>
-          <a:ln w="12700">
+          <a:ln w="19050">
             <a:solidFill>
               <a:srgbClr val="C7922C"/>
             </a:solidFill>
@@ -4879,44 +5746,30 @@
       </p:sp>
       <p:sp>
         <p:nvSpPr>
-          <p:cNvPr id="5" name="Text 3"/>
-          <p:cNvSpPr/>
-          <p:nvPr/>
-        </p:nvSpPr>
-        <p:spPr>
-          <a:xfrm>
-            <a:off x="640080" y="1417320"/>
-            <a:ext cx="7863840" cy="1188720"/>
-          </a:xfrm>
-          <a:prstGeom prst="rect">
-            <a:avLst/>
-          </a:prstGeom>
-          <a:noFill/>
-          <a:ln/>
-        </p:spPr>
-        <p:txBody>
-          <a:bodyPr wrap="square" lIns="0" tIns="0" rIns="0" bIns="0" rtlCol="0" anchor="t"/>
-          <a:lstStyle/>
-          <a:p>
-            <a:pPr indent="0" marL="0">
-              <a:buNone/>
-            </a:pPr>
-            <a:r>
-              <a:rPr lang="en-US" sz="1200" b="1" dirty="0">
-                <a:solidFill>
-                  <a:srgbClr val="C7922C"/>
-                </a:solidFill>
-                <a:latin typeface="Calibri" pitchFamily="34" charset="0"/>
-                <a:ea typeface="Calibri" pitchFamily="34" charset="-122"/>
-                <a:cs typeface="Calibri" pitchFamily="34" charset="-120"/>
-              </a:rPr>
-              <a:t>📖 Prompt: </a:t>
-            </a:r>
-            <a:pPr indent="0" marL="0">
-              <a:buNone/>
-            </a:pPr>
-            <a:r>
-              <a:rPr lang="en-US" sz="1200" i="1" dirty="0">
+          <p:cNvPr id="7" name="Text 5"/>
+          <p:cNvSpPr/>
+          <p:nvPr/>
+        </p:nvSpPr>
+        <p:spPr>
+          <a:xfrm>
+            <a:off x="594360" y="1865376"/>
+            <a:ext cx="7955280" cy="1161288"/>
+          </a:xfrm>
+          <a:prstGeom prst="rect">
+            <a:avLst/>
+          </a:prstGeom>
+          <a:noFill/>
+          <a:ln/>
+        </p:spPr>
+        <p:txBody>
+          <a:bodyPr wrap="square" lIns="0" tIns="0" rIns="0" bIns="0" rtlCol="0" anchor="ctr"/>
+          <a:lstStyle/>
+          <a:p>
+            <a:pPr indent="0" marL="0">
+              <a:buNone/>
+            </a:pPr>
+            <a:r>
+              <a:rPr lang="en-US" sz="1700" dirty="0">
                 <a:solidFill>
                   <a:srgbClr val="1E293B"/>
                 </a:solidFill>
@@ -4924,122 +5777,48 @@
                 <a:ea typeface="Calibri" pitchFamily="34" charset="-122"/>
                 <a:cs typeface="Calibri" pitchFamily="34" charset="-120"/>
               </a:rPr>
-              <a:t>Compare Stanley's life before and after getting flattened. How did the experience change him? What did he learn? Write about one way Stanley is different at the end of the book than he was at the beginning.</a:t>
-            </a:r>
-            <a:endParaRPr lang="en-US" sz="1200" dirty="0"/>
-          </a:p>
-        </p:txBody>
-      </p:sp>
-      <p:sp>
-        <p:nvSpPr>
-          <p:cNvPr id="6" name="Shape 4"/>
-          <p:cNvSpPr/>
-          <p:nvPr/>
-        </p:nvSpPr>
-        <p:spPr>
-          <a:xfrm>
-            <a:off x="2286000" y="2926080"/>
-            <a:ext cx="4572000" cy="1280160"/>
-          </a:xfrm>
-          <a:prstGeom prst="roundRect">
-            <a:avLst>
-              <a:gd name="adj" fmla="val 8571"/>
-            </a:avLst>
-          </a:prstGeom>
-          <a:solidFill>
-            <a:srgbClr val="FFFFFF"/>
-          </a:solidFill>
-          <a:ln/>
-          <a:effectLst>
-            <a:outerShdw sx="100000" sy="100000" kx="0" ky="0" algn="bl" rotWithShape="0" blurRad="101600" dist="38100" dir="2700000">
-              <a:srgbClr val="000000">
-                <a:alpha val="12000"/>
-              </a:srgbClr>
-            </a:outerShdw>
-          </a:effectLst>
-        </p:spPr>
-      </p:sp>
-      <p:sp>
-        <p:nvSpPr>
-          <p:cNvPr id="7" name="Text 5"/>
-          <p:cNvSpPr/>
-          <p:nvPr/>
-        </p:nvSpPr>
-        <p:spPr>
-          <a:xfrm>
-            <a:off x="2468880" y="3017520"/>
-            <a:ext cx="4206240" cy="1097280"/>
-          </a:xfrm>
-          <a:prstGeom prst="rect">
-            <a:avLst/>
-          </a:prstGeom>
-          <a:noFill/>
-          <a:ln/>
-        </p:spPr>
-        <p:txBody>
-          <a:bodyPr wrap="square" lIns="0" tIns="0" rIns="0" bIns="0" rtlCol="0" anchor="t"/>
-          <a:lstStyle/>
-          <a:p>
-            <a:pPr indent="0" marL="0">
-              <a:buNone/>
-            </a:pPr>
-            <a:r>
-              <a:rPr lang="en-US" sz="1400" b="1" dirty="0">
-                <a:solidFill>
-                  <a:srgbClr val="0E1C42"/>
-                </a:solidFill>
-                <a:latin typeface="Calibri" pitchFamily="34" charset="0"/>
-                <a:ea typeface="Calibri" pitchFamily="34" charset="-122"/>
-                <a:cs typeface="Calibri" pitchFamily="34" charset="-120"/>
-              </a:rPr>
-              <a:t>If you get stuck:
-</a:t>
-            </a:r>
-            <a:pPr indent="0" marL="0">
-              <a:buNone/>
-            </a:pPr>
-            <a:r>
-              <a:rPr lang="en-US" sz="1300" dirty="0">
-                <a:solidFill>
-                  <a:srgbClr val="1E293B"/>
-                </a:solidFill>
-                <a:latin typeface="Calibri" pitchFamily="34" charset="0"/>
-                <a:ea typeface="Calibri" pitchFamily="34" charset="-122"/>
-                <a:cs typeface="Calibri" pitchFamily="34" charset="-120"/>
-              </a:rPr>
-              <a:t>• Reread the prompt above
-</a:t>
-            </a:r>
-            <a:pPr indent="0" marL="0">
-              <a:buNone/>
-            </a:pPr>
-            <a:r>
-              <a:rPr lang="en-US" sz="1300" dirty="0">
-                <a:solidFill>
-                  <a:srgbClr val="1E293B"/>
-                </a:solidFill>
-                <a:latin typeface="Calibri" pitchFamily="34" charset="0"/>
-                <a:ea typeface="Calibri" pitchFamily="34" charset="-122"/>
-                <a:cs typeface="Calibri" pitchFamily="34" charset="-120"/>
-              </a:rPr>
-              <a:t>• Write "I'm thinking..." until a new idea comes
-</a:t>
-            </a:r>
-            <a:pPr indent="0" marL="0">
-              <a:buNone/>
-            </a:pPr>
-            <a:r>
-              <a:rPr lang="en-US" sz="1300" dirty="0">
-                <a:solidFill>
-                  <a:srgbClr val="1E293B"/>
-                </a:solidFill>
-                <a:latin typeface="Calibri" pitchFamily="34" charset="0"/>
-                <a:ea typeface="Calibri" pitchFamily="34" charset="-122"/>
-                <a:cs typeface="Calibri" pitchFamily="34" charset="-120"/>
-              </a:rPr>
-              <a:t>• Keep going — don't erase!</a:t>
-            </a:r>
-            <a:endParaRPr lang="en-US" sz="1400" dirty="0"/>
+              <a:t>Write about a place you have read about but never visited. What do you imagine it is like?</a:t>
+            </a:r>
+            <a:endParaRPr lang="en-US" sz="1700" dirty="0"/>
+          </a:p>
+        </p:txBody>
+      </p:sp>
+      <p:sp>
+        <p:nvSpPr>
+          <p:cNvPr id="8" name="Text 6"/>
+          <p:cNvSpPr/>
+          <p:nvPr/>
+        </p:nvSpPr>
+        <p:spPr>
+          <a:xfrm>
+            <a:off x="365760" y="3291840"/>
+            <a:ext cx="8412480" cy="365760"/>
+          </a:xfrm>
+          <a:prstGeom prst="rect">
+            <a:avLst/>
+          </a:prstGeom>
+          <a:noFill/>
+          <a:ln/>
+        </p:spPr>
+        <p:txBody>
+          <a:bodyPr wrap="square" lIns="0" tIns="0" rIns="0" bIns="0" rtlCol="0" anchor="ctr"/>
+          <a:lstStyle/>
+          <a:p>
+            <a:pPr indent="0" marL="0">
+              <a:buNone/>
+            </a:pPr>
+            <a:r>
+              <a:rPr lang="en-US" sz="1500" i="1" dirty="0">
+                <a:solidFill>
+                  <a:srgbClr val="64748B"/>
+                </a:solidFill>
+                <a:latin typeface="Calibri" pitchFamily="34" charset="0"/>
+                <a:ea typeface="Calibri" pitchFamily="34" charset="-122"/>
+                <a:cs typeface="Calibri" pitchFamily="34" charset="-120"/>
+              </a:rPr>
+              <a:t>Do not stop to erase. If you get stuck, write the last word again and keep going.</a:t>
+            </a:r>
+            <a:endParaRPr lang="en-US" sz="1500" dirty="0"/>
           </a:p>
         </p:txBody>
       </p:sp>
@@ -5077,39 +5856,23 @@
       </p:grpSpPr>
       <p:sp>
         <p:nvSpPr>
-          <p:cNvPr id="2" name="Text 0"/>
-          <p:cNvSpPr/>
-          <p:nvPr/>
-        </p:nvSpPr>
-        <p:spPr>
-          <a:xfrm>
-            <a:off x="3657600" y="365760"/>
-            <a:ext cx="1828800" cy="640080"/>
-          </a:xfrm>
-          <a:prstGeom prst="rect">
-            <a:avLst/>
-          </a:prstGeom>
-          <a:noFill/>
-          <a:ln/>
-        </p:spPr>
-        <p:txBody>
-          <a:bodyPr wrap="square" lIns="0" tIns="0" rIns="0" bIns="0" rtlCol="0" anchor="ctr"/>
-          <a:lstStyle/>
-          <a:p>
-            <a:pPr algn="ctr" indent="0" marL="0">
-              <a:buNone/>
-            </a:pPr>
-            <a:r>
-              <a:rPr lang="en-US" sz="4000" dirty="0">
-                <a:solidFill>
-                  <a:srgbClr val="000000"/>
-                </a:solidFill>
-              </a:rPr>
-              <a:t>🔍</a:t>
-            </a:r>
-            <a:endParaRPr lang="en-US" sz="4000" dirty="0"/>
-          </a:p>
-        </p:txBody>
+          <p:cNvPr id="2" name="Shape 0"/>
+          <p:cNvSpPr/>
+          <p:nvPr/>
+        </p:nvSpPr>
+        <p:spPr>
+          <a:xfrm>
+            <a:off x="0" y="0"/>
+            <a:ext cx="9144000" cy="566928"/>
+          </a:xfrm>
+          <a:prstGeom prst="rect">
+            <a:avLst/>
+          </a:prstGeom>
+          <a:solidFill>
+            <a:srgbClr val="34B76F"/>
+          </a:solidFill>
+          <a:ln/>
+        </p:spPr>
       </p:sp>
       <p:sp>
         <p:nvSpPr>
@@ -5119,24 +5882,63 @@
         </p:nvSpPr>
         <p:spPr>
           <a:xfrm>
-            <a:off x="914400" y="914400"/>
-            <a:ext cx="7315200" cy="640080"/>
-          </a:xfrm>
-          <a:prstGeom prst="rect">
-            <a:avLst/>
-          </a:prstGeom>
-          <a:noFill/>
-          <a:ln/>
-        </p:spPr>
-        <p:txBody>
-          <a:bodyPr wrap="square" lIns="0" tIns="0" rIns="0" bIns="0" rtlCol="0" anchor="ctr"/>
-          <a:lstStyle/>
-          <a:p>
-            <a:pPr algn="ctr" indent="0" marL="0">
-              <a:buNone/>
-            </a:pPr>
-            <a:r>
-              <a:rPr lang="en-US" sz="3200" b="1" dirty="0">
+            <a:off x="365760" y="54864"/>
+            <a:ext cx="8412480" cy="457200"/>
+          </a:xfrm>
+          <a:prstGeom prst="rect">
+            <a:avLst/>
+          </a:prstGeom>
+          <a:noFill/>
+          <a:ln/>
+        </p:spPr>
+        <p:txBody>
+          <a:bodyPr wrap="square" lIns="0" tIns="0" rIns="0" bIns="0" rtlCol="0" anchor="ctr"/>
+          <a:lstStyle/>
+          <a:p>
+            <a:pPr indent="0" marL="0">
+              <a:buNone/>
+            </a:pPr>
+            <a:r>
+              <a:rPr lang="en-US" sz="2200" b="1" dirty="0">
+                <a:solidFill>
+                  <a:srgbClr val="FFFFFF"/>
+                </a:solidFill>
+                <a:latin typeface="Calibri" pitchFamily="34" charset="0"/>
+                <a:ea typeface="Calibri" pitchFamily="34" charset="-122"/>
+                <a:cs typeface="Calibri" pitchFamily="34" charset="-120"/>
+              </a:rPr>
+              <a:t>🔍  Edit &amp; Revise</a:t>
+            </a:r>
+            <a:endParaRPr lang="en-US" sz="2200" dirty="0"/>
+          </a:p>
+        </p:txBody>
+      </p:sp>
+      <p:sp>
+        <p:nvSpPr>
+          <p:cNvPr id="4" name="Text 2"/>
+          <p:cNvSpPr/>
+          <p:nvPr/>
+        </p:nvSpPr>
+        <p:spPr>
+          <a:xfrm>
+            <a:off x="365760" y="868680"/>
+            <a:ext cx="8412480" cy="457200"/>
+          </a:xfrm>
+          <a:prstGeom prst="rect">
+            <a:avLst/>
+          </a:prstGeom>
+          <a:noFill/>
+          <a:ln/>
+        </p:spPr>
+        <p:txBody>
+          <a:bodyPr wrap="square" lIns="0" tIns="0" rIns="0" bIns="0" rtlCol="0" anchor="ctr"/>
+          <a:lstStyle/>
+          <a:p>
+            <a:pPr indent="0" marL="0">
+              <a:buNone/>
+            </a:pPr>
+            <a:r>
+              <a:rPr lang="en-US" sz="2400" b="1" dirty="0">
                 <a:solidFill>
                   <a:srgbClr val="0E1C42"/>
                 </a:solidFill>
@@ -5144,38 +5946,38 @@
                 <a:ea typeface="Calibri" pitchFamily="34" charset="-122"/>
                 <a:cs typeface="Calibri" pitchFamily="34" charset="-120"/>
               </a:rPr>
-              <a:t>Edit &amp; Revise</a:t>
-            </a:r>
-            <a:endParaRPr lang="en-US" sz="3200" dirty="0"/>
-          </a:p>
-        </p:txBody>
-      </p:sp>
-      <p:sp>
-        <p:nvSpPr>
-          <p:cNvPr id="4" name="Text 2"/>
-          <p:cNvSpPr/>
-          <p:nvPr/>
-        </p:nvSpPr>
-        <p:spPr>
-          <a:xfrm>
-            <a:off x="914400" y="1508760"/>
-            <a:ext cx="7315200" cy="457200"/>
-          </a:xfrm>
-          <a:prstGeom prst="rect">
-            <a:avLst/>
-          </a:prstGeom>
-          <a:noFill/>
-          <a:ln/>
-        </p:spPr>
-        <p:txBody>
-          <a:bodyPr wrap="square" lIns="0" tIns="0" rIns="0" bIns="0" rtlCol="0" anchor="ctr"/>
-          <a:lstStyle/>
-          <a:p>
-            <a:pPr algn="ctr" indent="0" marL="0">
-              <a:buNone/>
-            </a:pPr>
-            <a:r>
-              <a:rPr lang="en-US" sz="1600" dirty="0">
+              <a:t>1 minute — pick ONE thing to fix.</a:t>
+            </a:r>
+            <a:endParaRPr lang="en-US" sz="2400" dirty="0"/>
+          </a:p>
+        </p:txBody>
+      </p:sp>
+      <p:sp>
+        <p:nvSpPr>
+          <p:cNvPr id="5" name="Text 3"/>
+          <p:cNvSpPr/>
+          <p:nvPr/>
+        </p:nvSpPr>
+        <p:spPr>
+          <a:xfrm>
+            <a:off x="365760" y="1417320"/>
+            <a:ext cx="8229600" cy="237744"/>
+          </a:xfrm>
+          <a:prstGeom prst="rect">
+            <a:avLst/>
+          </a:prstGeom>
+          <a:noFill/>
+          <a:ln/>
+        </p:spPr>
+        <p:txBody>
+          <a:bodyPr wrap="square" lIns="0" tIns="0" rIns="0" bIns="0" rtlCol="0" anchor="ctr"/>
+          <a:lstStyle/>
+          <a:p>
+            <a:pPr indent="0" marL="0">
+              <a:buNone/>
+            </a:pPr>
+            <a:r>
+              <a:rPr lang="en-US" sz="1100" b="1" spc="100" kern="0" dirty="0">
                 <a:solidFill>
                   <a:srgbClr val="34B76F"/>
                 </a:solidFill>
@@ -5183,26 +5985,26 @@
                 <a:ea typeface="Calibri" pitchFamily="34" charset="-122"/>
                 <a:cs typeface="Calibri" pitchFamily="34" charset="-120"/>
               </a:rPr>
-              <a:t>1 minute — pick ONE thing to fix</a:t>
-            </a:r>
-            <a:endParaRPr lang="en-US" sz="1600" dirty="0"/>
-          </a:p>
-        </p:txBody>
-      </p:sp>
-      <p:sp>
-        <p:nvSpPr>
-          <p:cNvPr id="5" name="Shape 3"/>
-          <p:cNvSpPr/>
-          <p:nvPr/>
-        </p:nvSpPr>
-        <p:spPr>
-          <a:xfrm>
-            <a:off x="1371600" y="2103120"/>
-            <a:ext cx="6400800" cy="640080"/>
+              <a:t>TODAY'S EDIT FOCUS</a:t>
+            </a:r>
+            <a:endParaRPr lang="en-US" sz="1100" dirty="0"/>
+          </a:p>
+        </p:txBody>
+      </p:sp>
+      <p:sp>
+        <p:nvSpPr>
+          <p:cNvPr id="6" name="Shape 4"/>
+          <p:cNvSpPr/>
+          <p:nvPr/>
+        </p:nvSpPr>
+        <p:spPr>
+          <a:xfrm>
+            <a:off x="365760" y="1691640"/>
+            <a:ext cx="8412480" cy="777240"/>
           </a:xfrm>
           <a:prstGeom prst="roundRect">
             <a:avLst>
-              <a:gd name="adj" fmla="val 14286"/>
+              <a:gd name="adj" fmla="val 11765"/>
             </a:avLst>
           </a:prstGeom>
           <a:solidFill>
@@ -5225,44 +6027,30 @@
       </p:sp>
       <p:sp>
         <p:nvSpPr>
-          <p:cNvPr id="6" name="Text 4"/>
-          <p:cNvSpPr/>
-          <p:nvPr/>
-        </p:nvSpPr>
-        <p:spPr>
-          <a:xfrm>
-            <a:off x="1554480" y="2148840"/>
-            <a:ext cx="6035040" cy="548640"/>
-          </a:xfrm>
-          <a:prstGeom prst="rect">
-            <a:avLst/>
-          </a:prstGeom>
-          <a:noFill/>
-          <a:ln/>
-        </p:spPr>
-        <p:txBody>
-          <a:bodyPr wrap="square" lIns="0" tIns="0" rIns="0" bIns="0" rtlCol="0" anchor="ctr"/>
-          <a:lstStyle/>
-          <a:p>
-            <a:pPr indent="0" marL="0">
-              <a:buNone/>
-            </a:pPr>
-            <a:r>
-              <a:rPr lang="en-US" sz="1400" b="1" dirty="0">
-                <a:solidFill>
-                  <a:srgbClr val="34B76F"/>
-                </a:solidFill>
-                <a:latin typeface="Calibri" pitchFamily="34" charset="0"/>
-                <a:ea typeface="Calibri" pitchFamily="34" charset="-122"/>
-                <a:cs typeface="Calibri" pitchFamily="34" charset="-120"/>
-              </a:rPr>
-              <a:t>Today's check: </a:t>
-            </a:r>
-            <a:pPr indent="0" marL="0">
-              <a:buNone/>
-            </a:pPr>
-            <a:r>
-              <a:rPr lang="en-US" sz="1400" dirty="0">
+          <p:cNvPr id="7" name="Text 5"/>
+          <p:cNvSpPr/>
+          <p:nvPr/>
+        </p:nvSpPr>
+        <p:spPr>
+          <a:xfrm>
+            <a:off x="594360" y="1819656"/>
+            <a:ext cx="7955280" cy="521208"/>
+          </a:xfrm>
+          <a:prstGeom prst="rect">
+            <a:avLst/>
+          </a:prstGeom>
+          <a:noFill/>
+          <a:ln/>
+        </p:spPr>
+        <p:txBody>
+          <a:bodyPr wrap="square" lIns="0" tIns="0" rIns="0" bIns="0" rtlCol="0" anchor="ctr"/>
+          <a:lstStyle/>
+          <a:p>
+            <a:pPr indent="0" marL="0">
+              <a:buNone/>
+            </a:pPr>
+            <a:r>
+              <a:rPr lang="en-US" sz="1700" dirty="0">
                 <a:solidFill>
                   <a:srgbClr val="1E293B"/>
                 </a:solidFill>
@@ -5270,40 +6058,11 @@
                 <a:ea typeface="Calibri" pitchFamily="34" charset="-122"/>
                 <a:cs typeface="Calibri" pitchFamily="34" charset="-120"/>
               </a:rPr>
-              <a:t>Did I explain how he changed, not just say he changed?</a:t>
-            </a:r>
-            <a:endParaRPr lang="en-US" sz="1400" dirty="0"/>
-          </a:p>
-        </p:txBody>
-      </p:sp>
-      <p:sp>
-        <p:nvSpPr>
-          <p:cNvPr id="7" name="Shape 5"/>
-          <p:cNvSpPr/>
-          <p:nvPr/>
-        </p:nvSpPr>
-        <p:spPr>
-          <a:xfrm>
-            <a:off x="1371600" y="2926080"/>
-            <a:ext cx="6400800" cy="1463040"/>
-          </a:xfrm>
-          <a:prstGeom prst="roundRect">
-            <a:avLst>
-              <a:gd name="adj" fmla="val 6250"/>
-            </a:avLst>
-          </a:prstGeom>
-          <a:solidFill>
-            <a:srgbClr val="FFFFFF"/>
-          </a:solidFill>
-          <a:ln/>
-          <a:effectLst>
-            <a:outerShdw sx="100000" sy="100000" kx="0" ky="0" algn="bl" rotWithShape="0" blurRad="101600" dist="38100" dir="2700000">
-              <a:srgbClr val="000000">
-                <a:alpha val="12000"/>
-              </a:srgbClr>
-            </a:outerShdw>
-          </a:effectLst>
-        </p:spPr>
+              <a:t>Did I start each sentence with a capital letter?</a:t>
+            </a:r>
+            <a:endParaRPr lang="en-US" sz="1700" dirty="0"/>
+          </a:p>
+        </p:txBody>
       </p:sp>
       <p:sp>
         <p:nvSpPr>
@@ -5313,45 +6072,24 @@
         </p:nvSpPr>
         <p:spPr>
           <a:xfrm>
-            <a:off x="1554480" y="3017520"/>
-            <a:ext cx="6035040" cy="1280160"/>
-          </a:xfrm>
-          <a:prstGeom prst="rect">
-            <a:avLst/>
-          </a:prstGeom>
-          <a:noFill/>
-          <a:ln/>
-        </p:spPr>
-        <p:txBody>
-          <a:bodyPr wrap="square" lIns="0" tIns="0" rIns="0" bIns="0" rtlCol="0" anchor="t"/>
-          <a:lstStyle/>
-          <a:p>
-            <a:pPr indent="0" marL="0">
-              <a:spcAft>
-                <a:spcPts val="200"/>
-              </a:spcAft>
-              <a:buNone/>
-            </a:pPr>
-            <a:r>
-              <a:rPr lang="en-US" sz="1300" b="1" dirty="0">
-                <a:solidFill>
-                  <a:srgbClr val="0E1C42"/>
-                </a:solidFill>
-                <a:latin typeface="Calibri" pitchFamily="34" charset="0"/>
-                <a:ea typeface="Calibri" pitchFamily="34" charset="-122"/>
-                <a:cs typeface="Calibri" pitchFamily="34" charset="-120"/>
-              </a:rPr>
-              <a:t>Quick check:
-</a:t>
-            </a:r>
-            <a:pPr indent="0" marL="0">
-              <a:spcAft>
-                <a:spcPts val="200"/>
-              </a:spcAft>
-              <a:buNone/>
-            </a:pPr>
-            <a:r>
-              <a:rPr lang="en-US" sz="1200" dirty="0">
+            <a:off x="365760" y="2651760"/>
+            <a:ext cx="8412480" cy="365760"/>
+          </a:xfrm>
+          <a:prstGeom prst="rect">
+            <a:avLst/>
+          </a:prstGeom>
+          <a:noFill/>
+          <a:ln/>
+        </p:spPr>
+        <p:txBody>
+          <a:bodyPr wrap="square" lIns="0" tIns="0" rIns="0" bIns="0" rtlCol="0" anchor="ctr"/>
+          <a:lstStyle/>
+          <a:p>
+            <a:pPr indent="0" marL="0">
+              <a:buNone/>
+            </a:pPr>
+            <a:r>
+              <a:rPr lang="en-US" sz="1500" b="1" dirty="0">
                 <a:solidFill>
                   <a:srgbClr val="1E293B"/>
                 </a:solidFill>
@@ -5359,17 +6097,13 @@
                 <a:ea typeface="Calibri" pitchFamily="34" charset="-122"/>
                 <a:cs typeface="Calibri" pitchFamily="34" charset="-120"/>
               </a:rPr>
-              <a:t>□ Capital letters at the start of every sentence
-</a:t>
-            </a:r>
-            <a:pPr indent="0" marL="0">
-              <a:spcAft>
-                <a:spcPts val="200"/>
-              </a:spcAft>
-              <a:buNone/>
-            </a:pPr>
-            <a:r>
-              <a:rPr lang="en-US" sz="1200" dirty="0">
+              <a:t>Quick check:  </a:t>
+            </a:r>
+            <a:pPr indent="0" marL="0">
+              <a:buNone/>
+            </a:pPr>
+            <a:r>
+              <a:rPr lang="en-US" sz="1500" dirty="0">
                 <a:solidFill>
                   <a:srgbClr val="1E293B"/>
                 </a:solidFill>
@@ -5377,45 +6111,9 @@
                 <a:ea typeface="Calibri" pitchFamily="34" charset="-122"/>
                 <a:cs typeface="Calibri" pitchFamily="34" charset="-120"/>
               </a:rPr>
-              <a:t>□ End punctuation ( .  ?  ! )
-</a:t>
-            </a:r>
-            <a:pPr indent="0" marL="0">
-              <a:spcAft>
-                <a:spcPts val="200"/>
-              </a:spcAft>
-              <a:buNone/>
-            </a:pPr>
-            <a:r>
-              <a:rPr lang="en-US" sz="1200" dirty="0">
-                <a:solidFill>
-                  <a:srgbClr val="1E293B"/>
-                </a:solidFill>
-                <a:latin typeface="Calibri" pitchFamily="34" charset="0"/>
-                <a:ea typeface="Calibri" pitchFamily="34" charset="-122"/>
-                <a:cs typeface="Calibri" pitchFamily="34" charset="-120"/>
-              </a:rPr>
-              <a:t>□ Spelling — circle any words that look wrong
-</a:t>
-            </a:r>
-            <a:pPr indent="0" marL="0">
-              <a:spcAft>
-                <a:spcPts val="200"/>
-              </a:spcAft>
-              <a:buNone/>
-            </a:pPr>
-            <a:r>
-              <a:rPr lang="en-US" sz="1200" dirty="0">
-                <a:solidFill>
-                  <a:srgbClr val="1E293B"/>
-                </a:solidFill>
-                <a:latin typeface="Calibri" pitchFamily="34" charset="0"/>
-                <a:ea typeface="Calibri" pitchFamily="34" charset="-122"/>
-                <a:cs typeface="Calibri" pitchFamily="34" charset="-120"/>
-              </a:rPr>
-              <a:t>□ Read it quietly to yourself — does it sound right?</a:t>
-            </a:r>
-            <a:endParaRPr lang="en-US" sz="1300" dirty="0"/>
+              <a:t>capitals  ·  end punctuation  ·  circle a word you are unsure of  ·  read it aloud</a:t>
+            </a:r>
+            <a:endParaRPr lang="en-US" sz="1500" dirty="0"/>
           </a:p>
         </p:txBody>
       </p:sp>
@@ -5453,39 +6151,23 @@
       </p:grpSpPr>
       <p:sp>
         <p:nvSpPr>
-          <p:cNvPr id="2" name="Text 0"/>
-          <p:cNvSpPr/>
-          <p:nvPr/>
-        </p:nvSpPr>
-        <p:spPr>
-          <a:xfrm>
-            <a:off x="3657600" y="457200"/>
-            <a:ext cx="1828800" cy="731520"/>
-          </a:xfrm>
-          <a:prstGeom prst="rect">
-            <a:avLst/>
-          </a:prstGeom>
-          <a:noFill/>
-          <a:ln/>
-        </p:spPr>
-        <p:txBody>
-          <a:bodyPr wrap="square" lIns="0" tIns="0" rIns="0" bIns="0" rtlCol="0" anchor="ctr"/>
-          <a:lstStyle/>
-          <a:p>
-            <a:pPr algn="ctr" indent="0" marL="0">
-              <a:buNone/>
-            </a:pPr>
-            <a:r>
-              <a:rPr lang="en-US" sz="4400" dirty="0">
-                <a:solidFill>
-                  <a:srgbClr val="000000"/>
-                </a:solidFill>
-              </a:rPr>
-              <a:t>🗣️</a:t>
-            </a:r>
-            <a:endParaRPr lang="en-US" sz="4400" dirty="0"/>
-          </a:p>
-        </p:txBody>
+          <p:cNvPr id="2" name="Shape 0"/>
+          <p:cNvSpPr/>
+          <p:nvPr/>
+        </p:nvSpPr>
+        <p:spPr>
+          <a:xfrm>
+            <a:off x="0" y="0"/>
+            <a:ext cx="9144000" cy="566928"/>
+          </a:xfrm>
+          <a:prstGeom prst="rect">
+            <a:avLst/>
+          </a:prstGeom>
+          <a:solidFill>
+            <a:srgbClr val="55C8E8"/>
+          </a:solidFill>
+          <a:ln/>
+        </p:spPr>
       </p:sp>
       <p:sp>
         <p:nvSpPr>
@@ -5495,24 +6177,63 @@
         </p:nvSpPr>
         <p:spPr>
           <a:xfrm>
-            <a:off x="914400" y="1097280"/>
-            <a:ext cx="7315200" cy="640080"/>
-          </a:xfrm>
-          <a:prstGeom prst="rect">
-            <a:avLst/>
-          </a:prstGeom>
-          <a:noFill/>
-          <a:ln/>
-        </p:spPr>
-        <p:txBody>
-          <a:bodyPr wrap="square" lIns="0" tIns="0" rIns="0" bIns="0" rtlCol="0" anchor="ctr"/>
-          <a:lstStyle/>
-          <a:p>
-            <a:pPr algn="ctr" indent="0" marL="0">
-              <a:buNone/>
-            </a:pPr>
-            <a:r>
-              <a:rPr lang="en-US" sz="3400" b="1" dirty="0">
+            <a:off x="365760" y="54864"/>
+            <a:ext cx="8412480" cy="457200"/>
+          </a:xfrm>
+          <a:prstGeom prst="rect">
+            <a:avLst/>
+          </a:prstGeom>
+          <a:noFill/>
+          <a:ln/>
+        </p:spPr>
+        <p:txBody>
+          <a:bodyPr wrap="square" lIns="0" tIns="0" rIns="0" bIns="0" rtlCol="0" anchor="ctr"/>
+          <a:lstStyle/>
+          <a:p>
+            <a:pPr indent="0" marL="0">
+              <a:buNone/>
+            </a:pPr>
+            <a:r>
+              <a:rPr lang="en-US" sz="2200" b="1" dirty="0">
+                <a:solidFill>
+                  <a:srgbClr val="FFFFFF"/>
+                </a:solidFill>
+                <a:latin typeface="Calibri" pitchFamily="34" charset="0"/>
+                <a:ea typeface="Calibri" pitchFamily="34" charset="-122"/>
+                <a:cs typeface="Calibri" pitchFamily="34" charset="-120"/>
+              </a:rPr>
+              <a:t>🗣️  Share Time</a:t>
+            </a:r>
+            <a:endParaRPr lang="en-US" sz="2200" dirty="0"/>
+          </a:p>
+        </p:txBody>
+      </p:sp>
+      <p:sp>
+        <p:nvSpPr>
+          <p:cNvPr id="4" name="Text 2"/>
+          <p:cNvSpPr/>
+          <p:nvPr/>
+        </p:nvSpPr>
+        <p:spPr>
+          <a:xfrm>
+            <a:off x="365760" y="1005840"/>
+            <a:ext cx="8412480" cy="548640"/>
+          </a:xfrm>
+          <a:prstGeom prst="rect">
+            <a:avLst/>
+          </a:prstGeom>
+          <a:noFill/>
+          <a:ln/>
+        </p:spPr>
+        <p:txBody>
+          <a:bodyPr wrap="square" lIns="0" tIns="0" rIns="0" bIns="0" rtlCol="0" anchor="ctr"/>
+          <a:lstStyle/>
+          <a:p>
+            <a:pPr indent="0" marL="0">
+              <a:buNone/>
+            </a:pPr>
+            <a:r>
+              <a:rPr lang="en-US" sz="2600" b="1" dirty="0">
                 <a:solidFill>
                   <a:srgbClr val="0E1C42"/>
                 </a:solidFill>
@@ -5520,191 +6241,48 @@
                 <a:ea typeface="Calibri" pitchFamily="34" charset="-122"/>
                 <a:cs typeface="Calibri" pitchFamily="34" charset="-120"/>
               </a:rPr>
-              <a:t>Share Time</a:t>
-            </a:r>
-            <a:endParaRPr lang="en-US" sz="3400" dirty="0"/>
-          </a:p>
-        </p:txBody>
-      </p:sp>
-      <p:sp>
-        <p:nvSpPr>
-          <p:cNvPr id="4" name="Text 2"/>
-          <p:cNvSpPr/>
-          <p:nvPr/>
-        </p:nvSpPr>
-        <p:spPr>
-          <a:xfrm>
-            <a:off x="914400" y="1737360"/>
-            <a:ext cx="7315200" cy="457200"/>
-          </a:xfrm>
-          <a:prstGeom prst="rect">
-            <a:avLst/>
-          </a:prstGeom>
-          <a:noFill/>
-          <a:ln/>
-        </p:spPr>
-        <p:txBody>
-          <a:bodyPr wrap="square" lIns="0" tIns="0" rIns="0" bIns="0" rtlCol="0" anchor="ctr"/>
-          <a:lstStyle/>
-          <a:p>
-            <a:pPr algn="ctr" indent="0" marL="0">
+              <a:t>3 minutes — let's hear your writing!</a:t>
+            </a:r>
+            <a:endParaRPr lang="en-US" sz="2600" dirty="0"/>
+          </a:p>
+        </p:txBody>
+      </p:sp>
+      <p:sp>
+        <p:nvSpPr>
+          <p:cNvPr id="5" name="Text 3"/>
+          <p:cNvSpPr/>
+          <p:nvPr/>
+        </p:nvSpPr>
+        <p:spPr>
+          <a:xfrm>
+            <a:off x="365760" y="1691640"/>
+            <a:ext cx="8412480" cy="457200"/>
+          </a:xfrm>
+          <a:prstGeom prst="rect">
+            <a:avLst/>
+          </a:prstGeom>
+          <a:noFill/>
+          <a:ln/>
+        </p:spPr>
+        <p:txBody>
+          <a:bodyPr wrap="square" lIns="0" tIns="0" rIns="0" bIns="0" rtlCol="0" anchor="ctr"/>
+          <a:lstStyle/>
+          <a:p>
+            <a:pPr indent="0" marL="0">
               <a:buNone/>
             </a:pPr>
             <a:r>
               <a:rPr lang="en-US" sz="1700" dirty="0">
                 <a:solidFill>
-                  <a:srgbClr val="55C8E8"/>
-                </a:solidFill>
-                <a:latin typeface="Calibri" pitchFamily="34" charset="0"/>
-                <a:ea typeface="Calibri" pitchFamily="34" charset="-122"/>
-                <a:cs typeface="Calibri" pitchFamily="34" charset="-120"/>
-              </a:rPr>
-              <a:t>3 minutes — let's hear your writing!</a:t>
+                  <a:srgbClr val="1E293B"/>
+                </a:solidFill>
+                <a:latin typeface="Calibri" pitchFamily="34" charset="0"/>
+                <a:ea typeface="Calibri" pitchFamily="34" charset="-122"/>
+                <a:cs typeface="Calibri" pitchFamily="34" charset="-120"/>
+              </a:rPr>
+              <a:t>Raise your hand  ·  paste it in the chat  ·  or hold your paper up to the camera</a:t>
             </a:r>
             <a:endParaRPr lang="en-US" sz="1700" dirty="0"/>
-          </a:p>
-        </p:txBody>
-      </p:sp>
-      <p:sp>
-        <p:nvSpPr>
-          <p:cNvPr id="5" name="Shape 3"/>
-          <p:cNvSpPr/>
-          <p:nvPr/>
-        </p:nvSpPr>
-        <p:spPr>
-          <a:xfrm>
-            <a:off x="1828800" y="2468880"/>
-            <a:ext cx="5486400" cy="1645920"/>
-          </a:xfrm>
-          <a:prstGeom prst="roundRect">
-            <a:avLst>
-              <a:gd name="adj" fmla="val 6667"/>
-            </a:avLst>
-          </a:prstGeom>
-          <a:solidFill>
-            <a:srgbClr val="FFFFFF"/>
-          </a:solidFill>
-          <a:ln/>
-          <a:effectLst>
-            <a:outerShdw sx="100000" sy="100000" kx="0" ky="0" algn="bl" rotWithShape="0" blurRad="101600" dist="38100" dir="2700000">
-              <a:srgbClr val="000000">
-                <a:alpha val="12000"/>
-              </a:srgbClr>
-            </a:outerShdw>
-          </a:effectLst>
-        </p:spPr>
-      </p:sp>
-      <p:sp>
-        <p:nvSpPr>
-          <p:cNvPr id="6" name="Text 4"/>
-          <p:cNvSpPr/>
-          <p:nvPr/>
-        </p:nvSpPr>
-        <p:spPr>
-          <a:xfrm>
-            <a:off x="2103120" y="2560320"/>
-            <a:ext cx="4937760" cy="1463040"/>
-          </a:xfrm>
-          <a:prstGeom prst="rect">
-            <a:avLst/>
-          </a:prstGeom>
-          <a:noFill/>
-          <a:ln/>
-        </p:spPr>
-        <p:txBody>
-          <a:bodyPr wrap="square" lIns="0" tIns="0" rIns="0" bIns="0" rtlCol="0" anchor="t"/>
-          <a:lstStyle/>
-          <a:p>
-            <a:pPr indent="0" marL="0">
-              <a:spcAft>
-                <a:spcPts val="200"/>
-              </a:spcAft>
-              <a:buNone/>
-            </a:pPr>
-            <a:r>
-              <a:rPr lang="en-US" sz="1400" b="1" dirty="0">
-                <a:solidFill>
-                  <a:srgbClr val="0E1C42"/>
-                </a:solidFill>
-                <a:latin typeface="Calibri" pitchFamily="34" charset="0"/>
-                <a:ea typeface="Calibri" pitchFamily="34" charset="-122"/>
-                <a:cs typeface="Calibri" pitchFamily="34" charset="-120"/>
-              </a:rPr>
-              <a:t>How to share:
-</a:t>
-            </a:r>
-            <a:pPr indent="0" marL="0">
-              <a:spcAft>
-                <a:spcPts val="200"/>
-              </a:spcAft>
-              <a:buNone/>
-            </a:pPr>
-            <a:r>
-              <a:rPr lang="en-US" sz="1300" dirty="0">
-                <a:solidFill>
-                  <a:srgbClr val="1E293B"/>
-                </a:solidFill>
-                <a:latin typeface="Calibri" pitchFamily="34" charset="0"/>
-                <a:ea typeface="Calibri" pitchFamily="34" charset="-122"/>
-                <a:cs typeface="Calibri" pitchFamily="34" charset="-120"/>
-              </a:rPr>
-              <a:t>✋ Raise your hand if you want to read yours aloud
-</a:t>
-            </a:r>
-            <a:pPr indent="0" marL="0">
-              <a:spcAft>
-                <a:spcPts val="200"/>
-              </a:spcAft>
-              <a:buNone/>
-            </a:pPr>
-            <a:r>
-              <a:rPr lang="en-US" sz="1300" dirty="0">
-                <a:solidFill>
-                  <a:srgbClr val="1E293B"/>
-                </a:solidFill>
-                <a:latin typeface="Calibri" pitchFamily="34" charset="0"/>
-                <a:ea typeface="Calibri" pitchFamily="34" charset="-122"/>
-                <a:cs typeface="Calibri" pitchFamily="34" charset="-120"/>
-              </a:rPr>
-              <a:t>💬 Or paste your writing in the chat
-</a:t>
-            </a:r>
-            <a:pPr indent="0" marL="0">
-              <a:spcAft>
-                <a:spcPts val="200"/>
-              </a:spcAft>
-              <a:buNone/>
-            </a:pPr>
-            <a:r>
-              <a:rPr lang="en-US" sz="1300" dirty="0">
-                <a:solidFill>
-                  <a:srgbClr val="1E293B"/>
-                </a:solidFill>
-                <a:latin typeface="Calibri" pitchFamily="34" charset="0"/>
-                <a:ea typeface="Calibri" pitchFamily="34" charset="-122"/>
-                <a:cs typeface="Calibri" pitchFamily="34" charset="-120"/>
-              </a:rPr>
-              <a:t>👂 Listen respectfully when others share
-</a:t>
-            </a:r>
-            <a:pPr indent="0" marL="0">
-              <a:spcAft>
-                <a:spcPts val="200"/>
-              </a:spcAft>
-              <a:buNone/>
-            </a:pPr>
-            <a:r>
-              <a:rPr lang="en-US" sz="1200" i="1" dirty="0">
-                <a:solidFill>
-                  <a:srgbClr val="64748B"/>
-                </a:solidFill>
-                <a:latin typeface="Calibri" pitchFamily="34" charset="0"/>
-                <a:ea typeface="Calibri" pitchFamily="34" charset="-122"/>
-                <a:cs typeface="Calibri" pitchFamily="34" charset="-120"/>
-              </a:rPr>
-              <a:t>Every writer's ideas matter — there are no wrong answers.</a:t>
-            </a:r>
-            <a:endParaRPr lang="en-US" sz="1400" dirty="0"/>
           </a:p>
         </p:txBody>
       </p:sp>
@@ -5722,7 +6300,7 @@
     <p:bg>
       <p:bgPr>
         <a:solidFill>
-          <a:srgbClr val="E5F7FC"/>
+          <a:srgbClr val="F8FAFC"/>
         </a:solidFill>
       </p:bgPr>
     </p:bg>
@@ -5742,30 +6320,128 @@
       </p:grpSpPr>
       <p:sp>
         <p:nvSpPr>
-          <p:cNvPr id="2" name="Text 0"/>
-          <p:cNvSpPr/>
-          <p:nvPr/>
-        </p:nvSpPr>
-        <p:spPr>
-          <a:xfrm>
-            <a:off x="365760" y="164592"/>
-            <a:ext cx="5943600" cy="566928"/>
-          </a:xfrm>
-          <a:prstGeom prst="rect">
-            <a:avLst/>
-          </a:prstGeom>
-          <a:noFill/>
-          <a:ln/>
-        </p:spPr>
-        <p:txBody>
-          <a:bodyPr wrap="square" lIns="0" tIns="0" rIns="0" bIns="0" rtlCol="0" anchor="ctr"/>
-          <a:lstStyle/>
-          <a:p>
-            <a:pPr algn="l" indent="0" marL="0">
-              <a:buNone/>
-            </a:pPr>
-            <a:r>
-              <a:rPr lang="en-US" sz="2800" b="1" dirty="0">
+          <p:cNvPr id="2" name="Shape 0"/>
+          <p:cNvSpPr/>
+          <p:nvPr/>
+        </p:nvSpPr>
+        <p:spPr>
+          <a:xfrm>
+            <a:off x="0" y="0"/>
+            <a:ext cx="9144000" cy="566928"/>
+          </a:xfrm>
+          <a:prstGeom prst="rect">
+            <a:avLst/>
+          </a:prstGeom>
+          <a:solidFill>
+            <a:srgbClr val="55C8E8"/>
+          </a:solidFill>
+          <a:ln/>
+        </p:spPr>
+      </p:sp>
+      <p:sp>
+        <p:nvSpPr>
+          <p:cNvPr id="3" name="Text 1"/>
+          <p:cNvSpPr/>
+          <p:nvPr/>
+        </p:nvSpPr>
+        <p:spPr>
+          <a:xfrm>
+            <a:off x="365760" y="54864"/>
+            <a:ext cx="8412480" cy="457200"/>
+          </a:xfrm>
+          <a:prstGeom prst="rect">
+            <a:avLst/>
+          </a:prstGeom>
+          <a:noFill/>
+          <a:ln/>
+        </p:spPr>
+        <p:txBody>
+          <a:bodyPr wrap="square" lIns="0" tIns="0" rIns="0" bIns="0" rtlCol="0" anchor="ctr"/>
+          <a:lstStyle/>
+          <a:p>
+            <a:pPr indent="0" marL="0">
+              <a:buNone/>
+            </a:pPr>
+            <a:r>
+              <a:rPr lang="en-US" sz="2200" b="1" dirty="0">
+                <a:solidFill>
+                  <a:srgbClr val="FFFFFF"/>
+                </a:solidFill>
+                <a:latin typeface="Calibri" pitchFamily="34" charset="0"/>
+                <a:ea typeface="Calibri" pitchFamily="34" charset="-122"/>
+                <a:cs typeface="Calibri" pitchFamily="34" charset="-120"/>
+              </a:rPr>
+              <a:t>📖  Today</a:t>
+            </a:r>
+            <a:endParaRPr lang="en-US" sz="2200" dirty="0"/>
+          </a:p>
+        </p:txBody>
+      </p:sp>
+      <p:sp>
+        <p:nvSpPr>
+          <p:cNvPr id="4" name="Text 2"/>
+          <p:cNvSpPr/>
+          <p:nvPr/>
+        </p:nvSpPr>
+        <p:spPr>
+          <a:xfrm>
+            <a:off x="365760" y="777240"/>
+            <a:ext cx="8229600" cy="237744"/>
+          </a:xfrm>
+          <a:prstGeom prst="rect">
+            <a:avLst/>
+          </a:prstGeom>
+          <a:noFill/>
+          <a:ln/>
+        </p:spPr>
+        <p:txBody>
+          <a:bodyPr wrap="square" lIns="0" tIns="0" rIns="0" bIns="0" rtlCol="0" anchor="ctr"/>
+          <a:lstStyle/>
+          <a:p>
+            <a:pPr indent="0" marL="0">
+              <a:buNone/>
+            </a:pPr>
+            <a:r>
+              <a:rPr lang="en-US" sz="1100" b="1" spc="100" kern="0" dirty="0">
+                <a:solidFill>
+                  <a:srgbClr val="8B6FC0"/>
+                </a:solidFill>
+                <a:latin typeface="Calibri" pitchFamily="34" charset="0"/>
+                <a:ea typeface="Calibri" pitchFamily="34" charset="-122"/>
+                <a:cs typeface="Calibri" pitchFamily="34" charset="-120"/>
+              </a:rPr>
+              <a:t>READING</a:t>
+            </a:r>
+            <a:endParaRPr lang="en-US" sz="1100" dirty="0"/>
+          </a:p>
+        </p:txBody>
+      </p:sp>
+      <p:sp>
+        <p:nvSpPr>
+          <p:cNvPr id="5" name="Text 3"/>
+          <p:cNvSpPr/>
+          <p:nvPr/>
+        </p:nvSpPr>
+        <p:spPr>
+          <a:xfrm>
+            <a:off x="365760" y="1014984"/>
+            <a:ext cx="8412480" cy="365760"/>
+          </a:xfrm>
+          <a:prstGeom prst="rect">
+            <a:avLst/>
+          </a:prstGeom>
+          <a:noFill/>
+          <a:ln/>
+        </p:spPr>
+        <p:txBody>
+          <a:bodyPr wrap="square" lIns="0" tIns="0" rIns="0" bIns="0" rtlCol="0" anchor="ctr"/>
+          <a:lstStyle/>
+          <a:p>
+            <a:pPr indent="0" marL="0">
+              <a:buNone/>
+            </a:pPr>
+            <a:r>
+              <a:rPr lang="en-US" sz="2000" b="1" dirty="0">
                 <a:solidFill>
                   <a:srgbClr val="0E1C42"/>
                 </a:solidFill>
@@ -5773,155 +6449,71 @@
                 <a:ea typeface="Calibri" pitchFamily="34" charset="-122"/>
                 <a:cs typeface="Calibri" pitchFamily="34" charset="-120"/>
               </a:rPr>
-              <a:t>💡 Today's Focus</a:t>
-            </a:r>
-            <a:endParaRPr lang="en-US" sz="2800" dirty="0"/>
-          </a:p>
-        </p:txBody>
-      </p:sp>
-      <p:sp>
-        <p:nvSpPr>
-          <p:cNvPr id="3" name="Shape 1"/>
-          <p:cNvSpPr/>
-          <p:nvPr/>
-        </p:nvSpPr>
-        <p:spPr>
-          <a:xfrm>
-            <a:off x="365760" y="749808"/>
-            <a:ext cx="8412480" cy="0"/>
-          </a:xfrm>
-          <a:prstGeom prst="line">
-            <a:avLst/>
-          </a:prstGeom>
-          <a:noFill/>
-          <a:ln w="19050">
-            <a:solidFill>
-              <a:srgbClr val="5CB85C"/>
-            </a:solidFill>
-            <a:prstDash val="solid"/>
-          </a:ln>
-        </p:spPr>
-      </p:sp>
-      <p:sp>
-        <p:nvSpPr>
-          <p:cNvPr id="4" name="Shape 2"/>
-          <p:cNvSpPr/>
-          <p:nvPr/>
-        </p:nvSpPr>
-        <p:spPr>
-          <a:xfrm>
-            <a:off x="6492240" y="173736"/>
-            <a:ext cx="2286000" cy="502920"/>
+              <a:t>Extension Text</a:t>
+            </a:r>
+            <a:endParaRPr lang="en-US" sz="2000" dirty="0"/>
+          </a:p>
+        </p:txBody>
+      </p:sp>
+      <p:sp>
+        <p:nvSpPr>
+          <p:cNvPr id="6" name="Text 4"/>
+          <p:cNvSpPr/>
+          <p:nvPr/>
+        </p:nvSpPr>
+        <p:spPr>
+          <a:xfrm>
+            <a:off x="365760" y="1508760"/>
+            <a:ext cx="8229600" cy="237744"/>
+          </a:xfrm>
+          <a:prstGeom prst="rect">
+            <a:avLst/>
+          </a:prstGeom>
+          <a:noFill/>
+          <a:ln/>
+        </p:spPr>
+        <p:txBody>
+          <a:bodyPr wrap="square" lIns="0" tIns="0" rIns="0" bIns="0" rtlCol="0" anchor="ctr"/>
+          <a:lstStyle/>
+          <a:p>
+            <a:pPr indent="0" marL="0">
+              <a:buNone/>
+            </a:pPr>
+            <a:r>
+              <a:rPr lang="en-US" sz="1100" b="1" spc="100" kern="0" dirty="0">
+                <a:solidFill>
+                  <a:srgbClr val="C7922C"/>
+                </a:solidFill>
+                <a:latin typeface="Calibri" pitchFamily="34" charset="0"/>
+                <a:ea typeface="Calibri" pitchFamily="34" charset="-122"/>
+                <a:cs typeface="Calibri" pitchFamily="34" charset="-120"/>
+              </a:rPr>
+              <a:t>BIG QUESTION</a:t>
+            </a:r>
+            <a:endParaRPr lang="en-US" sz="1100" dirty="0"/>
+          </a:p>
+        </p:txBody>
+      </p:sp>
+      <p:sp>
+        <p:nvSpPr>
+          <p:cNvPr id="7" name="Shape 5"/>
+          <p:cNvSpPr/>
+          <p:nvPr/>
+        </p:nvSpPr>
+        <p:spPr>
+          <a:xfrm>
+            <a:off x="365760" y="1746504"/>
+            <a:ext cx="8412480" cy="731520"/>
           </a:xfrm>
           <a:prstGeom prst="roundRect">
             <a:avLst>
-              <a:gd name="adj" fmla="val 21818"/>
-            </a:avLst>
-          </a:prstGeom>
-          <a:solidFill>
-            <a:srgbClr val="5CB85C"/>
-          </a:solidFill>
-          <a:ln/>
-        </p:spPr>
-      </p:sp>
-      <p:sp>
-        <p:nvSpPr>
-          <p:cNvPr id="5" name="Text 3"/>
-          <p:cNvSpPr/>
-          <p:nvPr/>
-        </p:nvSpPr>
-        <p:spPr>
-          <a:xfrm>
-            <a:off x="6492240" y="173736"/>
-            <a:ext cx="2286000" cy="502920"/>
-          </a:xfrm>
-          <a:prstGeom prst="rect">
-            <a:avLst/>
-          </a:prstGeom>
-          <a:noFill/>
-          <a:ln/>
-        </p:spPr>
-        <p:txBody>
-          <a:bodyPr wrap="square" lIns="0" tIns="0" rIns="0" bIns="0" rtlCol="0" anchor="ctr"/>
-          <a:lstStyle/>
-          <a:p>
-            <a:pPr algn="ctr" indent="0" marL="0">
-              <a:buNone/>
-            </a:pPr>
-            <a:r>
-              <a:rPr lang="en-US" sz="1100" b="1" dirty="0">
-                <a:solidFill>
-                  <a:srgbClr val="0E1C42"/>
-                </a:solidFill>
-                <a:latin typeface="Calibri" pitchFamily="34" charset="0"/>
-                <a:ea typeface="Calibri" pitchFamily="34" charset="-122"/>
-                <a:cs typeface="Calibri" pitchFamily="34" charset="-120"/>
-              </a:rPr>
-              <a:t>CHAT PROMPT</a:t>
-            </a:r>
-            <a:endParaRPr lang="en-US" sz="1100" dirty="0"/>
-          </a:p>
-        </p:txBody>
-      </p:sp>
-      <p:sp>
-        <p:nvSpPr>
-          <p:cNvPr id="6" name="Text 4"/>
-          <p:cNvSpPr/>
-          <p:nvPr/>
-        </p:nvSpPr>
-        <p:spPr>
-          <a:xfrm>
-            <a:off x="457200" y="914400"/>
-            <a:ext cx="8046720" cy="292608"/>
-          </a:xfrm>
-          <a:prstGeom prst="rect">
-            <a:avLst/>
-          </a:prstGeom>
-          <a:noFill/>
-          <a:ln/>
-        </p:spPr>
-        <p:txBody>
-          <a:bodyPr wrap="square" lIns="0" tIns="0" rIns="0" bIns="0" rtlCol="0" anchor="ctr"/>
-          <a:lstStyle/>
-          <a:p>
-            <a:pPr indent="0" marL="0">
-              <a:buNone/>
-            </a:pPr>
-            <a:r>
-              <a:rPr lang="en-US" sz="1100" b="1" spc="200" kern="0" dirty="0">
-                <a:solidFill>
-                  <a:srgbClr val="C7922C"/>
-                </a:solidFill>
-                <a:latin typeface="Calibri" pitchFamily="34" charset="0"/>
-                <a:ea typeface="Calibri" pitchFamily="34" charset="-122"/>
-                <a:cs typeface="Calibri" pitchFamily="34" charset="-120"/>
-              </a:rPr>
-              <a:t>BIG QUESTION</a:t>
-            </a:r>
-            <a:endParaRPr lang="en-US" sz="1100" dirty="0"/>
-          </a:p>
-        </p:txBody>
-      </p:sp>
-      <p:sp>
-        <p:nvSpPr>
-          <p:cNvPr id="7" name="Shape 5"/>
-          <p:cNvSpPr/>
-          <p:nvPr/>
-        </p:nvSpPr>
-        <p:spPr>
-          <a:xfrm>
-            <a:off x="457200" y="1234440"/>
-            <a:ext cx="8229600" cy="640080"/>
-          </a:xfrm>
-          <a:prstGeom prst="roundRect">
-            <a:avLst>
-              <a:gd name="adj" fmla="val 14286"/>
+              <a:gd name="adj" fmla="val 12500"/>
             </a:avLst>
           </a:prstGeom>
           <a:solidFill>
             <a:srgbClr val="FEF6E8"/>
           </a:solidFill>
-          <a:ln w="12700">
+          <a:ln w="19050">
             <a:solidFill>
               <a:srgbClr val="C7922C"/>
             </a:solidFill>
@@ -5944,24 +6536,24 @@
         </p:nvSpPr>
         <p:spPr>
           <a:xfrm>
-            <a:off x="640080" y="1344168"/>
-            <a:ext cx="7863840" cy="411480"/>
-          </a:xfrm>
-          <a:prstGeom prst="rect">
-            <a:avLst/>
-          </a:prstGeom>
-          <a:noFill/>
-          <a:ln/>
-        </p:spPr>
-        <p:txBody>
-          <a:bodyPr wrap="square" lIns="0" tIns="0" rIns="0" bIns="0" rtlCol="0" anchor="ctr"/>
-          <a:lstStyle/>
-          <a:p>
-            <a:pPr indent="0" marL="0">
-              <a:buNone/>
-            </a:pPr>
-            <a:r>
-              <a:rPr lang="en-US" sz="1800" i="1" dirty="0">
+            <a:off x="594360" y="1874520"/>
+            <a:ext cx="7955280" cy="475488"/>
+          </a:xfrm>
+          <a:prstGeom prst="rect">
+            <a:avLst/>
+          </a:prstGeom>
+          <a:noFill/>
+          <a:ln/>
+        </p:spPr>
+        <p:txBody>
+          <a:bodyPr wrap="square" lIns="0" tIns="0" rIns="0" bIns="0" rtlCol="0" anchor="ctr"/>
+          <a:lstStyle/>
+          <a:p>
+            <a:pPr indent="0" marL="0">
+              <a:buNone/>
+            </a:pPr>
+            <a:r>
+              <a:rPr lang="en-US" sz="1700" dirty="0">
                 <a:solidFill>
                   <a:srgbClr val="1E293B"/>
                 </a:solidFill>
@@ -5969,9 +6561,87 @@
                 <a:ea typeface="Calibri" pitchFamily="34" charset="-122"/>
                 <a:cs typeface="Calibri" pitchFamily="34" charset="-120"/>
               </a:rPr>
-              <a:t>In the story, the museum has a most expensive painting in the world. What makes art valuable in real life?</a:t>
-            </a:r>
-            <a:endParaRPr lang="en-US" sz="1800" dirty="0"/>
+              <a:t>Today you’ll compare the story’s Famous Museum with real museums. What do you already know about museums? How might a real museum be different from the one in the story?</a:t>
+            </a:r>
+            <a:endParaRPr lang="en-US" sz="1700" dirty="0"/>
+          </a:p>
+        </p:txBody>
+      </p:sp>
+      <p:sp>
+        <p:nvSpPr>
+          <p:cNvPr id="9" name="Text 7"/>
+          <p:cNvSpPr/>
+          <p:nvPr/>
+        </p:nvSpPr>
+        <p:spPr>
+          <a:xfrm>
+            <a:off x="365760" y="2606040"/>
+            <a:ext cx="8229600" cy="237744"/>
+          </a:xfrm>
+          <a:prstGeom prst="rect">
+            <a:avLst/>
+          </a:prstGeom>
+          <a:noFill/>
+          <a:ln/>
+        </p:spPr>
+        <p:txBody>
+          <a:bodyPr wrap="square" lIns="0" tIns="0" rIns="0" bIns="0" rtlCol="0" anchor="ctr"/>
+          <a:lstStyle/>
+          <a:p>
+            <a:pPr indent="0" marL="0">
+              <a:buNone/>
+            </a:pPr>
+            <a:r>
+              <a:rPr lang="en-US" sz="1100" b="1" spc="100" kern="0" dirty="0">
+                <a:solidFill>
+                  <a:srgbClr val="55C8E8"/>
+                </a:solidFill>
+                <a:latin typeface="Calibri" pitchFamily="34" charset="0"/>
+                <a:ea typeface="Calibri" pitchFamily="34" charset="-122"/>
+                <a:cs typeface="Calibri" pitchFamily="34" charset="-120"/>
+              </a:rPr>
+              <a:t>READING LENS</a:t>
+            </a:r>
+            <a:endParaRPr lang="en-US" sz="1100" dirty="0"/>
+          </a:p>
+        </p:txBody>
+      </p:sp>
+      <p:sp>
+        <p:nvSpPr>
+          <p:cNvPr id="10" name="Text 8"/>
+          <p:cNvSpPr/>
+          <p:nvPr/>
+        </p:nvSpPr>
+        <p:spPr>
+          <a:xfrm>
+            <a:off x="365760" y="2843784"/>
+            <a:ext cx="8412480" cy="914400"/>
+          </a:xfrm>
+          <a:prstGeom prst="rect">
+            <a:avLst/>
+          </a:prstGeom>
+          <a:noFill/>
+          <a:ln/>
+        </p:spPr>
+        <p:txBody>
+          <a:bodyPr wrap="square" lIns="0" tIns="0" rIns="0" bIns="0" rtlCol="0" anchor="ctr"/>
+          <a:lstStyle/>
+          <a:p>
+            <a:pPr indent="0" marL="0">
+              <a:buNone/>
+            </a:pPr>
+            <a:r>
+              <a:rPr lang="en-US" sz="1500" dirty="0">
+                <a:solidFill>
+                  <a:srgbClr val="1E293B"/>
+                </a:solidFill>
+                <a:latin typeface="Calibri" pitchFamily="34" charset="0"/>
+                <a:ea typeface="Calibri" pitchFamily="34" charset="-122"/>
+                <a:cs typeface="Calibri" pitchFamily="34" charset="-120"/>
+              </a:rPr>
+              <a:t>Good readers compare a story with related informational text . When you read a made-up story and a real article about the same topic, you can find what is the same and what is different.</a:t>
+            </a:r>
+            <a:endParaRPr lang="en-US" sz="1500" dirty="0"/>
           </a:p>
         </p:txBody>
       </p:sp>
@@ -5986,6 +6656,749 @@
 <file path=ppt/slides/slide7.xml><?xml version="1.0" encoding="utf-8"?>
 <p:sld xmlns:a="http://schemas.openxmlformats.org/drawingml/2006/main" xmlns:r="http://schemas.openxmlformats.org/officeDocument/2006/relationships" xmlns:p="http://schemas.openxmlformats.org/presentationml/2006/main">
   <p:cSld name="Slide 7">
+    <p:bg>
+      <p:bgPr>
+        <a:solidFill>
+          <a:srgbClr val="F8FAFC"/>
+        </a:solidFill>
+      </p:bgPr>
+    </p:bg>
+    <p:spTree>
+      <p:nvGrpSpPr>
+        <p:cNvPr id="1" name=""/>
+        <p:cNvGrpSpPr/>
+        <p:nvPr/>
+      </p:nvGrpSpPr>
+      <p:grpSpPr>
+        <a:xfrm>
+          <a:off x="0" y="0"/>
+          <a:ext cx="0" cy="0"/>
+          <a:chOff x="0" y="0"/>
+          <a:chExt cx="0" cy="0"/>
+        </a:xfrm>
+      </p:grpSpPr>
+      <p:sp>
+        <p:nvSpPr>
+          <p:cNvPr id="2" name="Shape 0"/>
+          <p:cNvSpPr/>
+          <p:nvPr/>
+        </p:nvSpPr>
+        <p:spPr>
+          <a:xfrm>
+            <a:off x="0" y="0"/>
+            <a:ext cx="9144000" cy="566928"/>
+          </a:xfrm>
+          <a:prstGeom prst="rect">
+            <a:avLst/>
+          </a:prstGeom>
+          <a:solidFill>
+            <a:srgbClr val="55C8E8"/>
+          </a:solidFill>
+          <a:ln/>
+        </p:spPr>
+      </p:sp>
+      <p:sp>
+        <p:nvSpPr>
+          <p:cNvPr id="3" name="Text 1"/>
+          <p:cNvSpPr/>
+          <p:nvPr/>
+        </p:nvSpPr>
+        <p:spPr>
+          <a:xfrm>
+            <a:off x="365760" y="54864"/>
+            <a:ext cx="8412480" cy="457200"/>
+          </a:xfrm>
+          <a:prstGeom prst="rect">
+            <a:avLst/>
+          </a:prstGeom>
+          <a:noFill/>
+          <a:ln/>
+        </p:spPr>
+        <p:txBody>
+          <a:bodyPr wrap="square" lIns="0" tIns="0" rIns="0" bIns="0" rtlCol="0" anchor="ctr"/>
+          <a:lstStyle/>
+          <a:p>
+            <a:pPr indent="0" marL="0">
+              <a:buNone/>
+            </a:pPr>
+            <a:r>
+              <a:rPr lang="en-US" sz="2200" b="1" dirty="0">
+                <a:solidFill>
+                  <a:srgbClr val="FFFFFF"/>
+                </a:solidFill>
+                <a:latin typeface="Calibri" pitchFamily="34" charset="0"/>
+                <a:ea typeface="Calibri" pitchFamily="34" charset="-122"/>
+                <a:cs typeface="Calibri" pitchFamily="34" charset="-120"/>
+              </a:rPr>
+              <a:t>✏️  Daily Oral Language</a:t>
+            </a:r>
+            <a:endParaRPr lang="en-US" sz="2200" dirty="0"/>
+          </a:p>
+        </p:txBody>
+      </p:sp>
+      <p:sp>
+        <p:nvSpPr>
+          <p:cNvPr id="4" name="Text 2"/>
+          <p:cNvSpPr/>
+          <p:nvPr/>
+        </p:nvSpPr>
+        <p:spPr>
+          <a:xfrm>
+            <a:off x="365760" y="749808"/>
+            <a:ext cx="8229600" cy="237744"/>
+          </a:xfrm>
+          <a:prstGeom prst="rect">
+            <a:avLst/>
+          </a:prstGeom>
+          <a:noFill/>
+          <a:ln/>
+        </p:spPr>
+        <p:txBody>
+          <a:bodyPr wrap="square" lIns="0" tIns="0" rIns="0" bIns="0" rtlCol="0" anchor="ctr"/>
+          <a:lstStyle/>
+          <a:p>
+            <a:pPr indent="0" marL="0">
+              <a:buNone/>
+            </a:pPr>
+            <a:r>
+              <a:rPr lang="en-US" sz="1100" b="1" spc="100" kern="0" dirty="0">
+                <a:solidFill>
+                  <a:srgbClr val="55C8E8"/>
+                </a:solidFill>
+                <a:latin typeface="Calibri" pitchFamily="34" charset="0"/>
+                <a:ea typeface="Calibri" pitchFamily="34" charset="-122"/>
+                <a:cs typeface="Calibri" pitchFamily="34" charset="-120"/>
+              </a:rPr>
+              <a:t>FIX THESE SENTENCES</a:t>
+            </a:r>
+            <a:endParaRPr lang="en-US" sz="1100" dirty="0"/>
+          </a:p>
+        </p:txBody>
+      </p:sp>
+      <p:sp>
+        <p:nvSpPr>
+          <p:cNvPr id="5" name="Shape 3"/>
+          <p:cNvSpPr/>
+          <p:nvPr/>
+        </p:nvSpPr>
+        <p:spPr>
+          <a:xfrm>
+            <a:off x="365760" y="1024128"/>
+            <a:ext cx="8412480" cy="777240"/>
+          </a:xfrm>
+          <a:prstGeom prst="roundRect">
+            <a:avLst>
+              <a:gd name="adj" fmla="val 11765"/>
+            </a:avLst>
+          </a:prstGeom>
+          <a:solidFill>
+            <a:srgbClr val="FFFFFF"/>
+          </a:solidFill>
+          <a:ln w="19050">
+            <a:solidFill>
+              <a:srgbClr val="55C8E8"/>
+            </a:solidFill>
+            <a:prstDash val="solid"/>
+          </a:ln>
+          <a:effectLst>
+            <a:outerShdw sx="100000" sy="100000" kx="0" ky="0" algn="bl" rotWithShape="0" blurRad="101600" dist="38100" dir="2700000">
+              <a:srgbClr val="000000">
+                <a:alpha val="12000"/>
+              </a:srgbClr>
+            </a:outerShdw>
+          </a:effectLst>
+        </p:spPr>
+      </p:sp>
+      <p:sp>
+        <p:nvSpPr>
+          <p:cNvPr id="6" name="Text 4"/>
+          <p:cNvSpPr/>
+          <p:nvPr/>
+        </p:nvSpPr>
+        <p:spPr>
+          <a:xfrm>
+            <a:off x="594360" y="1152144"/>
+            <a:ext cx="7955280" cy="521208"/>
+          </a:xfrm>
+          <a:prstGeom prst="rect">
+            <a:avLst/>
+          </a:prstGeom>
+          <a:noFill/>
+          <a:ln/>
+        </p:spPr>
+        <p:txBody>
+          <a:bodyPr wrap="square" lIns="0" tIns="0" rIns="0" bIns="0" rtlCol="0" anchor="ctr"/>
+          <a:lstStyle/>
+          <a:p>
+            <a:pPr indent="0" marL="0">
+              <a:buNone/>
+            </a:pPr>
+            <a:r>
+              <a:rPr lang="en-US" sz="1700" dirty="0">
+                <a:solidFill>
+                  <a:srgbClr val="1E293B"/>
+                </a:solidFill>
+                <a:latin typeface="Calibri" pitchFamily="34" charset="0"/>
+                <a:ea typeface="Calibri" pitchFamily="34" charset="-122"/>
+                <a:cs typeface="Calibri" pitchFamily="34" charset="-120"/>
+              </a:rPr>
+              <a:t>Mr. Dart took him into the main hall, where the biggest and most important paintings were hung.</a:t>
+            </a:r>
+            <a:endParaRPr lang="en-US" sz="1700" dirty="0"/>
+          </a:p>
+        </p:txBody>
+      </p:sp>
+      <p:sp>
+        <p:nvSpPr>
+          <p:cNvPr id="7" name="Shape 5"/>
+          <p:cNvSpPr/>
+          <p:nvPr/>
+        </p:nvSpPr>
+        <p:spPr>
+          <a:xfrm>
+            <a:off x="365760" y="1874520"/>
+            <a:ext cx="8412480" cy="777240"/>
+          </a:xfrm>
+          <a:prstGeom prst="roundRect">
+            <a:avLst>
+              <a:gd name="adj" fmla="val 11765"/>
+            </a:avLst>
+          </a:prstGeom>
+          <a:solidFill>
+            <a:srgbClr val="FFFFFF"/>
+          </a:solidFill>
+          <a:ln w="19050">
+            <a:solidFill>
+              <a:srgbClr val="55C8E8"/>
+            </a:solidFill>
+            <a:prstDash val="solid"/>
+          </a:ln>
+          <a:effectLst>
+            <a:outerShdw sx="100000" sy="100000" kx="0" ky="0" algn="bl" rotWithShape="0" blurRad="101600" dist="38100" dir="2700000">
+              <a:srgbClr val="000000">
+                <a:alpha val="12000"/>
+              </a:srgbClr>
+            </a:outerShdw>
+          </a:effectLst>
+        </p:spPr>
+      </p:sp>
+      <p:sp>
+        <p:nvSpPr>
+          <p:cNvPr id="8" name="Text 6"/>
+          <p:cNvSpPr/>
+          <p:nvPr/>
+        </p:nvSpPr>
+        <p:spPr>
+          <a:xfrm>
+            <a:off x="594360" y="2002536"/>
+            <a:ext cx="7955280" cy="521208"/>
+          </a:xfrm>
+          <a:prstGeom prst="rect">
+            <a:avLst/>
+          </a:prstGeom>
+          <a:noFill/>
+          <a:ln/>
+        </p:spPr>
+        <p:txBody>
+          <a:bodyPr wrap="square" lIns="0" tIns="0" rIns="0" bIns="0" rtlCol="0" anchor="ctr"/>
+          <a:lstStyle/>
+          <a:p>
+            <a:pPr indent="0" marL="0">
+              <a:buNone/>
+            </a:pPr>
+            <a:r>
+              <a:rPr lang="en-US" sz="1700" dirty="0">
+                <a:solidFill>
+                  <a:srgbClr val="1E293B"/>
+                </a:solidFill>
+                <a:latin typeface="Calibri" pitchFamily="34" charset="0"/>
+                <a:ea typeface="Calibri" pitchFamily="34" charset="-122"/>
+                <a:cs typeface="Calibri" pitchFamily="34" charset="-120"/>
+              </a:rPr>
+              <a:t>the famous museum of art had been losing paintings and mr dart the director was terribly upset</a:t>
+            </a:r>
+            <a:endParaRPr lang="en-US" sz="1700" dirty="0"/>
+          </a:p>
+        </p:txBody>
+      </p:sp>
+      <p:sp>
+        <p:nvSpPr>
+          <p:cNvPr id="9" name="Text 7"/>
+          <p:cNvSpPr/>
+          <p:nvPr/>
+        </p:nvSpPr>
+        <p:spPr>
+          <a:xfrm>
+            <a:off x="365760" y="2788920"/>
+            <a:ext cx="8412480" cy="365760"/>
+          </a:xfrm>
+          <a:prstGeom prst="rect">
+            <a:avLst/>
+          </a:prstGeom>
+          <a:noFill/>
+          <a:ln/>
+        </p:spPr>
+        <p:txBody>
+          <a:bodyPr wrap="square" lIns="0" tIns="0" rIns="0" bIns="0" rtlCol="0" anchor="ctr"/>
+          <a:lstStyle/>
+          <a:p>
+            <a:pPr indent="0" marL="0">
+              <a:buNone/>
+            </a:pPr>
+            <a:r>
+              <a:rPr lang="en-US" sz="1600" b="1" dirty="0">
+                <a:solidFill>
+                  <a:srgbClr val="0E1C42"/>
+                </a:solidFill>
+                <a:latin typeface="Calibri" pitchFamily="34" charset="0"/>
+                <a:ea typeface="Calibri" pitchFamily="34" charset="-122"/>
+                <a:cs typeface="Calibri" pitchFamily="34" charset="-120"/>
+              </a:rPr>
+              <a:t>Rewrite both sentences correctly in your notebook.</a:t>
+            </a:r>
+            <a:endParaRPr lang="en-US" sz="1600" dirty="0"/>
+          </a:p>
+        </p:txBody>
+      </p:sp>
+    </p:spTree>
+  </p:cSld>
+  <p:clrMapOvr>
+    <a:masterClrMapping/>
+  </p:clrMapOvr>
+</p:sld>
+</file>
+
+<file path=ppt/slides/slide8.xml><?xml version="1.0" encoding="utf-8"?>
+<p:sld xmlns:a="http://schemas.openxmlformats.org/drawingml/2006/main" xmlns:r="http://schemas.openxmlformats.org/officeDocument/2006/relationships" xmlns:p="http://schemas.openxmlformats.org/presentationml/2006/main">
+  <p:cSld name="Slide 8">
+    <p:bg>
+      <p:bgPr>
+        <a:solidFill>
+          <a:srgbClr val="F8FAFC"/>
+        </a:solidFill>
+      </p:bgPr>
+    </p:bg>
+    <p:spTree>
+      <p:nvGrpSpPr>
+        <p:cNvPr id="1" name=""/>
+        <p:cNvGrpSpPr/>
+        <p:nvPr/>
+      </p:nvGrpSpPr>
+      <p:grpSpPr>
+        <a:xfrm>
+          <a:off x="0" y="0"/>
+          <a:ext cx="0" cy="0"/>
+          <a:chOff x="0" y="0"/>
+          <a:chExt cx="0" cy="0"/>
+        </a:xfrm>
+      </p:grpSpPr>
+      <p:sp>
+        <p:nvSpPr>
+          <p:cNvPr id="2" name="Shape 0"/>
+          <p:cNvSpPr/>
+          <p:nvPr/>
+        </p:nvSpPr>
+        <p:spPr>
+          <a:xfrm>
+            <a:off x="0" y="0"/>
+            <a:ext cx="9144000" cy="566928"/>
+          </a:xfrm>
+          <a:prstGeom prst="rect">
+            <a:avLst/>
+          </a:prstGeom>
+          <a:solidFill>
+            <a:srgbClr val="55C8E8"/>
+          </a:solidFill>
+          <a:ln/>
+        </p:spPr>
+      </p:sp>
+      <p:sp>
+        <p:nvSpPr>
+          <p:cNvPr id="3" name="Text 1"/>
+          <p:cNvSpPr/>
+          <p:nvPr/>
+        </p:nvSpPr>
+        <p:spPr>
+          <a:xfrm>
+            <a:off x="365760" y="54864"/>
+            <a:ext cx="8412480" cy="457200"/>
+          </a:xfrm>
+          <a:prstGeom prst="rect">
+            <a:avLst/>
+          </a:prstGeom>
+          <a:noFill/>
+          <a:ln/>
+        </p:spPr>
+        <p:txBody>
+          <a:bodyPr wrap="square" lIns="0" tIns="0" rIns="0" bIns="0" rtlCol="0" anchor="ctr"/>
+          <a:lstStyle/>
+          <a:p>
+            <a:pPr indent="0" marL="0">
+              <a:buNone/>
+            </a:pPr>
+            <a:r>
+              <a:rPr lang="en-US" sz="2200" b="1" dirty="0">
+                <a:solidFill>
+                  <a:srgbClr val="FFFFFF"/>
+                </a:solidFill>
+                <a:latin typeface="Calibri" pitchFamily="34" charset="0"/>
+                <a:ea typeface="Calibri" pitchFamily="34" charset="-122"/>
+                <a:cs typeface="Calibri" pitchFamily="34" charset="-120"/>
+              </a:rPr>
+              <a:t>✏️  Daily Oral Language</a:t>
+            </a:r>
+            <a:endParaRPr lang="en-US" sz="2200" dirty="0"/>
+          </a:p>
+        </p:txBody>
+      </p:sp>
+      <p:sp>
+        <p:nvSpPr>
+          <p:cNvPr id="4" name="Text 2"/>
+          <p:cNvSpPr/>
+          <p:nvPr/>
+        </p:nvSpPr>
+        <p:spPr>
+          <a:xfrm>
+            <a:off x="365760" y="749808"/>
+            <a:ext cx="8229600" cy="237744"/>
+          </a:xfrm>
+          <a:prstGeom prst="rect">
+            <a:avLst/>
+          </a:prstGeom>
+          <a:noFill/>
+          <a:ln/>
+        </p:spPr>
+        <p:txBody>
+          <a:bodyPr wrap="square" lIns="0" tIns="0" rIns="0" bIns="0" rtlCol="0" anchor="ctr"/>
+          <a:lstStyle/>
+          <a:p>
+            <a:pPr indent="0" marL="0">
+              <a:buNone/>
+            </a:pPr>
+            <a:r>
+              <a:rPr lang="en-US" sz="1100" b="1" spc="100" kern="0" dirty="0">
+                <a:solidFill>
+                  <a:srgbClr val="55C8E8"/>
+                </a:solidFill>
+                <a:latin typeface="Calibri" pitchFamily="34" charset="0"/>
+                <a:ea typeface="Calibri" pitchFamily="34" charset="-122"/>
+                <a:cs typeface="Calibri" pitchFamily="34" charset="-120"/>
+              </a:rPr>
+              <a:t>FIX THESE SENTENCES</a:t>
+            </a:r>
+            <a:endParaRPr lang="en-US" sz="1100" dirty="0"/>
+          </a:p>
+        </p:txBody>
+      </p:sp>
+      <p:sp>
+        <p:nvSpPr>
+          <p:cNvPr id="5" name="Shape 3"/>
+          <p:cNvSpPr/>
+          <p:nvPr/>
+        </p:nvSpPr>
+        <p:spPr>
+          <a:xfrm>
+            <a:off x="365760" y="1024128"/>
+            <a:ext cx="8412480" cy="777240"/>
+          </a:xfrm>
+          <a:prstGeom prst="roundRect">
+            <a:avLst>
+              <a:gd name="adj" fmla="val 11765"/>
+            </a:avLst>
+          </a:prstGeom>
+          <a:solidFill>
+            <a:srgbClr val="FFFFFF"/>
+          </a:solidFill>
+          <a:ln w="19050">
+            <a:solidFill>
+              <a:srgbClr val="55C8E8"/>
+            </a:solidFill>
+            <a:prstDash val="solid"/>
+          </a:ln>
+          <a:effectLst>
+            <a:outerShdw sx="100000" sy="100000" kx="0" ky="0" algn="bl" rotWithShape="0" blurRad="101600" dist="38100" dir="2700000">
+              <a:srgbClr val="000000">
+                <a:alpha val="12000"/>
+              </a:srgbClr>
+            </a:outerShdw>
+          </a:effectLst>
+        </p:spPr>
+      </p:sp>
+      <p:sp>
+        <p:nvSpPr>
+          <p:cNvPr id="6" name="Text 4"/>
+          <p:cNvSpPr/>
+          <p:nvPr/>
+        </p:nvSpPr>
+        <p:spPr>
+          <a:xfrm>
+            <a:off x="594360" y="1152144"/>
+            <a:ext cx="7955280" cy="521208"/>
+          </a:xfrm>
+          <a:prstGeom prst="rect">
+            <a:avLst/>
+          </a:prstGeom>
+          <a:noFill/>
+          <a:ln/>
+        </p:spPr>
+        <p:txBody>
+          <a:bodyPr wrap="square" lIns="0" tIns="0" rIns="0" bIns="0" rtlCol="0" anchor="ctr"/>
+          <a:lstStyle/>
+          <a:p>
+            <a:pPr indent="0" marL="0">
+              <a:buNone/>
+            </a:pPr>
+            <a:r>
+              <a:rPr lang="en-US" sz="1700" dirty="0">
+                <a:solidFill>
+                  <a:srgbClr val="1E293B"/>
+                </a:solidFill>
+                <a:latin typeface="Calibri" pitchFamily="34" charset="0"/>
+                <a:ea typeface="Calibri" pitchFamily="34" charset="-122"/>
+                <a:cs typeface="Calibri" pitchFamily="34" charset="-120"/>
+              </a:rPr>
+              <a:t>Mr. Dart took him into the main hall, where the biggest and most important paintings were hung.</a:t>
+            </a:r>
+            <a:endParaRPr lang="en-US" sz="1700" dirty="0"/>
+          </a:p>
+        </p:txBody>
+      </p:sp>
+      <p:sp>
+        <p:nvSpPr>
+          <p:cNvPr id="7" name="Shape 5"/>
+          <p:cNvSpPr/>
+          <p:nvPr/>
+        </p:nvSpPr>
+        <p:spPr>
+          <a:xfrm>
+            <a:off x="365760" y="1874520"/>
+            <a:ext cx="8412480" cy="777240"/>
+          </a:xfrm>
+          <a:prstGeom prst="roundRect">
+            <a:avLst>
+              <a:gd name="adj" fmla="val 11765"/>
+            </a:avLst>
+          </a:prstGeom>
+          <a:solidFill>
+            <a:srgbClr val="FFFFFF"/>
+          </a:solidFill>
+          <a:ln w="19050">
+            <a:solidFill>
+              <a:srgbClr val="55C8E8"/>
+            </a:solidFill>
+            <a:prstDash val="solid"/>
+          </a:ln>
+          <a:effectLst>
+            <a:outerShdw sx="100000" sy="100000" kx="0" ky="0" algn="bl" rotWithShape="0" blurRad="101600" dist="38100" dir="2700000">
+              <a:srgbClr val="000000">
+                <a:alpha val="12000"/>
+              </a:srgbClr>
+            </a:outerShdw>
+          </a:effectLst>
+        </p:spPr>
+      </p:sp>
+      <p:sp>
+        <p:nvSpPr>
+          <p:cNvPr id="8" name="Text 6"/>
+          <p:cNvSpPr/>
+          <p:nvPr/>
+        </p:nvSpPr>
+        <p:spPr>
+          <a:xfrm>
+            <a:off x="594360" y="2002536"/>
+            <a:ext cx="7955280" cy="521208"/>
+          </a:xfrm>
+          <a:prstGeom prst="rect">
+            <a:avLst/>
+          </a:prstGeom>
+          <a:noFill/>
+          <a:ln/>
+        </p:spPr>
+        <p:txBody>
+          <a:bodyPr wrap="square" lIns="0" tIns="0" rIns="0" bIns="0" rtlCol="0" anchor="ctr"/>
+          <a:lstStyle/>
+          <a:p>
+            <a:pPr indent="0" marL="0">
+              <a:buNone/>
+            </a:pPr>
+            <a:r>
+              <a:rPr lang="en-US" sz="1700" dirty="0">
+                <a:solidFill>
+                  <a:srgbClr val="1E293B"/>
+                </a:solidFill>
+                <a:latin typeface="Calibri" pitchFamily="34" charset="0"/>
+                <a:ea typeface="Calibri" pitchFamily="34" charset="-122"/>
+                <a:cs typeface="Calibri" pitchFamily="34" charset="-120"/>
+              </a:rPr>
+              <a:t>the famous museum of art had been losing paintings and mr dart the director was terribly upset</a:t>
+            </a:r>
+            <a:endParaRPr lang="en-US" sz="1700" dirty="0"/>
+          </a:p>
+        </p:txBody>
+      </p:sp>
+      <p:sp>
+        <p:nvSpPr>
+          <p:cNvPr id="9" name="Shape 7"/>
+          <p:cNvSpPr/>
+          <p:nvPr/>
+        </p:nvSpPr>
+        <p:spPr>
+          <a:xfrm>
+            <a:off x="365760" y="2743200"/>
+            <a:ext cx="8412480" cy="1417320"/>
+          </a:xfrm>
+          <a:prstGeom prst="roundRect">
+            <a:avLst>
+              <a:gd name="adj" fmla="val 6452"/>
+            </a:avLst>
+          </a:prstGeom>
+          <a:solidFill>
+            <a:srgbClr val="E8F8EF"/>
+          </a:solidFill>
+          <a:ln/>
+          <a:effectLst>
+            <a:outerShdw sx="100000" sy="100000" kx="0" ky="0" algn="bl" rotWithShape="0" blurRad="101600" dist="38100" dir="2700000">
+              <a:srgbClr val="000000">
+                <a:alpha val="12000"/>
+              </a:srgbClr>
+            </a:outerShdw>
+          </a:effectLst>
+        </p:spPr>
+      </p:sp>
+      <p:sp>
+        <p:nvSpPr>
+          <p:cNvPr id="10" name="Text 8"/>
+          <p:cNvSpPr/>
+          <p:nvPr/>
+        </p:nvSpPr>
+        <p:spPr>
+          <a:xfrm>
+            <a:off x="566928" y="2816352"/>
+            <a:ext cx="8229600" cy="237744"/>
+          </a:xfrm>
+          <a:prstGeom prst="rect">
+            <a:avLst/>
+          </a:prstGeom>
+          <a:noFill/>
+          <a:ln/>
+        </p:spPr>
+        <p:txBody>
+          <a:bodyPr wrap="square" lIns="0" tIns="0" rIns="0" bIns="0" rtlCol="0" anchor="ctr"/>
+          <a:lstStyle/>
+          <a:p>
+            <a:pPr indent="0" marL="0">
+              <a:buNone/>
+            </a:pPr>
+            <a:r>
+              <a:rPr lang="en-US" sz="1100" b="1" spc="100" kern="0" dirty="0">
+                <a:solidFill>
+                  <a:srgbClr val="34B76F"/>
+                </a:solidFill>
+                <a:latin typeface="Calibri" pitchFamily="34" charset="0"/>
+                <a:ea typeface="Calibri" pitchFamily="34" charset="-122"/>
+                <a:cs typeface="Calibri" pitchFamily="34" charset="-120"/>
+              </a:rPr>
+              <a:t>✅  CORRECTED</a:t>
+            </a:r>
+            <a:endParaRPr lang="en-US" sz="1100" dirty="0"/>
+          </a:p>
+        </p:txBody>
+      </p:sp>
+      <p:sp>
+        <p:nvSpPr>
+          <p:cNvPr id="11" name="Text 9"/>
+          <p:cNvSpPr/>
+          <p:nvPr/>
+        </p:nvSpPr>
+        <p:spPr>
+          <a:xfrm>
+            <a:off x="566928" y="3072384"/>
+            <a:ext cx="8010144" cy="685800"/>
+          </a:xfrm>
+          <a:prstGeom prst="rect">
+            <a:avLst/>
+          </a:prstGeom>
+          <a:noFill/>
+          <a:ln/>
+        </p:spPr>
+        <p:txBody>
+          <a:bodyPr wrap="square" lIns="0" tIns="0" rIns="0" bIns="0" rtlCol="0" anchor="ctr"/>
+          <a:lstStyle/>
+          <a:p>
+            <a:pPr indent="0" marL="0">
+              <a:buNone/>
+            </a:pPr>
+            <a:r>
+              <a:rPr lang="en-US" sz="1400" i="1" dirty="0">
+                <a:solidFill>
+                  <a:srgbClr val="1E293B"/>
+                </a:solidFill>
+                <a:latin typeface="Calibri" pitchFamily="34" charset="0"/>
+                <a:ea typeface="Calibri" pitchFamily="34" charset="-122"/>
+                <a:cs typeface="Calibri" pitchFamily="34" charset="-120"/>
+              </a:rPr>
+              <a:t>Corrected:</a:t>
+            </a:r>
+            <a:endParaRPr lang="en-US" sz="1400" dirty="0"/>
+          </a:p>
+          <a:p>
+            <a:pPr indent="0" marL="0">
+              <a:buNone/>
+            </a:pPr>
+            <a:endParaRPr lang="en-US" sz="1400" dirty="0"/>
+          </a:p>
+        </p:txBody>
+      </p:sp>
+      <p:sp>
+        <p:nvSpPr>
+          <p:cNvPr id="12" name="Text 10"/>
+          <p:cNvSpPr/>
+          <p:nvPr/>
+        </p:nvSpPr>
+        <p:spPr>
+          <a:xfrm>
+            <a:off x="566928" y="3767328"/>
+            <a:ext cx="8010144" cy="320040"/>
+          </a:xfrm>
+          <a:prstGeom prst="rect">
+            <a:avLst/>
+          </a:prstGeom>
+          <a:noFill/>
+          <a:ln/>
+        </p:spPr>
+        <p:txBody>
+          <a:bodyPr wrap="square" lIns="0" tIns="0" rIns="0" bIns="0" rtlCol="0" anchor="ctr"/>
+          <a:lstStyle/>
+          <a:p>
+            <a:pPr indent="0" marL="0">
+              <a:buNone/>
+            </a:pPr>
+            <a:r>
+              <a:rPr lang="en-US" sz="1200" dirty="0">
+                <a:solidFill>
+                  <a:srgbClr val="64748B"/>
+                </a:solidFill>
+                <a:latin typeface="Calibri" pitchFamily="34" charset="0"/>
+                <a:ea typeface="Calibri" pitchFamily="34" charset="-122"/>
+                <a:cs typeface="Calibri" pitchFamily="34" charset="-120"/>
+              </a:rPr>
+              <a:t>The Famous Museum of Art had been losing paintings , and Mr. Dart, the director , was terribly upset .</a:t>
+            </a:r>
+            <a:endParaRPr lang="en-US" sz="1200" dirty="0"/>
+          </a:p>
+        </p:txBody>
+      </p:sp>
+    </p:spTree>
+  </p:cSld>
+  <p:clrMapOvr>
+    <a:masterClrMapping/>
+  </p:clrMapOvr>
+</p:sld>
+</file>
+
+<file path=ppt/slides/slide9.xml><?xml version="1.0" encoding="utf-8"?>
+<p:sld xmlns:a="http://schemas.openxmlformats.org/drawingml/2006/main" xmlns:r="http://schemas.openxmlformats.org/officeDocument/2006/relationships" xmlns:p="http://schemas.openxmlformats.org/presentationml/2006/main">
+  <p:cSld name="Slide 9">
     <p:bg>
       <p:bgPr>
         <a:solidFill>
@@ -6009,91 +7422,122 @@
       </p:grpSpPr>
       <p:sp>
         <p:nvSpPr>
-          <p:cNvPr id="2" name="Text 0"/>
-          <p:cNvSpPr/>
-          <p:nvPr/>
-        </p:nvSpPr>
-        <p:spPr>
-          <a:xfrm>
-            <a:off x="365760" y="164592"/>
-            <a:ext cx="8412480" cy="566928"/>
-          </a:xfrm>
-          <a:prstGeom prst="rect">
-            <a:avLst/>
-          </a:prstGeom>
-          <a:noFill/>
-          <a:ln/>
-        </p:spPr>
-        <p:txBody>
-          <a:bodyPr wrap="square" lIns="0" tIns="0" rIns="0" bIns="0" rtlCol="0" anchor="ctr"/>
-          <a:lstStyle/>
-          <a:p>
-            <a:pPr algn="l" indent="0" marL="0">
-              <a:buNone/>
-            </a:pPr>
-            <a:r>
-              <a:rPr lang="en-US" sz="2800" b="1" dirty="0">
-                <a:solidFill>
-                  <a:srgbClr val="0E1C42"/>
-                </a:solidFill>
-                <a:latin typeface="Calibri" pitchFamily="34" charset="0"/>
-                <a:ea typeface="Calibri" pitchFamily="34" charset="-122"/>
-                <a:cs typeface="Calibri" pitchFamily="34" charset="-120"/>
-              </a:rPr>
-              <a:t>✅ Model Sentence — Study What's Right</a:t>
-            </a:r>
-            <a:endParaRPr lang="en-US" sz="2800" dirty="0"/>
-          </a:p>
-        </p:txBody>
-      </p:sp>
-      <p:sp>
-        <p:nvSpPr>
-          <p:cNvPr id="3" name="Shape 1"/>
-          <p:cNvSpPr/>
-          <p:nvPr/>
-        </p:nvSpPr>
-        <p:spPr>
-          <a:xfrm>
-            <a:off x="365760" y="749808"/>
-            <a:ext cx="8412480" cy="0"/>
-          </a:xfrm>
-          <a:prstGeom prst="line">
-            <a:avLst/>
-          </a:prstGeom>
-          <a:noFill/>
-          <a:ln w="19050">
-            <a:solidFill>
-              <a:srgbClr val="34B76F"/>
-            </a:solidFill>
-            <a:prstDash val="solid"/>
-          </a:ln>
-        </p:spPr>
-      </p:sp>
-      <p:sp>
-        <p:nvSpPr>
-          <p:cNvPr id="4" name="Shape 2"/>
-          <p:cNvSpPr/>
-          <p:nvPr/>
-        </p:nvSpPr>
-        <p:spPr>
-          <a:xfrm>
-            <a:off x="457200" y="1097280"/>
-            <a:ext cx="8229600" cy="914400"/>
+          <p:cNvPr id="2" name="Shape 0"/>
+          <p:cNvSpPr/>
+          <p:nvPr/>
+        </p:nvSpPr>
+        <p:spPr>
+          <a:xfrm>
+            <a:off x="0" y="0"/>
+            <a:ext cx="9144000" cy="566928"/>
+          </a:xfrm>
+          <a:prstGeom prst="rect">
+            <a:avLst/>
+          </a:prstGeom>
+          <a:solidFill>
+            <a:srgbClr val="55C8E8"/>
+          </a:solidFill>
+          <a:ln/>
+        </p:spPr>
+      </p:sp>
+      <p:sp>
+        <p:nvSpPr>
+          <p:cNvPr id="3" name="Text 1"/>
+          <p:cNvSpPr/>
+          <p:nvPr/>
+        </p:nvSpPr>
+        <p:spPr>
+          <a:xfrm>
+            <a:off x="365760" y="54864"/>
+            <a:ext cx="8412480" cy="457200"/>
+          </a:xfrm>
+          <a:prstGeom prst="rect">
+            <a:avLst/>
+          </a:prstGeom>
+          <a:noFill/>
+          <a:ln/>
+        </p:spPr>
+        <p:txBody>
+          <a:bodyPr wrap="square" lIns="0" tIns="0" rIns="0" bIns="0" rtlCol="0" anchor="ctr"/>
+          <a:lstStyle/>
+          <a:p>
+            <a:pPr indent="0" marL="0">
+              <a:buNone/>
+            </a:pPr>
+            <a:r>
+              <a:rPr lang="en-US" sz="2200" b="1" dirty="0">
+                <a:solidFill>
+                  <a:srgbClr val="FFFFFF"/>
+                </a:solidFill>
+                <a:latin typeface="Calibri" pitchFamily="34" charset="0"/>
+                <a:ea typeface="Calibri" pitchFamily="34" charset="-122"/>
+                <a:cs typeface="Calibri" pitchFamily="34" charset="-120"/>
+              </a:rPr>
+              <a:t>🌱  Morphology</a:t>
+            </a:r>
+            <a:endParaRPr lang="en-US" sz="2200" dirty="0"/>
+          </a:p>
+        </p:txBody>
+      </p:sp>
+      <p:sp>
+        <p:nvSpPr>
+          <p:cNvPr id="4" name="Text 2"/>
+          <p:cNvSpPr/>
+          <p:nvPr/>
+        </p:nvSpPr>
+        <p:spPr>
+          <a:xfrm>
+            <a:off x="365760" y="804672"/>
+            <a:ext cx="8229600" cy="237744"/>
+          </a:xfrm>
+          <a:prstGeom prst="rect">
+            <a:avLst/>
+          </a:prstGeom>
+          <a:noFill/>
+          <a:ln/>
+        </p:spPr>
+        <p:txBody>
+          <a:bodyPr wrap="square" lIns="0" tIns="0" rIns="0" bIns="0" rtlCol="0" anchor="ctr"/>
+          <a:lstStyle/>
+          <a:p>
+            <a:pPr indent="0" marL="0">
+              <a:buNone/>
+            </a:pPr>
+            <a:r>
+              <a:rPr lang="en-US" sz="1100" b="1" spc="100" kern="0" dirty="0">
+                <a:solidFill>
+                  <a:srgbClr val="8B6FC0"/>
+                </a:solidFill>
+                <a:latin typeface="Calibri" pitchFamily="34" charset="0"/>
+                <a:ea typeface="Calibri" pitchFamily="34" charset="-122"/>
+                <a:cs typeface="Calibri" pitchFamily="34" charset="-120"/>
+              </a:rPr>
+              <a:t>PREFIX PRE- MEANS BEFORE</a:t>
+            </a:r>
+            <a:endParaRPr lang="en-US" sz="1100" dirty="0"/>
+          </a:p>
+        </p:txBody>
+      </p:sp>
+      <p:sp>
+        <p:nvSpPr>
+          <p:cNvPr id="5" name="Shape 3"/>
+          <p:cNvSpPr/>
+          <p:nvPr/>
+        </p:nvSpPr>
+        <p:spPr>
+          <a:xfrm>
+            <a:off x="365760" y="1097280"/>
+            <a:ext cx="8412480" cy="621792"/>
           </a:xfrm>
           <a:prstGeom prst="roundRect">
             <a:avLst>
-              <a:gd name="adj" fmla="val 10000"/>
+              <a:gd name="adj" fmla="val 14706"/>
             </a:avLst>
           </a:prstGeom>
           <a:solidFill>
-            <a:srgbClr val="E8F8EF"/>
+            <a:srgbClr val="F0E8FF"/>
           </a:solidFill>
-          <a:ln w="12700">
-            <a:solidFill>
-              <a:srgbClr val="34B76F"/>
-            </a:solidFill>
-            <a:prstDash val="solid"/>
-          </a:ln>
+          <a:ln/>
           <a:effectLst>
             <a:outerShdw sx="100000" sy="100000" kx="0" ky="0" algn="bl" rotWithShape="0" blurRad="101600" dist="38100" dir="2700000">
               <a:srgbClr val="000000">
@@ -6105,30 +7549,30 @@
       </p:sp>
       <p:sp>
         <p:nvSpPr>
-          <p:cNvPr id="5" name="Text 3"/>
-          <p:cNvSpPr/>
-          <p:nvPr/>
-        </p:nvSpPr>
-        <p:spPr>
-          <a:xfrm>
-            <a:off x="640080" y="1207008"/>
-            <a:ext cx="7863840" cy="685800"/>
-          </a:xfrm>
-          <a:prstGeom prst="rect">
-            <a:avLst/>
-          </a:prstGeom>
-          <a:noFill/>
-          <a:ln/>
-        </p:spPr>
-        <p:txBody>
-          <a:bodyPr wrap="square" lIns="0" tIns="0" rIns="0" bIns="0" rtlCol="0" anchor="ctr"/>
-          <a:lstStyle/>
-          <a:p>
-            <a:pPr indent="0" marL="0">
-              <a:buNone/>
-            </a:pPr>
-            <a:r>
-              <a:rPr lang="en-US" sz="1800" i="1" dirty="0">
+          <p:cNvPr id="6" name="Text 4"/>
+          <p:cNvSpPr/>
+          <p:nvPr/>
+        </p:nvSpPr>
+        <p:spPr>
+          <a:xfrm>
+            <a:off x="594360" y="1216152"/>
+            <a:ext cx="7863840" cy="384048"/>
+          </a:xfrm>
+          <a:prstGeom prst="rect">
+            <a:avLst/>
+          </a:prstGeom>
+          <a:noFill/>
+          <a:ln/>
+        </p:spPr>
+        <p:txBody>
+          <a:bodyPr wrap="square" lIns="0" tIns="0" rIns="0" bIns="0" rtlCol="0" anchor="ctr"/>
+          <a:lstStyle/>
+          <a:p>
+            <a:pPr indent="0" marL="0">
+              <a:buNone/>
+            </a:pPr>
+            <a:r>
+              <a:rPr lang="en-US" sz="1500" dirty="0">
                 <a:solidFill>
                   <a:srgbClr val="1E293B"/>
                 </a:solidFill>
@@ -6136,192 +7580,32 @@
                 <a:ea typeface="Calibri" pitchFamily="34" charset="-122"/>
                 <a:cs typeface="Calibri" pitchFamily="34" charset="-120"/>
               </a:rPr>
-              <a:t>Mr. Dart took him into the main hall, where the biggest and most important paintings were hung.</a:t>
-            </a:r>
-            <a:endParaRPr lang="en-US" sz="1800" dirty="0"/>
-          </a:p>
-        </p:txBody>
-      </p:sp>
-    </p:spTree>
-  </p:cSld>
-  <p:clrMapOvr>
-    <a:masterClrMapping/>
-  </p:clrMapOvr>
-</p:sld>
-</file>
-
-<file path=ppt/slides/slide8.xml><?xml version="1.0" encoding="utf-8"?>
-<p:sld xmlns:a="http://schemas.openxmlformats.org/drawingml/2006/main" xmlns:r="http://schemas.openxmlformats.org/officeDocument/2006/relationships" xmlns:p="http://schemas.openxmlformats.org/presentationml/2006/main">
-  <p:cSld name="Slide 8">
-    <p:bg>
-      <p:bgPr>
-        <a:solidFill>
-          <a:srgbClr val="E5F7FC"/>
-        </a:solidFill>
-      </p:bgPr>
-    </p:bg>
-    <p:spTree>
-      <p:nvGrpSpPr>
-        <p:cNvPr id="1" name=""/>
-        <p:cNvGrpSpPr/>
-        <p:nvPr/>
-      </p:nvGrpSpPr>
-      <p:grpSpPr>
-        <a:xfrm>
-          <a:off x="0" y="0"/>
-          <a:ext cx="0" cy="0"/>
-          <a:chOff x="0" y="0"/>
-          <a:chExt cx="0" cy="0"/>
-        </a:xfrm>
-      </p:grpSpPr>
-      <p:sp>
-        <p:nvSpPr>
-          <p:cNvPr id="2" name="Text 0"/>
-          <p:cNvSpPr/>
-          <p:nvPr/>
-        </p:nvSpPr>
-        <p:spPr>
-          <a:xfrm>
-            <a:off x="365760" y="164592"/>
-            <a:ext cx="5943600" cy="566928"/>
-          </a:xfrm>
-          <a:prstGeom prst="rect">
-            <a:avLst/>
-          </a:prstGeom>
-          <a:noFill/>
-          <a:ln/>
-        </p:spPr>
-        <p:txBody>
-          <a:bodyPr wrap="square" lIns="0" tIns="0" rIns="0" bIns="0" rtlCol="0" anchor="ctr"/>
-          <a:lstStyle/>
-          <a:p>
-            <a:pPr algn="l" indent="0" marL="0">
-              <a:buNone/>
-            </a:pPr>
-            <a:r>
-              <a:rPr lang="en-US" sz="2800" b="1" dirty="0">
-                <a:solidFill>
-                  <a:srgbClr val="0E1C42"/>
-                </a:solidFill>
-                <a:latin typeface="Calibri" pitchFamily="34" charset="0"/>
-                <a:ea typeface="Calibri" pitchFamily="34" charset="-122"/>
-                <a:cs typeface="Calibri" pitchFamily="34" charset="-120"/>
-              </a:rPr>
-              <a:t>🔧 Fix-It Sentence — Now You Try</a:t>
-            </a:r>
-            <a:endParaRPr lang="en-US" sz="2800" dirty="0"/>
-          </a:p>
-        </p:txBody>
-      </p:sp>
-      <p:sp>
-        <p:nvSpPr>
-          <p:cNvPr id="3" name="Shape 1"/>
-          <p:cNvSpPr/>
-          <p:nvPr/>
-        </p:nvSpPr>
-        <p:spPr>
-          <a:xfrm>
-            <a:off x="365760" y="749808"/>
-            <a:ext cx="8412480" cy="0"/>
-          </a:xfrm>
-          <a:prstGeom prst="line">
-            <a:avLst/>
-          </a:prstGeom>
-          <a:noFill/>
-          <a:ln w="19050">
-            <a:solidFill>
-              <a:srgbClr val="5CB85C"/>
-            </a:solidFill>
-            <a:prstDash val="solid"/>
-          </a:ln>
-        </p:spPr>
-      </p:sp>
-      <p:sp>
-        <p:nvSpPr>
-          <p:cNvPr id="4" name="Shape 2"/>
-          <p:cNvSpPr/>
-          <p:nvPr/>
-        </p:nvSpPr>
-        <p:spPr>
-          <a:xfrm>
-            <a:off x="6492240" y="173736"/>
-            <a:ext cx="2286000" cy="502920"/>
+              <a:t>🌱  You should preheat the oven before baking cookies.</a:t>
+            </a:r>
+            <a:endParaRPr lang="en-US" sz="1500" dirty="0"/>
+          </a:p>
+        </p:txBody>
+      </p:sp>
+      <p:sp>
+        <p:nvSpPr>
+          <p:cNvPr id="7" name="Shape 5"/>
+          <p:cNvSpPr/>
+          <p:nvPr/>
+        </p:nvSpPr>
+        <p:spPr>
+          <a:xfrm>
+            <a:off x="365760" y="1792224"/>
+            <a:ext cx="8412480" cy="621792"/>
           </a:xfrm>
           <a:prstGeom prst="roundRect">
             <a:avLst>
-              <a:gd name="adj" fmla="val 21818"/>
+              <a:gd name="adj" fmla="val 14706"/>
             </a:avLst>
           </a:prstGeom>
           <a:solidFill>
-            <a:srgbClr val="5CB85C"/>
+            <a:srgbClr val="F8F4FF"/>
           </a:solidFill>
           <a:ln/>
-        </p:spPr>
-      </p:sp>
-      <p:sp>
-        <p:nvSpPr>
-          <p:cNvPr id="5" name="Text 3"/>
-          <p:cNvSpPr/>
-          <p:nvPr/>
-        </p:nvSpPr>
-        <p:spPr>
-          <a:xfrm>
-            <a:off x="6492240" y="173736"/>
-            <a:ext cx="2286000" cy="502920"/>
-          </a:xfrm>
-          <a:prstGeom prst="rect">
-            <a:avLst/>
-          </a:prstGeom>
-          <a:noFill/>
-          <a:ln/>
-        </p:spPr>
-        <p:txBody>
-          <a:bodyPr wrap="square" lIns="0" tIns="0" rIns="0" bIns="0" rtlCol="0" anchor="ctr"/>
-          <a:lstStyle/>
-          <a:p>
-            <a:pPr algn="ctr" indent="0" marL="0">
-              <a:buNone/>
-            </a:pPr>
-            <a:r>
-              <a:rPr lang="en-US" sz="1100" b="1" dirty="0">
-                <a:solidFill>
-                  <a:srgbClr val="0E1C42"/>
-                </a:solidFill>
-                <a:latin typeface="Calibri" pitchFamily="34" charset="0"/>
-                <a:ea typeface="Calibri" pitchFamily="34" charset="-122"/>
-                <a:cs typeface="Calibri" pitchFamily="34" charset="-120"/>
-              </a:rPr>
-              <a:t>CHAT PROMPT</a:t>
-            </a:r>
-            <a:endParaRPr lang="en-US" sz="1100" dirty="0"/>
-          </a:p>
-        </p:txBody>
-      </p:sp>
-      <p:sp>
-        <p:nvSpPr>
-          <p:cNvPr id="6" name="Shape 4"/>
-          <p:cNvSpPr/>
-          <p:nvPr/>
-        </p:nvSpPr>
-        <p:spPr>
-          <a:xfrm>
-            <a:off x="457200" y="1005840"/>
-            <a:ext cx="8229600" cy="640080"/>
-          </a:xfrm>
-          <a:prstGeom prst="roundRect">
-            <a:avLst>
-              <a:gd name="adj" fmla="val 14286"/>
-            </a:avLst>
-          </a:prstGeom>
-          <a:solidFill>
-            <a:srgbClr val="F8FAFC"/>
-          </a:solidFill>
-          <a:ln w="12700">
-            <a:solidFill>
-              <a:srgbClr val="C7922C"/>
-            </a:solidFill>
-            <a:prstDash val="solid"/>
-          </a:ln>
           <a:effectLst>
             <a:outerShdw sx="100000" sy="100000" kx="0" ky="0" algn="bl" rotWithShape="0" blurRad="101600" dist="38100" dir="2700000">
               <a:srgbClr val="000000">
@@ -6333,30 +7617,30 @@
       </p:sp>
       <p:sp>
         <p:nvSpPr>
-          <p:cNvPr id="7" name="Text 5"/>
-          <p:cNvSpPr/>
-          <p:nvPr/>
-        </p:nvSpPr>
-        <p:spPr>
-          <a:xfrm>
-            <a:off x="640080" y="1115568"/>
-            <a:ext cx="7863840" cy="411480"/>
-          </a:xfrm>
-          <a:prstGeom prst="rect">
-            <a:avLst/>
-          </a:prstGeom>
-          <a:noFill/>
-          <a:ln/>
-        </p:spPr>
-        <p:txBody>
-          <a:bodyPr wrap="square" lIns="0" tIns="0" rIns="0" bIns="0" rtlCol="0" anchor="ctr"/>
-          <a:lstStyle/>
-          <a:p>
-            <a:pPr indent="0" marL="0">
-              <a:buNone/>
-            </a:pPr>
-            <a:r>
-              <a:rPr lang="en-US" sz="1800" i="1" dirty="0">
+          <p:cNvPr id="8" name="Text 6"/>
+          <p:cNvSpPr/>
+          <p:nvPr/>
+        </p:nvSpPr>
+        <p:spPr>
+          <a:xfrm>
+            <a:off x="594360" y="1911096"/>
+            <a:ext cx="7863840" cy="384048"/>
+          </a:xfrm>
+          <a:prstGeom prst="rect">
+            <a:avLst/>
+          </a:prstGeom>
+          <a:noFill/>
+          <a:ln/>
+        </p:spPr>
+        <p:txBody>
+          <a:bodyPr wrap="square" lIns="0" tIns="0" rIns="0" bIns="0" rtlCol="0" anchor="ctr"/>
+          <a:lstStyle/>
+          <a:p>
+            <a:pPr indent="0" marL="0">
+              <a:buNone/>
+            </a:pPr>
+            <a:r>
+              <a:rPr lang="en-US" sz="1500" dirty="0">
                 <a:solidFill>
                   <a:srgbClr val="1E293B"/>
                 </a:solidFill>
@@ -6364,192 +7648,32 @@
                 <a:ea typeface="Calibri" pitchFamily="34" charset="-122"/>
                 <a:cs typeface="Calibri" pitchFamily="34" charset="-120"/>
               </a:rPr>
-              <a:t>the famous museum of art had been losing paintings and mr dart the director was terribly upset</a:t>
-            </a:r>
-            <a:endParaRPr lang="en-US" sz="1800" dirty="0"/>
-          </a:p>
-        </p:txBody>
-      </p:sp>
-    </p:spTree>
-  </p:cSld>
-  <p:clrMapOvr>
-    <a:masterClrMapping/>
-  </p:clrMapOvr>
-</p:sld>
-</file>
-
-<file path=ppt/slides/slide9.xml><?xml version="1.0" encoding="utf-8"?>
-<p:sld xmlns:a="http://schemas.openxmlformats.org/drawingml/2006/main" xmlns:r="http://schemas.openxmlformats.org/officeDocument/2006/relationships" xmlns:p="http://schemas.openxmlformats.org/presentationml/2006/main">
-  <p:cSld name="Slide 9">
-    <p:bg>
-      <p:bgPr>
-        <a:solidFill>
-          <a:srgbClr val="E5F7FC"/>
-        </a:solidFill>
-      </p:bgPr>
-    </p:bg>
-    <p:spTree>
-      <p:nvGrpSpPr>
-        <p:cNvPr id="1" name=""/>
-        <p:cNvGrpSpPr/>
-        <p:nvPr/>
-      </p:nvGrpSpPr>
-      <p:grpSpPr>
-        <a:xfrm>
-          <a:off x="0" y="0"/>
-          <a:ext cx="0" cy="0"/>
-          <a:chOff x="0" y="0"/>
-          <a:chExt cx="0" cy="0"/>
-        </a:xfrm>
-      </p:grpSpPr>
-      <p:sp>
-        <p:nvSpPr>
-          <p:cNvPr id="2" name="Text 0"/>
-          <p:cNvSpPr/>
-          <p:nvPr/>
-        </p:nvSpPr>
-        <p:spPr>
-          <a:xfrm>
-            <a:off x="365760" y="164592"/>
-            <a:ext cx="5943600" cy="566928"/>
-          </a:xfrm>
-          <a:prstGeom prst="rect">
-            <a:avLst/>
-          </a:prstGeom>
-          <a:noFill/>
-          <a:ln/>
-        </p:spPr>
-        <p:txBody>
-          <a:bodyPr wrap="square" lIns="0" tIns="0" rIns="0" bIns="0" rtlCol="0" anchor="ctr"/>
-          <a:lstStyle/>
-          <a:p>
-            <a:pPr algn="l" indent="0" marL="0">
-              <a:buNone/>
-            </a:pPr>
-            <a:r>
-              <a:rPr lang="en-US" sz="2800" b="1" dirty="0">
-                <a:solidFill>
-                  <a:srgbClr val="0E1C42"/>
-                </a:solidFill>
-                <a:latin typeface="Calibri" pitchFamily="34" charset="0"/>
-                <a:ea typeface="Calibri" pitchFamily="34" charset="-122"/>
-                <a:cs typeface="Calibri" pitchFamily="34" charset="-120"/>
-              </a:rPr>
-              <a:t>🔧 Fix-It Sentence — Answer Revealed</a:t>
-            </a:r>
-            <a:endParaRPr lang="en-US" sz="2800" dirty="0"/>
-          </a:p>
-        </p:txBody>
-      </p:sp>
-      <p:sp>
-        <p:nvSpPr>
-          <p:cNvPr id="3" name="Shape 1"/>
-          <p:cNvSpPr/>
-          <p:nvPr/>
-        </p:nvSpPr>
-        <p:spPr>
-          <a:xfrm>
-            <a:off x="365760" y="749808"/>
-            <a:ext cx="8412480" cy="0"/>
-          </a:xfrm>
-          <a:prstGeom prst="line">
-            <a:avLst/>
-          </a:prstGeom>
-          <a:noFill/>
-          <a:ln w="19050">
-            <a:solidFill>
-              <a:srgbClr val="5CB85C"/>
-            </a:solidFill>
-            <a:prstDash val="solid"/>
-          </a:ln>
-        </p:spPr>
-      </p:sp>
-      <p:sp>
-        <p:nvSpPr>
-          <p:cNvPr id="4" name="Shape 2"/>
-          <p:cNvSpPr/>
-          <p:nvPr/>
-        </p:nvSpPr>
-        <p:spPr>
-          <a:xfrm>
-            <a:off x="6492240" y="173736"/>
-            <a:ext cx="2286000" cy="502920"/>
+              <a:t>🌱  We got to preview the movie before it came out.</a:t>
+            </a:r>
+            <a:endParaRPr lang="en-US" sz="1500" dirty="0"/>
+          </a:p>
+        </p:txBody>
+      </p:sp>
+      <p:sp>
+        <p:nvSpPr>
+          <p:cNvPr id="9" name="Shape 7"/>
+          <p:cNvSpPr/>
+          <p:nvPr/>
+        </p:nvSpPr>
+        <p:spPr>
+          <a:xfrm>
+            <a:off x="365760" y="2487168"/>
+            <a:ext cx="8412480" cy="621792"/>
           </a:xfrm>
           <a:prstGeom prst="roundRect">
             <a:avLst>
-              <a:gd name="adj" fmla="val 21818"/>
+              <a:gd name="adj" fmla="val 14706"/>
             </a:avLst>
           </a:prstGeom>
           <a:solidFill>
-            <a:srgbClr val="5CB85C"/>
+            <a:srgbClr val="F0E8FF"/>
           </a:solidFill>
           <a:ln/>
-        </p:spPr>
-      </p:sp>
-      <p:sp>
-        <p:nvSpPr>
-          <p:cNvPr id="5" name="Text 3"/>
-          <p:cNvSpPr/>
-          <p:nvPr/>
-        </p:nvSpPr>
-        <p:spPr>
-          <a:xfrm>
-            <a:off x="6492240" y="173736"/>
-            <a:ext cx="2286000" cy="502920"/>
-          </a:xfrm>
-          <a:prstGeom prst="rect">
-            <a:avLst/>
-          </a:prstGeom>
-          <a:noFill/>
-          <a:ln/>
-        </p:spPr>
-        <p:txBody>
-          <a:bodyPr wrap="square" lIns="0" tIns="0" rIns="0" bIns="0" rtlCol="0" anchor="ctr"/>
-          <a:lstStyle/>
-          <a:p>
-            <a:pPr algn="ctr" indent="0" marL="0">
-              <a:buNone/>
-            </a:pPr>
-            <a:r>
-              <a:rPr lang="en-US" sz="1100" b="1" dirty="0">
-                <a:solidFill>
-                  <a:srgbClr val="0E1C42"/>
-                </a:solidFill>
-                <a:latin typeface="Calibri" pitchFamily="34" charset="0"/>
-                <a:ea typeface="Calibri" pitchFamily="34" charset="-122"/>
-                <a:cs typeface="Calibri" pitchFamily="34" charset="-120"/>
-              </a:rPr>
-              <a:t>CHAT PROMPT</a:t>
-            </a:r>
-            <a:endParaRPr lang="en-US" sz="1100" dirty="0"/>
-          </a:p>
-        </p:txBody>
-      </p:sp>
-      <p:sp>
-        <p:nvSpPr>
-          <p:cNvPr id="6" name="Shape 4"/>
-          <p:cNvSpPr/>
-          <p:nvPr/>
-        </p:nvSpPr>
-        <p:spPr>
-          <a:xfrm>
-            <a:off x="457200" y="1005840"/>
-            <a:ext cx="8229600" cy="640080"/>
-          </a:xfrm>
-          <a:prstGeom prst="roundRect">
-            <a:avLst>
-              <a:gd name="adj" fmla="val 14286"/>
-            </a:avLst>
-          </a:prstGeom>
-          <a:solidFill>
-            <a:srgbClr val="F8FAFC"/>
-          </a:solidFill>
-          <a:ln w="12700">
-            <a:solidFill>
-              <a:srgbClr val="C7922C"/>
-            </a:solidFill>
-            <a:prstDash val="solid"/>
-          </a:ln>
           <a:effectLst>
             <a:outerShdw sx="100000" sy="100000" kx="0" ky="0" algn="bl" rotWithShape="0" blurRad="101600" dist="38100" dir="2700000">
               <a:srgbClr val="000000">
@@ -6561,30 +7685,30 @@
       </p:sp>
       <p:sp>
         <p:nvSpPr>
-          <p:cNvPr id="7" name="Text 5"/>
-          <p:cNvSpPr/>
-          <p:nvPr/>
-        </p:nvSpPr>
-        <p:spPr>
-          <a:xfrm>
-            <a:off x="640080" y="1115568"/>
-            <a:ext cx="7863840" cy="411480"/>
-          </a:xfrm>
-          <a:prstGeom prst="rect">
-            <a:avLst/>
-          </a:prstGeom>
-          <a:noFill/>
-          <a:ln/>
-        </p:spPr>
-        <p:txBody>
-          <a:bodyPr wrap="square" lIns="0" tIns="0" rIns="0" bIns="0" rtlCol="0" anchor="ctr"/>
-          <a:lstStyle/>
-          <a:p>
-            <a:pPr indent="0" marL="0">
-              <a:buNone/>
-            </a:pPr>
-            <a:r>
-              <a:rPr lang="en-US" sz="1800" i="1" dirty="0">
+          <p:cNvPr id="10" name="Text 8"/>
+          <p:cNvSpPr/>
+          <p:nvPr/>
+        </p:nvSpPr>
+        <p:spPr>
+          <a:xfrm>
+            <a:off x="594360" y="2606040"/>
+            <a:ext cx="7863840" cy="384048"/>
+          </a:xfrm>
+          <a:prstGeom prst="rect">
+            <a:avLst/>
+          </a:prstGeom>
+          <a:noFill/>
+          <a:ln/>
+        </p:spPr>
+        <p:txBody>
+          <a:bodyPr wrap="square" lIns="0" tIns="0" rIns="0" bIns="0" rtlCol="0" anchor="ctr"/>
+          <a:lstStyle/>
+          <a:p>
+            <a:pPr indent="0" marL="0">
+              <a:buNone/>
+            </a:pPr>
+            <a:r>
+              <a:rPr lang="en-US" sz="1500" dirty="0">
                 <a:solidFill>
                   <a:srgbClr val="1E293B"/>
                 </a:solidFill>
@@ -6592,87 +7716,77 @@
                 <a:ea typeface="Calibri" pitchFamily="34" charset="-122"/>
                 <a:cs typeface="Calibri" pitchFamily="34" charset="-120"/>
               </a:rPr>
-              <a:t>the famous museum of art had been losing paintings and mr dart the director was terribly upset</a:t>
-            </a:r>
-            <a:endParaRPr lang="en-US" sz="1800" dirty="0"/>
-          </a:p>
-        </p:txBody>
-      </p:sp>
-      <p:sp>
-        <p:nvSpPr>
-          <p:cNvPr id="8" name="Text 6"/>
-          <p:cNvSpPr/>
-          <p:nvPr/>
-        </p:nvSpPr>
-        <p:spPr>
-          <a:xfrm>
-            <a:off x="457200" y="1737360"/>
-            <a:ext cx="8046720" cy="292608"/>
-          </a:xfrm>
-          <a:prstGeom prst="rect">
-            <a:avLst/>
-          </a:prstGeom>
-          <a:noFill/>
-          <a:ln/>
-        </p:spPr>
-        <p:txBody>
-          <a:bodyPr wrap="square" lIns="0" tIns="0" rIns="0" bIns="0" rtlCol="0" anchor="ctr"/>
-          <a:lstStyle/>
-          <a:p>
-            <a:pPr indent="0" marL="0">
-              <a:buNone/>
-            </a:pPr>
-            <a:r>
-              <a:rPr lang="en-US" sz="1100" b="1" spc="200" kern="0" dirty="0">
-                <a:solidFill>
-                  <a:srgbClr val="64748B"/>
-                </a:solidFill>
-                <a:latin typeface="Calibri" pitchFamily="34" charset="0"/>
-                <a:ea typeface="Calibri" pitchFamily="34" charset="-122"/>
-                <a:cs typeface="Calibri" pitchFamily="34" charset="-120"/>
-              </a:rPr>
-              <a:t>WHY</a:t>
-            </a:r>
-            <a:endParaRPr lang="en-US" sz="1100" dirty="0"/>
-          </a:p>
-        </p:txBody>
-      </p:sp>
-      <p:sp>
-        <p:nvSpPr>
-          <p:cNvPr id="9" name="Text 7"/>
-          <p:cNvSpPr/>
-          <p:nvPr/>
-        </p:nvSpPr>
-        <p:spPr>
-          <a:xfrm>
-            <a:off x="640080" y="2011680"/>
-            <a:ext cx="7863840" cy="502920"/>
-          </a:xfrm>
-          <a:prstGeom prst="rect">
-            <a:avLst/>
-          </a:prstGeom>
-          <a:noFill/>
-          <a:ln/>
-        </p:spPr>
-        <p:txBody>
-          <a:bodyPr wrap="square" lIns="0" tIns="0" rIns="0" bIns="0" rtlCol="0" anchor="ctr"/>
-          <a:lstStyle/>
-          <a:p>
-            <a:pPr indent="0" marL="0">
-              <a:buNone/>
-            </a:pPr>
-            <a:r>
-              <a:rPr lang="en-US" sz="1300" i="1" dirty="0">
-                <a:solidFill>
-                  <a:srgbClr val="64748B"/>
-                </a:solidFill>
-                <a:latin typeface="Calibri" pitchFamily="34" charset="0"/>
-                <a:ea typeface="Calibri" pitchFamily="34" charset="-122"/>
-                <a:cs typeface="Calibri" pitchFamily="34" charset="-120"/>
-              </a:rPr>
-              <a:t>The Famous Museum of Art had been losing paintings , and Mr. Dart, the director , was terribly upset .</a:t>
-            </a:r>
-            <a:endParaRPr lang="en-US" sz="1300" dirty="0"/>
+              <a:t>🌱  You can prepay for your lunch so you don’t have to bring money.</a:t>
+            </a:r>
+            <a:endParaRPr lang="en-US" sz="1500" dirty="0"/>
+          </a:p>
+        </p:txBody>
+      </p:sp>
+      <p:sp>
+        <p:nvSpPr>
+          <p:cNvPr id="11" name="Shape 9"/>
+          <p:cNvSpPr/>
+          <p:nvPr/>
+        </p:nvSpPr>
+        <p:spPr>
+          <a:xfrm>
+            <a:off x="365760" y="3182112"/>
+            <a:ext cx="8412480" cy="621792"/>
+          </a:xfrm>
+          <a:prstGeom prst="roundRect">
+            <a:avLst>
+              <a:gd name="adj" fmla="val 14706"/>
+            </a:avLst>
+          </a:prstGeom>
+          <a:solidFill>
+            <a:srgbClr val="F8F4FF"/>
+          </a:solidFill>
+          <a:ln/>
+          <a:effectLst>
+            <a:outerShdw sx="100000" sy="100000" kx="0" ky="0" algn="bl" rotWithShape="0" blurRad="101600" dist="38100" dir="2700000">
+              <a:srgbClr val="000000">
+                <a:alpha val="12000"/>
+              </a:srgbClr>
+            </a:outerShdw>
+          </a:effectLst>
+        </p:spPr>
+      </p:sp>
+      <p:sp>
+        <p:nvSpPr>
+          <p:cNvPr id="12" name="Text 10"/>
+          <p:cNvSpPr/>
+          <p:nvPr/>
+        </p:nvSpPr>
+        <p:spPr>
+          <a:xfrm>
+            <a:off x="594360" y="3300984"/>
+            <a:ext cx="7863840" cy="384048"/>
+          </a:xfrm>
+          <a:prstGeom prst="rect">
+            <a:avLst/>
+          </a:prstGeom>
+          <a:noFill/>
+          <a:ln/>
+        </p:spPr>
+        <p:txBody>
+          <a:bodyPr wrap="square" lIns="0" tIns="0" rIns="0" bIns="0" rtlCol="0" anchor="ctr"/>
+          <a:lstStyle/>
+          <a:p>
+            <a:pPr indent="0" marL="0">
+              <a:buNone/>
+            </a:pPr>
+            <a:r>
+              <a:rPr lang="en-US" sz="1500" dirty="0">
+                <a:solidFill>
+                  <a:srgbClr val="1E293B"/>
+                </a:solidFill>
+                <a:latin typeface="Calibri" pitchFamily="34" charset="0"/>
+                <a:ea typeface="Calibri" pitchFamily="34" charset="-122"/>
+                <a:cs typeface="Calibri" pitchFamily="34" charset="-120"/>
+              </a:rPr>
+              <a:t>🌱  My little sister goes to preschool because she is only four.</a:t>
+            </a:r>
+            <a:endParaRPr lang="en-US" sz="1500" dirty="0"/>
           </a:p>
         </p:txBody>
       </p:sp>

--- a/Planning docs/Slides/lesson-4-3-teacher-slides.pptx
+++ b/Planning docs/Slides/lesson-4-3-teacher-slides.pptx
@@ -5068,24 +5068,7 @@
                 <a:ea typeface="Calibri" pitchFamily="34" charset="-122"/>
                 <a:cs typeface="Calibri" pitchFamily="34" charset="-120"/>
               </a:rPr>
-              <a:t>•  Today you’ll compare the story’s Famous Museum with real museums. What do you already know about museums? How might a real museum be different from the one in the story?</a:t>
-            </a:r>
-            <a:endParaRPr lang="en-US" sz="1500" dirty="0"/>
-          </a:p>
-          <a:p>
-            <a:pPr indent="0" marL="0">
-              <a:buNone/>
-            </a:pPr>
-            <a:r>
-              <a:rPr lang="en-US" sz="1500" dirty="0">
-                <a:solidFill>
-                  <a:srgbClr val="1E293B"/>
-                </a:solidFill>
-                <a:latin typeface="Calibri" pitchFamily="34" charset="0"/>
-                <a:ea typeface="Calibri" pitchFamily="34" charset="-122"/>
-                <a:cs typeface="Calibri" pitchFamily="34" charset="-120"/>
-              </a:rPr>
-              <a:t>•  In the story, the museum has a most expensive painting in the world. What makes art valuable in real life?</a:t>
+              <a:t>•  Stop after the part about guards watching the galleries and cameras recording everything. Real museums already have guards and cameras. So why did Mr. Dart need Stanley’s plan at all?</a:t>
             </a:r>
             <a:endParaRPr lang="en-US" sz="1500" dirty="0"/>
           </a:p>
